--- a/Zadanie_3/Zadanie3_Prezentacia.pptx
+++ b/Zadanie_3/Zadanie3_Prezentacia.pptx
@@ -4,6 +4,9 @@
   <p:sldMasterIdLst>
     <p:sldMasterId id="2147483648" r:id="rId1"/>
   </p:sldMasterIdLst>
+  <p:notesMasterIdLst>
+    <p:notesMasterId r:id="rId11"/>
+  </p:notesMasterIdLst>
   <p:sldIdLst>
     <p:sldId id="256" r:id="rId2"/>
     <p:sldId id="257" r:id="rId3"/>
@@ -13,11 +16,9 @@
     <p:sldId id="261" r:id="rId7"/>
     <p:sldId id="262" r:id="rId8"/>
     <p:sldId id="263" r:id="rId9"/>
+    <p:sldId id="264" r:id="rId10"/>
   </p:sldIdLst>
-  <p:notesMasterIdLst>
-    <p:notesMasterId r:id="rId10"/>
-  </p:notesMasterIdLst>
-  <p:sldSz cx="9144000" cy="5143500"/>
+  <p:sldSz cx="9144000" cy="5143500" type="screen16x9"/>
   <p:notesSz cx="5143500" cy="9144000"/>
   <p:defaultTextStyle>
     <a:lvl1pPr marL="0" algn="l" defTabSz="914400" rtl="0" eaLnBrk="1" latinLnBrk="0" hangingPunct="1">
@@ -111,6 +112,11 @@
       </a:defRPr>
     </a:lvl9pPr>
   </p:defaultTextStyle>
+  <p:extLst>
+    <p:ext uri="{EFAFB233-063F-42B5-8137-9DF3F51BA10A}">
+      <p15:sldGuideLst xmlns:p15="http://schemas.microsoft.com/office/powerpoint/2012/main"/>
+    </p:ext>
+  </p:extLst>
 </p:presentation>
 </file>
 
@@ -136,234 +142,10 @@
           <a:chExt cx="0" cy="0"/>
         </a:xfrm>
       </p:grpSpPr>
-      <p:sp>
-        <p:nvSpPr>
-          <p:cNvPr id="2" name="Header Placeholder 1"/>
-          <p:cNvSpPr>
-            <a:spLocks noGrp="1"/>
-          </p:cNvSpPr>
-          <p:nvPr>
-            <p:ph type="hdr" sz="quarter"/>
-          </p:nvPr>
-        </p:nvSpPr>
-        <p:spPr>
-          <a:xfrm>
-            <a:off x="0" y="0"/>
-            <a:ext cx="2971800" cy="458788"/>
-          </a:xfrm>
-          <a:prstGeom prst="rect">
-            <a:avLst/>
-          </a:prstGeom>
-        </p:spPr>
-        <p:txBody>
-          <a:bodyPr vert="horz" lIns="91440" tIns="45720" rIns="91440" bIns="45720" rtlCol="0"/>
-          <a:lstStyle>
-            <a:lvl1pPr algn="l">
-              <a:defRPr sz="1200"/>
-            </a:lvl1pPr>
-          </a:lstStyle>
-          <a:p>
-            <a:endParaRPr lang="en-US"/>
-          </a:p>
-        </p:txBody>
-      </p:sp>
-      <p:sp>
-        <p:nvSpPr>
-          <p:cNvPr id="3" name="Date Placeholder 2"/>
-          <p:cNvSpPr>
-            <a:spLocks noGrp="1"/>
-          </p:cNvSpPr>
-          <p:nvPr>
-            <p:ph type="dt" idx="1"/>
-          </p:nvPr>
-        </p:nvSpPr>
-        <p:spPr>
-          <a:xfrm>
-            <a:off x="3884613" y="0"/>
-            <a:ext cx="2971800" cy="458788"/>
-          </a:xfrm>
-          <a:prstGeom prst="rect">
-            <a:avLst/>
-          </a:prstGeom>
-        </p:spPr>
-        <p:txBody>
-          <a:bodyPr vert="horz" lIns="91440" tIns="45720" rIns="91440" bIns="45720" rtlCol="0"/>
-          <a:lstStyle>
-            <a:lvl1pPr algn="r">
-              <a:defRPr sz="1200"/>
-            </a:lvl1pPr>
-          </a:lstStyle>
-          <a:p>
-            <a:fld id="{5282F153-3F37-0F45-9E97-73ACFA13230C}" type="datetimeFigureOut">
-              <a:rPr lang="en-US"/>
-              <a:t>7/23/19</a:t>
-            </a:fld>
-            <a:endParaRPr lang="en-US"/>
-          </a:p>
-        </p:txBody>
-      </p:sp>
-      <p:sp>
-        <p:nvSpPr>
-          <p:cNvPr id="4" name="Slide Image Placeholder 3"/>
-          <p:cNvSpPr>
-            <a:spLocks noGrp="1" noRot="1" noChangeAspect="1"/>
-          </p:cNvSpPr>
-          <p:nvPr>
-            <p:ph type="sldImg" idx="2"/>
-          </p:nvPr>
-        </p:nvSpPr>
-        <p:spPr>
-          <a:xfrm>
-            <a:off x="685800" y="1143000"/>
-            <a:ext cx="5486400" cy="3086100"/>
-          </a:xfrm>
-          <a:prstGeom prst="rect">
-            <a:avLst/>
-          </a:prstGeom>
-          <a:noFill/>
-          <a:ln w="12700">
-            <a:solidFill>
-              <a:prstClr val="black"/>
-            </a:solidFill>
-          </a:ln>
-        </p:spPr>
-        <p:txBody>
-          <a:bodyPr vert="horz" lIns="91440" tIns="45720" rIns="91440" bIns="45720" rtlCol="0" anchor="ctr"/>
-          <a:lstStyle/>
-          <a:p>
-            <a:endParaRPr lang="en-US"/>
-          </a:p>
-        </p:txBody>
-      </p:sp>
-      <p:sp>
-        <p:nvSpPr>
-          <p:cNvPr id="5" name="Notes Placeholder 4"/>
-          <p:cNvSpPr>
-            <a:spLocks noGrp="1"/>
-          </p:cNvSpPr>
-          <p:nvPr>
-            <p:ph type="body" sz="quarter" idx="3"/>
-          </p:nvPr>
-        </p:nvSpPr>
-        <p:spPr>
-          <a:xfrm>
-            <a:off x="685800" y="4400550"/>
-            <a:ext cx="5486400" cy="3600450"/>
-          </a:xfrm>
-          <a:prstGeom prst="rect">
-            <a:avLst/>
-          </a:prstGeom>
-        </p:spPr>
-        <p:txBody>
-          <a:bodyPr vert="horz" lIns="91440" tIns="45720" rIns="91440" bIns="45720" rtlCol="0"/>
-          <a:lstStyle/>
-          <a:p>
-            <a:pPr lvl="0"/>
-            <a:r>
-              <a:rPr lang="en-US"/>
-              <a:t>Click to edit Master text styles</a:t>
-            </a:r>
-          </a:p>
-          <a:p>
-            <a:pPr lvl="1"/>
-            <a:r>
-              <a:rPr lang="en-US"/>
-              <a:t>Second level</a:t>
-            </a:r>
-          </a:p>
-          <a:p>
-            <a:pPr lvl="2"/>
-            <a:r>
-              <a:rPr lang="en-US"/>
-              <a:t>Third level</a:t>
-            </a:r>
-          </a:p>
-          <a:p>
-            <a:pPr lvl="3"/>
-            <a:r>
-              <a:rPr lang="en-US"/>
-              <a:t>Fourth level</a:t>
-            </a:r>
-          </a:p>
-          <a:p>
-            <a:pPr lvl="4"/>
-            <a:r>
-              <a:rPr lang="en-US"/>
-              <a:t>Fifth level</a:t>
-            </a:r>
-          </a:p>
-        </p:txBody>
-      </p:sp>
-      <p:sp>
-        <p:nvSpPr>
-          <p:cNvPr id="6" name="Footer Placeholder 5"/>
-          <p:cNvSpPr>
-            <a:spLocks noGrp="1"/>
-          </p:cNvSpPr>
-          <p:nvPr>
-            <p:ph type="ftr" sz="quarter" idx="4"/>
-          </p:nvPr>
-        </p:nvSpPr>
-        <p:spPr>
-          <a:xfrm>
-            <a:off x="0" y="8685213"/>
-            <a:ext cx="2971800" cy="458787"/>
-          </a:xfrm>
-          <a:prstGeom prst="rect">
-            <a:avLst/>
-          </a:prstGeom>
-        </p:spPr>
-        <p:txBody>
-          <a:bodyPr vert="horz" lIns="91440" tIns="45720" rIns="91440" bIns="45720" rtlCol="0" anchor="b"/>
-          <a:lstStyle>
-            <a:lvl1pPr algn="l">
-              <a:defRPr sz="1200"/>
-            </a:lvl1pPr>
-          </a:lstStyle>
-          <a:p>
-            <a:endParaRPr lang="en-US"/>
-          </a:p>
-        </p:txBody>
-      </p:sp>
-      <p:sp>
-        <p:nvSpPr>
-          <p:cNvPr id="7" name="Slide Number Placeholder 6"/>
-          <p:cNvSpPr>
-            <a:spLocks noGrp="1"/>
-          </p:cNvSpPr>
-          <p:nvPr>
-            <p:ph type="sldNum" sz="quarter" idx="5"/>
-          </p:nvPr>
-        </p:nvSpPr>
-        <p:spPr>
-          <a:xfrm>
-            <a:off x="3884613" y="8685213"/>
-            <a:ext cx="2971800" cy="458787"/>
-          </a:xfrm>
-          <a:prstGeom prst="rect">
-            <a:avLst/>
-          </a:prstGeom>
-        </p:spPr>
-        <p:txBody>
-          <a:bodyPr vert="horz" lIns="91440" tIns="45720" rIns="91440" bIns="45720" rtlCol="0" anchor="b"/>
-          <a:lstStyle>
-            <a:lvl1pPr algn="r">
-              <a:defRPr sz="1200"/>
-            </a:lvl1pPr>
-          </a:lstStyle>
-          <a:p>
-            <a:fld id="{CE5E9CC1-C706-0F49-92D6-E571CC5EEA8F}" type="slidenum">
-              <a:rPr lang="en-US"/>
-              <a:t>‹#›</a:t>
-            </a:fld>
-            <a:endParaRPr lang="en-US"/>
-          </a:p>
-        </p:txBody>
-      </p:sp>
     </p:spTree>
     <p:extLst>
       <p:ext uri="{BB962C8B-B14F-4D97-AF65-F5344CB8AC3E}">
-        <p14:creationId xmlns:p14="http://schemas.microsoft.com/office/powerpoint/2010/main" val="1024086991"/>
+        <p14:creationId xmlns:p14="http://schemas.microsoft.com/office/powerpoint/2010/main" val="2556422042"/>
       </p:ext>
     </p:extLst>
   </p:cSld>
@@ -507,10 +289,70 @@
           <a:bodyPr/>
           <a:lstStyle/>
           <a:p>
-            <a:r>
-              <a:rPr lang="en-US" dirty="0"/>
-              <a:t/>
-            </a:r>
+            <a:pPr marL="0" marR="0" lvl="0" indent="0" algn="l" defTabSz="914400" rtl="0" eaLnBrk="1" fontAlgn="auto" latinLnBrk="0" hangingPunct="1">
+              <a:lnSpc>
+                <a:spcPct val="100000"/>
+              </a:lnSpc>
+              <a:spcBef>
+                <a:spcPts val="0"/>
+              </a:spcBef>
+              <a:spcAft>
+                <a:spcPts val="0"/>
+              </a:spcAft>
+              <a:buClrTx/>
+              <a:buSzTx/>
+              <a:buFontTx/>
+              <a:buNone/>
+              <a:tabLst/>
+              <a:defRPr/>
+            </a:pPr>
+            <a:r>
+              <a:rPr lang="en-US" sz="1200" dirty="0" err="1">
+                <a:solidFill>
+                  <a:srgbClr val="14B8A6"/>
+                </a:solidFill>
+                <a:latin typeface="Calibri" pitchFamily="34" charset="0"/>
+                <a:ea typeface="Calibri" pitchFamily="34" charset="-122"/>
+                <a:cs typeface="Calibri" pitchFamily="34" charset="-120"/>
+              </a:rPr>
+              <a:t>Manuálna</a:t>
+            </a:r>
+            <a:r>
+              <a:rPr lang="en-US" sz="1200" dirty="0">
+                <a:solidFill>
+                  <a:srgbClr val="14B8A6"/>
+                </a:solidFill>
+                <a:latin typeface="Calibri" pitchFamily="34" charset="0"/>
+                <a:ea typeface="Calibri" pitchFamily="34" charset="-122"/>
+                <a:cs typeface="Calibri" pitchFamily="34" charset="-120"/>
+              </a:rPr>
+              <a:t> </a:t>
+            </a:r>
+            <a:r>
+              <a:rPr lang="en-US" sz="1200" dirty="0" err="1">
+                <a:solidFill>
+                  <a:srgbClr val="14B8A6"/>
+                </a:solidFill>
+                <a:latin typeface="Calibri" pitchFamily="34" charset="0"/>
+                <a:ea typeface="Calibri" pitchFamily="34" charset="-122"/>
+                <a:cs typeface="Calibri" pitchFamily="34" charset="-120"/>
+              </a:rPr>
+              <a:t>implementácia</a:t>
+            </a:r>
+            <a:r>
+              <a:rPr lang="en-US" sz="1200" dirty="0">
+                <a:solidFill>
+                  <a:srgbClr val="14B8A6"/>
+                </a:solidFill>
+                <a:latin typeface="Calibri" pitchFamily="34" charset="0"/>
+                <a:ea typeface="Calibri" pitchFamily="34" charset="-122"/>
+                <a:cs typeface="Calibri" pitchFamily="34" charset="-120"/>
+              </a:rPr>
+              <a:t> (NumPy) vs OpenCV</a:t>
+            </a:r>
+            <a:endParaRPr lang="en-US" sz="1200" dirty="0"/>
+          </a:p>
+          <a:p>
             <a:endParaRPr lang="en-US" dirty="0"/>
           </a:p>
         </p:txBody>
@@ -595,10 +437,6 @@
           <a:bodyPr/>
           <a:lstStyle/>
           <a:p>
-            <a:r>
-              <a:rPr lang="en-US" dirty="0"/>
-              <a:t/>
-            </a:r>
             <a:endParaRPr lang="en-US" dirty="0"/>
           </a:p>
         </p:txBody>
@@ -683,10 +521,6 @@
           <a:bodyPr/>
           <a:lstStyle/>
           <a:p>
-            <a:r>
-              <a:rPr lang="en-US" dirty="0"/>
-              <a:t/>
-            </a:r>
             <a:endParaRPr lang="en-US" dirty="0"/>
           </a:p>
         </p:txBody>
@@ -771,10 +605,6 @@
           <a:bodyPr/>
           <a:lstStyle/>
           <a:p>
-            <a:r>
-              <a:rPr lang="en-US" dirty="0"/>
-              <a:t/>
-            </a:r>
             <a:endParaRPr lang="en-US" dirty="0"/>
           </a:p>
         </p:txBody>
@@ -859,10 +689,6 @@
           <a:bodyPr/>
           <a:lstStyle/>
           <a:p>
-            <a:r>
-              <a:rPr lang="en-US" dirty="0"/>
-              <a:t/>
-            </a:r>
             <a:endParaRPr lang="en-US" dirty="0"/>
           </a:p>
         </p:txBody>
@@ -947,10 +773,6 @@
           <a:bodyPr/>
           <a:lstStyle/>
           <a:p>
-            <a:r>
-              <a:rPr lang="en-US" dirty="0"/>
-              <a:t/>
-            </a:r>
             <a:endParaRPr lang="en-US" dirty="0"/>
           </a:p>
         </p:txBody>
@@ -1035,10 +857,257 @@
           <a:bodyPr/>
           <a:lstStyle/>
           <a:p>
-            <a:r>
-              <a:rPr lang="en-US" dirty="0"/>
-              <a:t/>
-            </a:r>
+            <a:pPr marL="0" marR="0" lvl="0" indent="0" algn="l" defTabSz="914400" rtl="0" eaLnBrk="1" fontAlgn="auto" latinLnBrk="0" hangingPunct="1">
+              <a:lnSpc>
+                <a:spcPct val="100000"/>
+              </a:lnSpc>
+              <a:spcBef>
+                <a:spcPts val="0"/>
+              </a:spcBef>
+              <a:spcAft>
+                <a:spcPts val="0"/>
+              </a:spcAft>
+              <a:buClrTx/>
+              <a:buSzTx/>
+              <a:buFontTx/>
+              <a:buNone/>
+              <a:tabLst/>
+              <a:defRPr/>
+            </a:pPr>
+            <a:r>
+              <a:rPr lang="en-US" sz="1200" dirty="0">
+                <a:solidFill>
+                  <a:srgbClr val="92400E"/>
+                </a:solidFill>
+                <a:latin typeface="Calibri" pitchFamily="34" charset="0"/>
+                <a:ea typeface="Calibri" pitchFamily="34" charset="-122"/>
+                <a:cs typeface="Calibri" pitchFamily="34" charset="-120"/>
+              </a:rPr>
+              <a:t>⚠️  </a:t>
+            </a:r>
+            <a:r>
+              <a:rPr lang="en-US" sz="1200" dirty="0" err="1">
+                <a:solidFill>
+                  <a:srgbClr val="92400E"/>
+                </a:solidFill>
+                <a:latin typeface="Calibri" pitchFamily="34" charset="0"/>
+                <a:ea typeface="Calibri" pitchFamily="34" charset="-122"/>
+                <a:cs typeface="Calibri" pitchFamily="34" charset="-120"/>
+              </a:rPr>
+              <a:t>Rozdiel</a:t>
+            </a:r>
+            <a:r>
+              <a:rPr lang="en-US" sz="1200" dirty="0">
+                <a:solidFill>
+                  <a:srgbClr val="92400E"/>
+                </a:solidFill>
+                <a:latin typeface="Calibri" pitchFamily="34" charset="0"/>
+                <a:ea typeface="Calibri" pitchFamily="34" charset="-122"/>
+                <a:cs typeface="Calibri" pitchFamily="34" charset="-120"/>
+              </a:rPr>
+              <a:t> ~1 </a:t>
+            </a:r>
+            <a:r>
+              <a:rPr lang="en-US" sz="1200" dirty="0" err="1">
+                <a:solidFill>
+                  <a:srgbClr val="92400E"/>
+                </a:solidFill>
+                <a:latin typeface="Calibri" pitchFamily="34" charset="0"/>
+                <a:ea typeface="Calibri" pitchFamily="34" charset="-122"/>
+                <a:cs typeface="Calibri" pitchFamily="34" charset="-120"/>
+              </a:rPr>
+              <a:t>px</a:t>
+            </a:r>
+            <a:r>
+              <a:rPr lang="en-US" sz="1200" dirty="0">
+                <a:solidFill>
+                  <a:srgbClr val="92400E"/>
+                </a:solidFill>
+                <a:latin typeface="Calibri" pitchFamily="34" charset="0"/>
+                <a:ea typeface="Calibri" pitchFamily="34" charset="-122"/>
+                <a:cs typeface="Calibri" pitchFamily="34" charset="-120"/>
+              </a:rPr>
+              <a:t> </a:t>
+            </a:r>
+            <a:r>
+              <a:rPr lang="en-US" sz="1200" dirty="0" err="1">
+                <a:solidFill>
+                  <a:srgbClr val="92400E"/>
+                </a:solidFill>
+                <a:latin typeface="Calibri" pitchFamily="34" charset="0"/>
+                <a:ea typeface="Calibri" pitchFamily="34" charset="-122"/>
+                <a:cs typeface="Calibri" pitchFamily="34" charset="-120"/>
+              </a:rPr>
+              <a:t>pri</a:t>
+            </a:r>
+            <a:r>
+              <a:rPr lang="en-US" sz="1200" dirty="0">
+                <a:solidFill>
+                  <a:srgbClr val="92400E"/>
+                </a:solidFill>
+                <a:latin typeface="Calibri" pitchFamily="34" charset="0"/>
+                <a:ea typeface="Calibri" pitchFamily="34" charset="-122"/>
+                <a:cs typeface="Calibri" pitchFamily="34" charset="-120"/>
+              </a:rPr>
+              <a:t> CLAHE </a:t>
+            </a:r>
+            <a:r>
+              <a:rPr lang="en-US" sz="1200" dirty="0" err="1">
+                <a:solidFill>
+                  <a:srgbClr val="92400E"/>
+                </a:solidFill>
+                <a:latin typeface="Calibri" pitchFamily="34" charset="0"/>
+                <a:ea typeface="Calibri" pitchFamily="34" charset="-122"/>
+                <a:cs typeface="Calibri" pitchFamily="34" charset="-120"/>
+              </a:rPr>
+              <a:t>pochádza</a:t>
+            </a:r>
+            <a:r>
+              <a:rPr lang="en-US" sz="1200" dirty="0">
+                <a:solidFill>
+                  <a:srgbClr val="92400E"/>
+                </a:solidFill>
+                <a:latin typeface="Calibri" pitchFamily="34" charset="0"/>
+                <a:ea typeface="Calibri" pitchFamily="34" charset="-122"/>
+                <a:cs typeface="Calibri" pitchFamily="34" charset="-120"/>
+              </a:rPr>
+              <a:t> z </a:t>
+            </a:r>
+            <a:r>
+              <a:rPr lang="en-US" sz="1200" dirty="0" err="1">
+                <a:solidFill>
+                  <a:srgbClr val="92400E"/>
+                </a:solidFill>
+                <a:latin typeface="Calibri" pitchFamily="34" charset="0"/>
+                <a:ea typeface="Calibri" pitchFamily="34" charset="-122"/>
+                <a:cs typeface="Calibri" pitchFamily="34" charset="-120"/>
+              </a:rPr>
+              <a:t>iného</a:t>
+            </a:r>
+            <a:r>
+              <a:rPr lang="en-US" sz="1200" dirty="0">
+                <a:solidFill>
+                  <a:srgbClr val="92400E"/>
+                </a:solidFill>
+                <a:latin typeface="Calibri" pitchFamily="34" charset="0"/>
+                <a:ea typeface="Calibri" pitchFamily="34" charset="-122"/>
+                <a:cs typeface="Calibri" pitchFamily="34" charset="-120"/>
+              </a:rPr>
+              <a:t> </a:t>
+            </a:r>
+            <a:r>
+              <a:rPr lang="en-US" sz="1200" dirty="0" err="1">
+                <a:solidFill>
+                  <a:srgbClr val="92400E"/>
+                </a:solidFill>
+                <a:latin typeface="Calibri" pitchFamily="34" charset="0"/>
+                <a:ea typeface="Calibri" pitchFamily="34" charset="-122"/>
+                <a:cs typeface="Calibri" pitchFamily="34" charset="-120"/>
+              </a:rPr>
+              <a:t>spôsobu</a:t>
+            </a:r>
+            <a:r>
+              <a:rPr lang="en-US" sz="1200" dirty="0">
+                <a:solidFill>
+                  <a:srgbClr val="92400E"/>
+                </a:solidFill>
+                <a:latin typeface="Calibri" pitchFamily="34" charset="0"/>
+                <a:ea typeface="Calibri" pitchFamily="34" charset="-122"/>
+                <a:cs typeface="Calibri" pitchFamily="34" charset="-120"/>
+              </a:rPr>
+              <a:t> </a:t>
+            </a:r>
+            <a:r>
+              <a:rPr lang="en-US" sz="1200" dirty="0" err="1">
+                <a:solidFill>
+                  <a:srgbClr val="92400E"/>
+                </a:solidFill>
+                <a:latin typeface="Calibri" pitchFamily="34" charset="0"/>
+                <a:ea typeface="Calibri" pitchFamily="34" charset="-122"/>
+                <a:cs typeface="Calibri" pitchFamily="34" charset="-120"/>
+              </a:rPr>
+              <a:t>interpolácie</a:t>
+            </a:r>
+            <a:r>
+              <a:rPr lang="en-US" sz="1200" dirty="0">
+                <a:solidFill>
+                  <a:srgbClr val="92400E"/>
+                </a:solidFill>
+                <a:latin typeface="Calibri" pitchFamily="34" charset="0"/>
+                <a:ea typeface="Calibri" pitchFamily="34" charset="-122"/>
+                <a:cs typeface="Calibri" pitchFamily="34" charset="-120"/>
+              </a:rPr>
+              <a:t> </a:t>
+            </a:r>
+            <a:r>
+              <a:rPr lang="en-US" sz="1200" dirty="0" err="1">
+                <a:solidFill>
+                  <a:srgbClr val="92400E"/>
+                </a:solidFill>
+                <a:latin typeface="Calibri" pitchFamily="34" charset="0"/>
+                <a:ea typeface="Calibri" pitchFamily="34" charset="-122"/>
+                <a:cs typeface="Calibri" pitchFamily="34" charset="-120"/>
+              </a:rPr>
+              <a:t>dlaždíc</a:t>
+            </a:r>
+            <a:r>
+              <a:rPr lang="en-US" sz="1200" dirty="0">
+                <a:solidFill>
+                  <a:srgbClr val="92400E"/>
+                </a:solidFill>
+                <a:latin typeface="Calibri" pitchFamily="34" charset="0"/>
+                <a:ea typeface="Calibri" pitchFamily="34" charset="-122"/>
+                <a:cs typeface="Calibri" pitchFamily="34" charset="-120"/>
+              </a:rPr>
+              <a:t> v OpenCV (C++). </a:t>
+            </a:r>
+            <a:r>
+              <a:rPr lang="en-US" sz="1200" dirty="0" err="1">
+                <a:solidFill>
+                  <a:srgbClr val="92400E"/>
+                </a:solidFill>
+                <a:latin typeface="Calibri" pitchFamily="34" charset="0"/>
+                <a:ea typeface="Calibri" pitchFamily="34" charset="-122"/>
+                <a:cs typeface="Calibri" pitchFamily="34" charset="-120"/>
+              </a:rPr>
+              <a:t>Vizuálne</a:t>
+            </a:r>
+            <a:r>
+              <a:rPr lang="en-US" sz="1200" dirty="0">
+                <a:solidFill>
+                  <a:srgbClr val="92400E"/>
+                </a:solidFill>
+                <a:latin typeface="Calibri" pitchFamily="34" charset="0"/>
+                <a:ea typeface="Calibri" pitchFamily="34" charset="-122"/>
+                <a:cs typeface="Calibri" pitchFamily="34" charset="-120"/>
+              </a:rPr>
+              <a:t> </a:t>
+            </a:r>
+            <a:r>
+              <a:rPr lang="en-US" sz="1200" dirty="0" err="1">
+                <a:solidFill>
+                  <a:srgbClr val="92400E"/>
+                </a:solidFill>
+                <a:latin typeface="Calibri" pitchFamily="34" charset="0"/>
+                <a:ea typeface="Calibri" pitchFamily="34" charset="-122"/>
+                <a:cs typeface="Calibri" pitchFamily="34" charset="-120"/>
+              </a:rPr>
+              <a:t>nerozoznateľné</a:t>
+            </a:r>
+            <a:r>
+              <a:rPr lang="en-US" sz="1200" dirty="0">
+                <a:solidFill>
+                  <a:srgbClr val="92400E"/>
+                </a:solidFill>
+                <a:latin typeface="Calibri" pitchFamily="34" charset="0"/>
+                <a:ea typeface="Calibri" pitchFamily="34" charset="-122"/>
+                <a:cs typeface="Calibri" pitchFamily="34" charset="-120"/>
+              </a:rPr>
+              <a:t>.</a:t>
+            </a:r>
+            <a:endParaRPr lang="en-US" sz="1200" dirty="0"/>
+          </a:p>
+          <a:p>
             <a:endParaRPr lang="en-US" dirty="0"/>
           </a:p>
         </p:txBody>
@@ -1123,10 +1192,213 @@
           <a:bodyPr/>
           <a:lstStyle/>
           <a:p>
-            <a:r>
-              <a:rPr lang="en-US" dirty="0"/>
-              <a:t/>
-            </a:r>
+            <a:pPr marL="0" marR="0" lvl="0" indent="0" algn="l" defTabSz="914400" rtl="0" eaLnBrk="1" fontAlgn="auto" latinLnBrk="0" hangingPunct="1">
+              <a:lnSpc>
+                <a:spcPct val="100000"/>
+              </a:lnSpc>
+              <a:spcBef>
+                <a:spcPts val="0"/>
+              </a:spcBef>
+              <a:spcAft>
+                <a:spcPts val="0"/>
+              </a:spcAft>
+              <a:buClrTx/>
+              <a:buSzTx/>
+              <a:buFontTx/>
+              <a:buNone/>
+              <a:tabLst/>
+              <a:defRPr/>
+            </a:pPr>
+            <a:r>
+              <a:rPr lang="en-US" sz="1200" dirty="0">
+                <a:solidFill>
+                  <a:srgbClr val="FFFFFF"/>
+                </a:solidFill>
+                <a:latin typeface="Calibri" pitchFamily="34" charset="0"/>
+                <a:ea typeface="Calibri" pitchFamily="34" charset="-122"/>
+                <a:cs typeface="Calibri" pitchFamily="34" charset="-120"/>
+              </a:rPr>
+              <a:t>🎓  </a:t>
+            </a:r>
+            <a:r>
+              <a:rPr lang="en-US" sz="1200" dirty="0" err="1">
+                <a:solidFill>
+                  <a:srgbClr val="FFFFFF"/>
+                </a:solidFill>
+                <a:latin typeface="Calibri" pitchFamily="34" charset="0"/>
+                <a:ea typeface="Calibri" pitchFamily="34" charset="-122"/>
+                <a:cs typeface="Calibri" pitchFamily="34" charset="-120"/>
+              </a:rPr>
+              <a:t>Manuálna</a:t>
+            </a:r>
+            <a:r>
+              <a:rPr lang="en-US" sz="1200" dirty="0">
+                <a:solidFill>
+                  <a:srgbClr val="FFFFFF"/>
+                </a:solidFill>
+                <a:latin typeface="Calibri" pitchFamily="34" charset="0"/>
+                <a:ea typeface="Calibri" pitchFamily="34" charset="-122"/>
+                <a:cs typeface="Calibri" pitchFamily="34" charset="-120"/>
+              </a:rPr>
+              <a:t> </a:t>
+            </a:r>
+            <a:r>
+              <a:rPr lang="en-US" sz="1200" dirty="0" err="1">
+                <a:solidFill>
+                  <a:srgbClr val="FFFFFF"/>
+                </a:solidFill>
+                <a:latin typeface="Calibri" pitchFamily="34" charset="0"/>
+                <a:ea typeface="Calibri" pitchFamily="34" charset="-122"/>
+                <a:cs typeface="Calibri" pitchFamily="34" charset="-120"/>
+              </a:rPr>
+              <a:t>implementácia</a:t>
+            </a:r>
+            <a:r>
+              <a:rPr lang="en-US" sz="1200" dirty="0">
+                <a:solidFill>
+                  <a:srgbClr val="FFFFFF"/>
+                </a:solidFill>
+                <a:latin typeface="Calibri" pitchFamily="34" charset="0"/>
+                <a:ea typeface="Calibri" pitchFamily="34" charset="-122"/>
+                <a:cs typeface="Calibri" pitchFamily="34" charset="-120"/>
+              </a:rPr>
+              <a:t> </a:t>
+            </a:r>
+            <a:r>
+              <a:rPr lang="en-US" sz="1200" dirty="0" err="1">
+                <a:solidFill>
+                  <a:srgbClr val="FFFFFF"/>
+                </a:solidFill>
+                <a:latin typeface="Calibri" pitchFamily="34" charset="0"/>
+                <a:ea typeface="Calibri" pitchFamily="34" charset="-122"/>
+                <a:cs typeface="Calibri" pitchFamily="34" charset="-120"/>
+              </a:rPr>
+              <a:t>pochopila</a:t>
+            </a:r>
+            <a:r>
+              <a:rPr lang="en-US" sz="1200" dirty="0">
+                <a:solidFill>
+                  <a:srgbClr val="FFFFFF"/>
+                </a:solidFill>
+                <a:latin typeface="Calibri" pitchFamily="34" charset="0"/>
+                <a:ea typeface="Calibri" pitchFamily="34" charset="-122"/>
+                <a:cs typeface="Calibri" pitchFamily="34" charset="-120"/>
+              </a:rPr>
+              <a:t> </a:t>
+            </a:r>
+            <a:r>
+              <a:rPr lang="en-US" sz="1200" dirty="0" err="1">
+                <a:solidFill>
+                  <a:srgbClr val="FFFFFF"/>
+                </a:solidFill>
+                <a:latin typeface="Calibri" pitchFamily="34" charset="0"/>
+                <a:ea typeface="Calibri" pitchFamily="34" charset="-122"/>
+                <a:cs typeface="Calibri" pitchFamily="34" charset="-120"/>
+              </a:rPr>
+              <a:t>princíp</a:t>
+            </a:r>
+            <a:r>
+              <a:rPr lang="en-US" sz="1200" dirty="0">
+                <a:solidFill>
+                  <a:srgbClr val="FFFFFF"/>
+                </a:solidFill>
+                <a:latin typeface="Calibri" pitchFamily="34" charset="0"/>
+                <a:ea typeface="Calibri" pitchFamily="34" charset="-122"/>
+                <a:cs typeface="Calibri" pitchFamily="34" charset="-120"/>
+              </a:rPr>
+              <a:t> – </a:t>
+            </a:r>
+            <a:r>
+              <a:rPr lang="en-US" sz="1200" dirty="0" err="1">
+                <a:solidFill>
+                  <a:srgbClr val="FFFFFF"/>
+                </a:solidFill>
+                <a:latin typeface="Calibri" pitchFamily="34" charset="0"/>
+                <a:ea typeface="Calibri" pitchFamily="34" charset="-122"/>
+                <a:cs typeface="Calibri" pitchFamily="34" charset="-120"/>
+              </a:rPr>
+              <a:t>produkčný</a:t>
+            </a:r>
+            <a:r>
+              <a:rPr lang="en-US" sz="1200" dirty="0">
+                <a:solidFill>
+                  <a:srgbClr val="FFFFFF"/>
+                </a:solidFill>
+                <a:latin typeface="Calibri" pitchFamily="34" charset="0"/>
+                <a:ea typeface="Calibri" pitchFamily="34" charset="-122"/>
+                <a:cs typeface="Calibri" pitchFamily="34" charset="-120"/>
+              </a:rPr>
+              <a:t> </a:t>
+            </a:r>
+            <a:r>
+              <a:rPr lang="en-US" sz="1200" dirty="0" err="1">
+                <a:solidFill>
+                  <a:srgbClr val="FFFFFF"/>
+                </a:solidFill>
+                <a:latin typeface="Calibri" pitchFamily="34" charset="0"/>
+                <a:ea typeface="Calibri" pitchFamily="34" charset="-122"/>
+                <a:cs typeface="Calibri" pitchFamily="34" charset="-120"/>
+              </a:rPr>
+              <a:t>kód</a:t>
+            </a:r>
+            <a:r>
+              <a:rPr lang="en-US" sz="1200" dirty="0">
+                <a:solidFill>
+                  <a:srgbClr val="FFFFFF"/>
+                </a:solidFill>
+                <a:latin typeface="Calibri" pitchFamily="34" charset="0"/>
+                <a:ea typeface="Calibri" pitchFamily="34" charset="-122"/>
+                <a:cs typeface="Calibri" pitchFamily="34" charset="-120"/>
+              </a:rPr>
+              <a:t> by </a:t>
+            </a:r>
+            <a:r>
+              <a:rPr lang="en-US" sz="1200" dirty="0" err="1">
+                <a:solidFill>
+                  <a:srgbClr val="FFFFFF"/>
+                </a:solidFill>
+                <a:latin typeface="Calibri" pitchFamily="34" charset="0"/>
+                <a:ea typeface="Calibri" pitchFamily="34" charset="-122"/>
+                <a:cs typeface="Calibri" pitchFamily="34" charset="-120"/>
+              </a:rPr>
+              <a:t>však</a:t>
+            </a:r>
+            <a:r>
+              <a:rPr lang="en-US" sz="1200" dirty="0">
+                <a:solidFill>
+                  <a:srgbClr val="FFFFFF"/>
+                </a:solidFill>
+                <a:latin typeface="Calibri" pitchFamily="34" charset="0"/>
+                <a:ea typeface="Calibri" pitchFamily="34" charset="-122"/>
+                <a:cs typeface="Calibri" pitchFamily="34" charset="-120"/>
+              </a:rPr>
+              <a:t> mal </a:t>
+            </a:r>
+            <a:r>
+              <a:rPr lang="en-US" sz="1200" dirty="0" err="1">
+                <a:solidFill>
+                  <a:srgbClr val="FFFFFF"/>
+                </a:solidFill>
+                <a:latin typeface="Calibri" pitchFamily="34" charset="0"/>
+                <a:ea typeface="Calibri" pitchFamily="34" charset="-122"/>
+                <a:cs typeface="Calibri" pitchFamily="34" charset="-120"/>
+              </a:rPr>
+              <a:t>používať</a:t>
+            </a:r>
+            <a:r>
+              <a:rPr lang="en-US" sz="1200" dirty="0">
+                <a:solidFill>
+                  <a:srgbClr val="FFFFFF"/>
+                </a:solidFill>
+                <a:latin typeface="Calibri" pitchFamily="34" charset="0"/>
+                <a:ea typeface="Calibri" pitchFamily="34" charset="-122"/>
+                <a:cs typeface="Calibri" pitchFamily="34" charset="-120"/>
+              </a:rPr>
+              <a:t> OpenCV</a:t>
+            </a:r>
+            <a:endParaRPr lang="en-US" sz="1200" dirty="0"/>
+          </a:p>
+          <a:p>
             <a:endParaRPr lang="en-US" dirty="0"/>
           </a:p>
         </p:txBody>
@@ -1158,6 +1430,114 @@
     <p:extLst>
       <p:ext uri="{BB962C8B-B14F-4D97-AF65-F5344CB8AC3E}">
         <p14:creationId xmlns:p14="http://schemas.microsoft.com/office/powerpoint/2010/main" val="1024086991"/>
+      </p:ext>
+    </p:extLst>
+  </p:cSld>
+  <p:clrMapOvr>
+    <a:masterClrMapping/>
+  </p:clrMapOvr>
+</p:notes>
+</file>
+
+<file path=ppt/notesSlides/notesSlide9.xml><?xml version="1.0" encoding="utf-8"?>
+<p:notes xmlns:a="http://schemas.openxmlformats.org/drawingml/2006/main" xmlns:r="http://schemas.openxmlformats.org/officeDocument/2006/relationships" xmlns:p="http://schemas.openxmlformats.org/presentationml/2006/main">
+  <p:cSld>
+    <p:spTree>
+      <p:nvGrpSpPr>
+        <p:cNvPr id="1" name="">
+          <a:extLst>
+            <a:ext uri="{FF2B5EF4-FFF2-40B4-BE49-F238E27FC236}">
+              <a16:creationId xmlns:a16="http://schemas.microsoft.com/office/drawing/2014/main" id="{E367C1BD-3BBE-B5E0-1131-1765888C5B58}"/>
+            </a:ext>
+          </a:extLst>
+        </p:cNvPr>
+        <p:cNvGrpSpPr/>
+        <p:nvPr/>
+      </p:nvGrpSpPr>
+      <p:grpSpPr>
+        <a:xfrm>
+          <a:off x="0" y="0"/>
+          <a:ext cx="0" cy="0"/>
+          <a:chOff x="0" y="0"/>
+          <a:chExt cx="0" cy="0"/>
+        </a:xfrm>
+      </p:grpSpPr>
+      <p:sp>
+        <p:nvSpPr>
+          <p:cNvPr id="2" name="Slide Image Placeholder 1">
+            <a:extLst>
+              <a:ext uri="{FF2B5EF4-FFF2-40B4-BE49-F238E27FC236}">
+                <a16:creationId xmlns:a16="http://schemas.microsoft.com/office/drawing/2014/main" id="{C7016D1E-3F2E-9F2D-CE9B-FD4C0CF70A6C}"/>
+              </a:ext>
+            </a:extLst>
+          </p:cNvPr>
+          <p:cNvSpPr>
+            <a:spLocks noGrp="1" noRot="1" noChangeAspect="1"/>
+          </p:cNvSpPr>
+          <p:nvPr>
+            <p:ph type="sldImg"/>
+          </p:nvPr>
+        </p:nvSpPr>
+        <p:spPr/>
+      </p:sp>
+      <p:sp>
+        <p:nvSpPr>
+          <p:cNvPr id="3" name="Notes Placeholder 2">
+            <a:extLst>
+              <a:ext uri="{FF2B5EF4-FFF2-40B4-BE49-F238E27FC236}">
+                <a16:creationId xmlns:a16="http://schemas.microsoft.com/office/drawing/2014/main" id="{4AEF3A38-2D6A-0CA2-E176-2C4BED947B75}"/>
+              </a:ext>
+            </a:extLst>
+          </p:cNvPr>
+          <p:cNvSpPr>
+            <a:spLocks noGrp="1"/>
+          </p:cNvSpPr>
+          <p:nvPr>
+            <p:ph type="body" idx="1"/>
+          </p:nvPr>
+        </p:nvSpPr>
+        <p:spPr/>
+        <p:txBody>
+          <a:bodyPr/>
+          <a:lstStyle/>
+          <a:p>
+            <a:endParaRPr lang="en-US" dirty="0"/>
+          </a:p>
+        </p:txBody>
+      </p:sp>
+      <p:sp>
+        <p:nvSpPr>
+          <p:cNvPr id="4" name="Slide Number Placeholder 3">
+            <a:extLst>
+              <a:ext uri="{FF2B5EF4-FFF2-40B4-BE49-F238E27FC236}">
+                <a16:creationId xmlns:a16="http://schemas.microsoft.com/office/drawing/2014/main" id="{E5F283CF-8736-C287-CA0C-08C21DD568A2}"/>
+              </a:ext>
+            </a:extLst>
+          </p:cNvPr>
+          <p:cNvSpPr>
+            <a:spLocks noGrp="1"/>
+          </p:cNvSpPr>
+          <p:nvPr>
+            <p:ph type="sldNum" sz="quarter" idx="10"/>
+          </p:nvPr>
+        </p:nvSpPr>
+        <p:spPr/>
+        <p:txBody>
+          <a:bodyPr/>
+          <a:lstStyle/>
+          <a:p>
+            <a:fld id="{F7021451-1387-4CA6-816F-3879F97B5CBC}" type="slidenum">
+              <a:rPr lang="en-US"/>
+              <a:t>9</a:t>
+            </a:fld>
+            <a:endParaRPr lang="en-US"/>
+          </a:p>
+        </p:txBody>
+      </p:sp>
+    </p:spTree>
+    <p:extLst>
+      <p:ext uri="{BB962C8B-B14F-4D97-AF65-F5344CB8AC3E}">
+        <p14:creationId xmlns:p14="http://schemas.microsoft.com/office/powerpoint/2010/main" val="3413767797"/>
       </p:ext>
     </p:extLst>
   </p:cSld>
@@ -1200,6 +1580,11 @@
 <file path=ppt/slideMasters/slideMaster1.xml><?xml version="1.0" encoding="utf-8"?>
 <p:sldMaster xmlns:a="http://schemas.openxmlformats.org/drawingml/2006/main" xmlns:r="http://schemas.openxmlformats.org/officeDocument/2006/relationships" xmlns:p="http://schemas.openxmlformats.org/presentationml/2006/main">
   <p:cSld>
+    <p:bg>
+      <p:bgRef idx="1001">
+        <a:schemeClr val="bg1"/>
+      </p:bgRef>
+    </p:bg>
     <p:spTree>
       <p:nvGrpSpPr>
         <p:cNvPr id="1" name=""/>
@@ -1482,6 +1867,7 @@
         <a:solidFill>
           <a:srgbClr val="0F1F3D"/>
         </a:solidFill>
+        <a:effectLst/>
       </p:bgPr>
     </p:bg>
     <p:spTree>
@@ -1498,6 +1884,367 @@
           <a:chExt cx="0" cy="0"/>
         </a:xfrm>
       </p:grpSpPr>
+      <p:grpSp>
+        <p:nvGrpSpPr>
+          <p:cNvPr id="52" name="Skupina 51">
+            <a:extLst>
+              <a:ext uri="{FF2B5EF4-FFF2-40B4-BE49-F238E27FC236}">
+                <a16:creationId xmlns:a16="http://schemas.microsoft.com/office/drawing/2014/main" id="{15A38848-31B3-D043-986E-61C268A736D6}"/>
+              </a:ext>
+            </a:extLst>
+          </p:cNvPr>
+          <p:cNvGrpSpPr/>
+          <p:nvPr/>
+        </p:nvGrpSpPr>
+        <p:grpSpPr>
+          <a:xfrm>
+            <a:off x="342207" y="2522269"/>
+            <a:ext cx="2423160" cy="2560320"/>
+            <a:chOff x="342207" y="2548890"/>
+            <a:chExt cx="2423160" cy="2560320"/>
+          </a:xfrm>
+        </p:grpSpPr>
+        <p:sp>
+          <p:nvSpPr>
+            <p:cNvPr id="38" name="Shape 36"/>
+            <p:cNvSpPr/>
+            <p:nvPr/>
+          </p:nvSpPr>
+          <p:spPr>
+            <a:xfrm>
+              <a:off x="342207" y="4377690"/>
+              <a:ext cx="201168" cy="731520"/>
+            </a:xfrm>
+            <a:prstGeom prst="rect">
+              <a:avLst/>
+            </a:prstGeom>
+            <a:solidFill>
+              <a:srgbClr val="0D9488">
+                <a:alpha val="80000"/>
+              </a:srgbClr>
+            </a:solidFill>
+            <a:ln w="12700">
+              <a:solidFill>
+                <a:srgbClr val="0F1F3D"/>
+              </a:solidFill>
+              <a:prstDash val="solid"/>
+            </a:ln>
+          </p:spPr>
+          <p:txBody>
+            <a:bodyPr/>
+            <a:lstStyle/>
+            <a:p>
+              <a:endParaRPr lang="sk-SK"/>
+            </a:p>
+          </p:txBody>
+        </p:sp>
+        <p:sp>
+          <p:nvSpPr>
+            <p:cNvPr id="39" name="Shape 37"/>
+            <p:cNvSpPr/>
+            <p:nvPr/>
+          </p:nvSpPr>
+          <p:spPr>
+            <a:xfrm>
+              <a:off x="589095" y="3829050"/>
+              <a:ext cx="201168" cy="1280160"/>
+            </a:xfrm>
+            <a:prstGeom prst="rect">
+              <a:avLst/>
+            </a:prstGeom>
+            <a:solidFill>
+              <a:srgbClr val="14B8A6">
+                <a:alpha val="80000"/>
+              </a:srgbClr>
+            </a:solidFill>
+            <a:ln w="12700">
+              <a:solidFill>
+                <a:srgbClr val="0F1F3D"/>
+              </a:solidFill>
+              <a:prstDash val="solid"/>
+            </a:ln>
+          </p:spPr>
+          <p:txBody>
+            <a:bodyPr/>
+            <a:lstStyle/>
+            <a:p>
+              <a:endParaRPr lang="sk-SK"/>
+            </a:p>
+          </p:txBody>
+        </p:sp>
+        <p:sp>
+          <p:nvSpPr>
+            <p:cNvPr id="40" name="Shape 38"/>
+            <p:cNvSpPr/>
+            <p:nvPr/>
+          </p:nvSpPr>
+          <p:spPr>
+            <a:xfrm>
+              <a:off x="835983" y="3188970"/>
+              <a:ext cx="201168" cy="1920240"/>
+            </a:xfrm>
+            <a:prstGeom prst="rect">
+              <a:avLst/>
+            </a:prstGeom>
+            <a:solidFill>
+              <a:srgbClr val="F59E0B">
+                <a:alpha val="80000"/>
+              </a:srgbClr>
+            </a:solidFill>
+            <a:ln w="12700">
+              <a:solidFill>
+                <a:srgbClr val="0F1F3D"/>
+              </a:solidFill>
+              <a:prstDash val="solid"/>
+            </a:ln>
+          </p:spPr>
+          <p:txBody>
+            <a:bodyPr/>
+            <a:lstStyle/>
+            <a:p>
+              <a:endParaRPr lang="sk-SK"/>
+            </a:p>
+          </p:txBody>
+        </p:sp>
+        <p:sp>
+          <p:nvSpPr>
+            <p:cNvPr id="41" name="Shape 39"/>
+            <p:cNvSpPr/>
+            <p:nvPr/>
+          </p:nvSpPr>
+          <p:spPr>
+            <a:xfrm>
+              <a:off x="1082871" y="3554730"/>
+              <a:ext cx="201168" cy="1554480"/>
+            </a:xfrm>
+            <a:prstGeom prst="rect">
+              <a:avLst/>
+            </a:prstGeom>
+            <a:solidFill>
+              <a:srgbClr val="0D9488">
+                <a:alpha val="80000"/>
+              </a:srgbClr>
+            </a:solidFill>
+            <a:ln w="12700">
+              <a:solidFill>
+                <a:srgbClr val="0F1F3D"/>
+              </a:solidFill>
+              <a:prstDash val="solid"/>
+            </a:ln>
+          </p:spPr>
+          <p:txBody>
+            <a:bodyPr/>
+            <a:lstStyle/>
+            <a:p>
+              <a:endParaRPr lang="sk-SK"/>
+            </a:p>
+          </p:txBody>
+        </p:sp>
+        <p:sp>
+          <p:nvSpPr>
+            <p:cNvPr id="42" name="Shape 40"/>
+            <p:cNvSpPr/>
+            <p:nvPr/>
+          </p:nvSpPr>
+          <p:spPr>
+            <a:xfrm>
+              <a:off x="1329759" y="2548890"/>
+              <a:ext cx="201168" cy="2560320"/>
+            </a:xfrm>
+            <a:prstGeom prst="rect">
+              <a:avLst/>
+            </a:prstGeom>
+            <a:solidFill>
+              <a:srgbClr val="14B8A6">
+                <a:alpha val="80000"/>
+              </a:srgbClr>
+            </a:solidFill>
+            <a:ln w="12700">
+              <a:solidFill>
+                <a:srgbClr val="0F1F3D"/>
+              </a:solidFill>
+              <a:prstDash val="solid"/>
+            </a:ln>
+          </p:spPr>
+          <p:txBody>
+            <a:bodyPr/>
+            <a:lstStyle/>
+            <a:p>
+              <a:endParaRPr lang="sk-SK"/>
+            </a:p>
+          </p:txBody>
+        </p:sp>
+        <p:sp>
+          <p:nvSpPr>
+            <p:cNvPr id="43" name="Shape 41"/>
+            <p:cNvSpPr/>
+            <p:nvPr/>
+          </p:nvSpPr>
+          <p:spPr>
+            <a:xfrm>
+              <a:off x="1576647" y="4011930"/>
+              <a:ext cx="201168" cy="1097280"/>
+            </a:xfrm>
+            <a:prstGeom prst="rect">
+              <a:avLst/>
+            </a:prstGeom>
+            <a:solidFill>
+              <a:srgbClr val="F59E0B">
+                <a:alpha val="80000"/>
+              </a:srgbClr>
+            </a:solidFill>
+            <a:ln w="12700">
+              <a:solidFill>
+                <a:srgbClr val="0F1F3D"/>
+              </a:solidFill>
+              <a:prstDash val="solid"/>
+            </a:ln>
+          </p:spPr>
+          <p:txBody>
+            <a:bodyPr/>
+            <a:lstStyle/>
+            <a:p>
+              <a:endParaRPr lang="sk-SK"/>
+            </a:p>
+          </p:txBody>
+        </p:sp>
+        <p:sp>
+          <p:nvSpPr>
+            <p:cNvPr id="44" name="Shape 42"/>
+            <p:cNvSpPr/>
+            <p:nvPr/>
+          </p:nvSpPr>
+          <p:spPr>
+            <a:xfrm>
+              <a:off x="1823535" y="4286250"/>
+              <a:ext cx="201168" cy="822960"/>
+            </a:xfrm>
+            <a:prstGeom prst="rect">
+              <a:avLst/>
+            </a:prstGeom>
+            <a:solidFill>
+              <a:srgbClr val="0D9488">
+                <a:alpha val="80000"/>
+              </a:srgbClr>
+            </a:solidFill>
+            <a:ln w="12700">
+              <a:solidFill>
+                <a:srgbClr val="0F1F3D"/>
+              </a:solidFill>
+              <a:prstDash val="solid"/>
+            </a:ln>
+          </p:spPr>
+          <p:txBody>
+            <a:bodyPr/>
+            <a:lstStyle/>
+            <a:p>
+              <a:endParaRPr lang="sk-SK"/>
+            </a:p>
+          </p:txBody>
+        </p:sp>
+        <p:sp>
+          <p:nvSpPr>
+            <p:cNvPr id="45" name="Shape 43"/>
+            <p:cNvSpPr/>
+            <p:nvPr/>
+          </p:nvSpPr>
+          <p:spPr>
+            <a:xfrm>
+              <a:off x="2070423" y="3737610"/>
+              <a:ext cx="201168" cy="1371600"/>
+            </a:xfrm>
+            <a:prstGeom prst="rect">
+              <a:avLst/>
+            </a:prstGeom>
+            <a:solidFill>
+              <a:srgbClr val="14B8A6">
+                <a:alpha val="80000"/>
+              </a:srgbClr>
+            </a:solidFill>
+            <a:ln w="12700">
+              <a:solidFill>
+                <a:srgbClr val="0F1F3D"/>
+              </a:solidFill>
+              <a:prstDash val="solid"/>
+            </a:ln>
+          </p:spPr>
+          <p:txBody>
+            <a:bodyPr/>
+            <a:lstStyle/>
+            <a:p>
+              <a:endParaRPr lang="sk-SK"/>
+            </a:p>
+          </p:txBody>
+        </p:sp>
+        <p:sp>
+          <p:nvSpPr>
+            <p:cNvPr id="46" name="Shape 44"/>
+            <p:cNvSpPr/>
+            <p:nvPr/>
+          </p:nvSpPr>
+          <p:spPr>
+            <a:xfrm>
+              <a:off x="2317311" y="3006090"/>
+              <a:ext cx="201168" cy="2103120"/>
+            </a:xfrm>
+            <a:prstGeom prst="rect">
+              <a:avLst/>
+            </a:prstGeom>
+            <a:solidFill>
+              <a:srgbClr val="F59E0B">
+                <a:alpha val="80000"/>
+              </a:srgbClr>
+            </a:solidFill>
+            <a:ln w="12700">
+              <a:solidFill>
+                <a:srgbClr val="0F1F3D"/>
+              </a:solidFill>
+              <a:prstDash val="solid"/>
+            </a:ln>
+          </p:spPr>
+          <p:txBody>
+            <a:bodyPr/>
+            <a:lstStyle/>
+            <a:p>
+              <a:endParaRPr lang="sk-SK"/>
+            </a:p>
+          </p:txBody>
+        </p:sp>
+        <p:sp>
+          <p:nvSpPr>
+            <p:cNvPr id="47" name="Shape 45"/>
+            <p:cNvSpPr/>
+            <p:nvPr/>
+          </p:nvSpPr>
+          <p:spPr>
+            <a:xfrm>
+              <a:off x="2564199" y="4194810"/>
+              <a:ext cx="201168" cy="914400"/>
+            </a:xfrm>
+            <a:prstGeom prst="rect">
+              <a:avLst/>
+            </a:prstGeom>
+            <a:solidFill>
+              <a:srgbClr val="0D9488">
+                <a:alpha val="80000"/>
+              </a:srgbClr>
+            </a:solidFill>
+            <a:ln w="12700">
+              <a:solidFill>
+                <a:srgbClr val="0F1F3D"/>
+              </a:solidFill>
+              <a:prstDash val="solid"/>
+            </a:ln>
+          </p:spPr>
+          <p:txBody>
+            <a:bodyPr/>
+            <a:lstStyle/>
+            <a:p>
+              <a:endParaRPr lang="sk-SK"/>
+            </a:p>
+          </p:txBody>
+        </p:sp>
+      </p:grpSp>
       <p:sp>
         <p:nvSpPr>
           <p:cNvPr id="2" name="Shape 0"/>
@@ -1522,31 +2269,13 @@
             <a:prstDash val="solid"/>
           </a:ln>
         </p:spPr>
-      </p:sp>
-      <p:sp>
-        <p:nvSpPr>
-          <p:cNvPr id="3" name="Shape 1"/>
-          <p:cNvSpPr/>
-          <p:nvPr/>
-        </p:nvSpPr>
-        <p:spPr>
-          <a:xfrm>
-            <a:off x="0" y="64008"/>
-            <a:ext cx="109728" cy="5079492"/>
-          </a:xfrm>
-          <a:prstGeom prst="rect">
-            <a:avLst/>
-          </a:prstGeom>
-          <a:solidFill>
-            <a:srgbClr val="0D9488"/>
-          </a:solidFill>
-          <a:ln w="12700">
-            <a:solidFill>
-              <a:srgbClr val="0D9488"/>
-            </a:solidFill>
-            <a:prstDash val="solid"/>
-          </a:ln>
-        </p:spPr>
+        <p:txBody>
+          <a:bodyPr/>
+          <a:lstStyle/>
+          <a:p>
+            <a:endParaRPr lang="sk-SK"/>
+          </a:p>
+        </p:txBody>
       </p:sp>
       <p:sp>
         <p:nvSpPr>
@@ -1556,7 +2285,7 @@
         </p:nvSpPr>
         <p:spPr>
           <a:xfrm>
-            <a:off x="365760" y="914400"/>
+            <a:off x="356429" y="914400"/>
             <a:ext cx="5669280" cy="2011680"/>
           </a:xfrm>
           <a:prstGeom prst="rect">
@@ -1569,7 +2298,7 @@
           <a:bodyPr wrap="square" lIns="0" tIns="0" rIns="0" bIns="0" rtlCol="0" anchor="ctr"/>
           <a:lstStyle/>
           <a:p>
-            <a:pPr algn="l" indent="0" marL="0">
+            <a:pPr marL="0" indent="0" algn="l">
               <a:buNone/>
             </a:pPr>
             <a:r>
@@ -1586,7 +2315,7 @@
             <a:endParaRPr lang="en-US" sz="3600" dirty="0"/>
           </a:p>
           <a:p>
-            <a:pPr algn="l" indent="0" marL="0">
+            <a:pPr marL="0" indent="0" algn="l">
               <a:buNone/>
             </a:pPr>
             <a:r>
@@ -1625,20 +2354,9 @@
           <a:bodyPr wrap="square" lIns="0" tIns="0" rIns="0" bIns="0" rtlCol="0" anchor="ctr"/>
           <a:lstStyle/>
           <a:p>
-            <a:pPr algn="l" indent="0" marL="0">
+            <a:pPr marL="0" indent="0" algn="l">
               <a:buNone/>
             </a:pPr>
-            <a:r>
-              <a:rPr lang="en-US" sz="1500" dirty="0">
-                <a:solidFill>
-                  <a:srgbClr val="14B8A6"/>
-                </a:solidFill>
-                <a:latin typeface="Calibri" pitchFamily="34" charset="0"/>
-                <a:ea typeface="Calibri" pitchFamily="34" charset="-122"/>
-                <a:cs typeface="Calibri" pitchFamily="34" charset="-120"/>
-              </a:rPr>
-              <a:t>Manuálna implementácia (NumPy) vs OpenCV</a:t>
-            </a:r>
             <a:endParaRPr lang="en-US" sz="1500" dirty="0"/>
           </a:p>
         </p:txBody>
@@ -1651,8 +2369,8 @@
         </p:nvSpPr>
         <p:spPr>
           <a:xfrm>
-            <a:off x="365760" y="3657600"/>
-            <a:ext cx="5029200" cy="822960"/>
+            <a:off x="356429" y="3595393"/>
+            <a:ext cx="5029200" cy="1191491"/>
           </a:xfrm>
           <a:prstGeom prst="rect">
             <a:avLst/>
@@ -1667,6 +2385,13 @@
             <a:prstDash val="solid"/>
           </a:ln>
         </p:spPr>
+        <p:txBody>
+          <a:bodyPr/>
+          <a:lstStyle/>
+          <a:p>
+            <a:endParaRPr lang="sk-SK"/>
+          </a:p>
+        </p:txBody>
       </p:sp>
       <p:sp>
         <p:nvSpPr>
@@ -1676,8 +2401,8 @@
         </p:nvSpPr>
         <p:spPr>
           <a:xfrm>
-            <a:off x="365760" y="3657600"/>
-            <a:ext cx="5029200" cy="822960"/>
+            <a:off x="356429" y="3657599"/>
+            <a:ext cx="5120640" cy="1191491"/>
           </a:xfrm>
           <a:prstGeom prst="rect">
             <a:avLst/>
@@ -1689,38 +2414,150 @@
           <a:bodyPr wrap="square" rtlCol="0" anchor="ctr"/>
           <a:lstStyle/>
           <a:p>
-            <a:pPr algn="ctr" indent="0" marL="0">
+            <a:pPr marL="0" marR="0" lvl="0" indent="0" algn="l" defTabSz="914400" rtl="0" eaLnBrk="1" fontAlgn="auto" latinLnBrk="0" hangingPunct="1">
+              <a:lnSpc>
+                <a:spcPct val="100000"/>
+              </a:lnSpc>
+              <a:spcBef>
+                <a:spcPts val="900"/>
+              </a:spcBef>
+              <a:spcAft>
+                <a:spcPts val="0"/>
+              </a:spcAft>
+              <a:buClrTx/>
+              <a:buSzTx/>
+              <a:buFont typeface="Arial" panose="020B0604020202020204" pitchFamily="34" charset="0"/>
+              <a:buNone/>
+              <a:tabLst/>
+              <a:defRPr/>
+            </a:pPr>
+            <a:r>
+              <a:rPr kumimoji="0" lang="sk-SK" sz="1200" b="0" i="0" u="none" strike="noStrike" kern="1200" cap="none" spc="0" normalizeH="0" baseline="0" noProof="0" dirty="0">
+                <a:ln>
+                  <a:noFill/>
+                </a:ln>
+                <a:solidFill>
+                  <a:srgbClr val="FFFFFF"/>
+                </a:solidFill>
+                <a:effectLst/>
+                <a:uLnTx/>
+                <a:uFillTx/>
+                <a:ea typeface="+mn-ea"/>
+                <a:cs typeface="+mn-cs"/>
+              </a:rPr>
+              <a:t>Autori: 		Dominik Kupec a Martin Brandobur</a:t>
+            </a:r>
+          </a:p>
+          <a:p>
+            <a:pPr marL="0" marR="0" lvl="0" indent="0" algn="l" defTabSz="914400" rtl="0" eaLnBrk="1" fontAlgn="auto" latinLnBrk="0" hangingPunct="1">
+              <a:lnSpc>
+                <a:spcPct val="100000"/>
+              </a:lnSpc>
+              <a:spcBef>
+                <a:spcPts val="900"/>
+              </a:spcBef>
+              <a:spcAft>
+                <a:spcPts val="0"/>
+              </a:spcAft>
+              <a:buClrTx/>
+              <a:buSzTx/>
+              <a:buFont typeface="Arial" panose="020B0604020202020204" pitchFamily="34" charset="0"/>
+              <a:buNone/>
+              <a:tabLst/>
+              <a:defRPr/>
+            </a:pPr>
+            <a:r>
+              <a:rPr kumimoji="0" lang="sk-SK" sz="1200" b="0" i="0" u="none" strike="noStrike" kern="1200" cap="none" spc="0" normalizeH="0" baseline="0" noProof="0" dirty="0">
+                <a:ln>
+                  <a:noFill/>
+                </a:ln>
+                <a:solidFill>
+                  <a:srgbClr val="FFFFFF"/>
+                </a:solidFill>
+                <a:effectLst/>
+                <a:uLnTx/>
+                <a:uFillTx/>
+                <a:ea typeface="+mn-ea"/>
+                <a:cs typeface="+mn-cs"/>
+              </a:rPr>
+              <a:t>Študijný program: 	robotika a kybernetika</a:t>
+            </a:r>
+          </a:p>
+          <a:p>
+            <a:pPr marL="0" marR="0" lvl="0" indent="0" algn="l" defTabSz="914400" rtl="0" eaLnBrk="1" fontAlgn="auto" latinLnBrk="0" hangingPunct="1">
+              <a:lnSpc>
+                <a:spcPct val="100000"/>
+              </a:lnSpc>
+              <a:spcBef>
+                <a:spcPts val="900"/>
+              </a:spcBef>
+              <a:spcAft>
+                <a:spcPts val="0"/>
+              </a:spcAft>
+              <a:buClrTx/>
+              <a:buSzTx/>
+              <a:buFont typeface="Arial" panose="020B0604020202020204" pitchFamily="34" charset="0"/>
+              <a:buNone/>
+              <a:tabLst/>
+              <a:defRPr/>
+            </a:pPr>
+            <a:r>
+              <a:rPr kumimoji="0" lang="sk-SK" sz="1200" b="0" i="0" u="none" strike="noStrike" kern="1200" cap="none" spc="0" normalizeH="0" baseline="0" noProof="0" dirty="0">
+                <a:ln>
+                  <a:noFill/>
+                </a:ln>
+                <a:solidFill>
+                  <a:srgbClr val="FFFFFF"/>
+                </a:solidFill>
+                <a:effectLst/>
+                <a:uLnTx/>
+                <a:uFillTx/>
+                <a:ea typeface="+mn-ea"/>
+                <a:cs typeface="+mn-cs"/>
+              </a:rPr>
+              <a:t>Študijný odbor: 	kybernetika</a:t>
+            </a:r>
+          </a:p>
+          <a:p>
+            <a:pPr marL="0" marR="0" lvl="0" indent="0" algn="l" defTabSz="914400" rtl="0" eaLnBrk="1" fontAlgn="auto" latinLnBrk="0" hangingPunct="1">
+              <a:lnSpc>
+                <a:spcPct val="100000"/>
+              </a:lnSpc>
+              <a:spcBef>
+                <a:spcPts val="900"/>
+              </a:spcBef>
+              <a:spcAft>
+                <a:spcPts val="0"/>
+              </a:spcAft>
+              <a:buClrTx/>
+              <a:buSzTx/>
+              <a:buFont typeface="Arial" panose="020B0604020202020204" pitchFamily="34" charset="0"/>
+              <a:buNone/>
+              <a:tabLst/>
+              <a:defRPr/>
+            </a:pPr>
+            <a:r>
+              <a:rPr kumimoji="0" lang="sk-SK" sz="1200" b="0" i="0" u="none" strike="noStrike" kern="1200" cap="none" spc="0" normalizeH="0" baseline="0" noProof="0" dirty="0">
+                <a:ln>
+                  <a:noFill/>
+                </a:ln>
+                <a:solidFill>
+                  <a:srgbClr val="FFFFFF"/>
+                </a:solidFill>
+                <a:effectLst/>
+                <a:uLnTx/>
+                <a:uFillTx/>
+                <a:ea typeface="+mn-ea"/>
+                <a:cs typeface="+mn-cs"/>
+              </a:rPr>
+              <a:t>Predmet: 		počítačové videnie a spracovanie obrazu</a:t>
+            </a:r>
+          </a:p>
+          <a:p>
+            <a:pPr marL="0" indent="0" algn="ctr">
               <a:buNone/>
             </a:pPr>
-            <a:r>
-              <a:rPr lang="en-US" sz="1100" dirty="0">
-                <a:solidFill>
-                  <a:srgbClr val="FFFFFF"/>
-                </a:solidFill>
-                <a:latin typeface="Calibri" pitchFamily="34" charset="0"/>
-                <a:ea typeface="Calibri" pitchFamily="34" charset="-122"/>
-                <a:cs typeface="Calibri" pitchFamily="34" charset="-120"/>
-              </a:rPr>
-              <a:t>Zadanie 3  ·  Skupina D  ·  PVSO</a:t>
-            </a:r>
-            <a:endParaRPr lang="en-US" sz="1100" dirty="0"/>
-          </a:p>
-          <a:p>
-            <a:pPr algn="ctr" indent="0" marL="0">
-              <a:buNone/>
-            </a:pPr>
-            <a:r>
-              <a:rPr lang="en-US" sz="1100" dirty="0">
-                <a:solidFill>
-                  <a:srgbClr val="FFFFFF"/>
-                </a:solidFill>
-                <a:latin typeface="Calibri" pitchFamily="34" charset="0"/>
-                <a:ea typeface="Calibri" pitchFamily="34" charset="-122"/>
-                <a:cs typeface="Calibri" pitchFamily="34" charset="-120"/>
-              </a:rPr>
-              <a:t>Počítačové videnie a spracovanie obrazu  ·  UNIZA</a:t>
-            </a:r>
-            <a:endParaRPr lang="en-US" sz="1100" dirty="0"/>
+            <a:endParaRPr lang="en-US" sz="1000" dirty="0"/>
           </a:p>
         </p:txBody>
       </p:sp>
@@ -1748,6 +2585,13 @@
             <a:prstDash val="solid"/>
           </a:ln>
         </p:spPr>
+        <p:txBody>
+          <a:bodyPr/>
+          <a:lstStyle/>
+          <a:p>
+            <a:endParaRPr lang="sk-SK"/>
+          </a:p>
+        </p:txBody>
       </p:sp>
       <p:sp>
         <p:nvSpPr>
@@ -1764,7 +2608,9 @@
             <a:avLst/>
           </a:prstGeom>
           <a:solidFill>
-            <a:srgbClr val="0F1F3D"/>
+            <a:schemeClr val="accent1">
+              <a:lumMod val="75000"/>
+            </a:schemeClr>
           </a:solidFill>
           <a:ln w="12700">
             <a:solidFill>
@@ -1773,6 +2619,13 @@
             <a:prstDash val="solid"/>
           </a:ln>
         </p:spPr>
+        <p:txBody>
+          <a:bodyPr/>
+          <a:lstStyle/>
+          <a:p>
+            <a:endParaRPr lang="sk-SK"/>
+          </a:p>
+        </p:txBody>
       </p:sp>
       <p:sp>
         <p:nvSpPr>
@@ -1798,6 +2651,13 @@
             <a:prstDash val="solid"/>
           </a:ln>
         </p:spPr>
+        <p:txBody>
+          <a:bodyPr/>
+          <a:lstStyle/>
+          <a:p>
+            <a:endParaRPr lang="sk-SK"/>
+          </a:p>
+        </p:txBody>
       </p:sp>
       <p:sp>
         <p:nvSpPr>
@@ -1823,6 +2683,13 @@
             <a:prstDash val="solid"/>
           </a:ln>
         </p:spPr>
+        <p:txBody>
+          <a:bodyPr/>
+          <a:lstStyle/>
+          <a:p>
+            <a:endParaRPr lang="sk-SK"/>
+          </a:p>
+        </p:txBody>
       </p:sp>
       <p:sp>
         <p:nvSpPr>
@@ -1848,6 +2715,13 @@
             <a:prstDash val="solid"/>
           </a:ln>
         </p:spPr>
+        <p:txBody>
+          <a:bodyPr/>
+          <a:lstStyle/>
+          <a:p>
+            <a:endParaRPr lang="sk-SK"/>
+          </a:p>
+        </p:txBody>
       </p:sp>
       <p:sp>
         <p:nvSpPr>
@@ -1873,6 +2747,13 @@
             <a:prstDash val="solid"/>
           </a:ln>
         </p:spPr>
+        <p:txBody>
+          <a:bodyPr/>
+          <a:lstStyle/>
+          <a:p>
+            <a:endParaRPr lang="sk-SK"/>
+          </a:p>
+        </p:txBody>
       </p:sp>
       <p:sp>
         <p:nvSpPr>
@@ -1898,6 +2779,13 @@
             <a:prstDash val="solid"/>
           </a:ln>
         </p:spPr>
+        <p:txBody>
+          <a:bodyPr/>
+          <a:lstStyle/>
+          <a:p>
+            <a:endParaRPr lang="sk-SK"/>
+          </a:p>
+        </p:txBody>
       </p:sp>
       <p:sp>
         <p:nvSpPr>
@@ -1914,7 +2802,9 @@
             <a:avLst/>
           </a:prstGeom>
           <a:solidFill>
-            <a:srgbClr val="0F1F3D"/>
+            <a:schemeClr val="accent1">
+              <a:lumMod val="75000"/>
+            </a:schemeClr>
           </a:solidFill>
           <a:ln w="12700">
             <a:solidFill>
@@ -1923,6 +2813,13 @@
             <a:prstDash val="solid"/>
           </a:ln>
         </p:spPr>
+        <p:txBody>
+          <a:bodyPr/>
+          <a:lstStyle/>
+          <a:p>
+            <a:endParaRPr lang="sk-SK"/>
+          </a:p>
+        </p:txBody>
       </p:sp>
       <p:sp>
         <p:nvSpPr>
@@ -1948,6 +2845,13 @@
             <a:prstDash val="solid"/>
           </a:ln>
         </p:spPr>
+        <p:txBody>
+          <a:bodyPr/>
+          <a:lstStyle/>
+          <a:p>
+            <a:endParaRPr lang="sk-SK"/>
+          </a:p>
+        </p:txBody>
       </p:sp>
       <p:sp>
         <p:nvSpPr>
@@ -1973,6 +2877,13 @@
             <a:prstDash val="solid"/>
           </a:ln>
         </p:spPr>
+        <p:txBody>
+          <a:bodyPr/>
+          <a:lstStyle/>
+          <a:p>
+            <a:endParaRPr lang="sk-SK"/>
+          </a:p>
+        </p:txBody>
       </p:sp>
       <p:sp>
         <p:nvSpPr>
@@ -1998,6 +2909,13 @@
             <a:prstDash val="solid"/>
           </a:ln>
         </p:spPr>
+        <p:txBody>
+          <a:bodyPr/>
+          <a:lstStyle/>
+          <a:p>
+            <a:endParaRPr lang="sk-SK"/>
+          </a:p>
+        </p:txBody>
       </p:sp>
       <p:sp>
         <p:nvSpPr>
@@ -2023,6 +2941,13 @@
             <a:prstDash val="solid"/>
           </a:ln>
         </p:spPr>
+        <p:txBody>
+          <a:bodyPr/>
+          <a:lstStyle/>
+          <a:p>
+            <a:endParaRPr lang="sk-SK"/>
+          </a:p>
+        </p:txBody>
       </p:sp>
       <p:sp>
         <p:nvSpPr>
@@ -2048,6 +2973,13 @@
             <a:prstDash val="solid"/>
           </a:ln>
         </p:spPr>
+        <p:txBody>
+          <a:bodyPr/>
+          <a:lstStyle/>
+          <a:p>
+            <a:endParaRPr lang="sk-SK"/>
+          </a:p>
+        </p:txBody>
       </p:sp>
       <p:sp>
         <p:nvSpPr>
@@ -2064,7 +2996,9 @@
             <a:avLst/>
           </a:prstGeom>
           <a:solidFill>
-            <a:srgbClr val="0F1F3D"/>
+            <a:schemeClr val="accent1">
+              <a:lumMod val="75000"/>
+            </a:schemeClr>
           </a:solidFill>
           <a:ln w="12700">
             <a:solidFill>
@@ -2073,6 +3007,13 @@
             <a:prstDash val="solid"/>
           </a:ln>
         </p:spPr>
+        <p:txBody>
+          <a:bodyPr/>
+          <a:lstStyle/>
+          <a:p>
+            <a:endParaRPr lang="sk-SK"/>
+          </a:p>
+        </p:txBody>
       </p:sp>
       <p:sp>
         <p:nvSpPr>
@@ -2098,6 +3039,13 @@
             <a:prstDash val="solid"/>
           </a:ln>
         </p:spPr>
+        <p:txBody>
+          <a:bodyPr/>
+          <a:lstStyle/>
+          <a:p>
+            <a:endParaRPr lang="sk-SK"/>
+          </a:p>
+        </p:txBody>
       </p:sp>
       <p:sp>
         <p:nvSpPr>
@@ -2123,6 +3071,13 @@
             <a:prstDash val="solid"/>
           </a:ln>
         </p:spPr>
+        <p:txBody>
+          <a:bodyPr/>
+          <a:lstStyle/>
+          <a:p>
+            <a:endParaRPr lang="sk-SK"/>
+          </a:p>
+        </p:txBody>
       </p:sp>
       <p:sp>
         <p:nvSpPr>
@@ -2148,6 +3103,13 @@
             <a:prstDash val="solid"/>
           </a:ln>
         </p:spPr>
+        <p:txBody>
+          <a:bodyPr/>
+          <a:lstStyle/>
+          <a:p>
+            <a:endParaRPr lang="sk-SK"/>
+          </a:p>
+        </p:txBody>
       </p:sp>
       <p:sp>
         <p:nvSpPr>
@@ -2173,6 +3135,13 @@
             <a:prstDash val="solid"/>
           </a:ln>
         </p:spPr>
+        <p:txBody>
+          <a:bodyPr/>
+          <a:lstStyle/>
+          <a:p>
+            <a:endParaRPr lang="sk-SK"/>
+          </a:p>
+        </p:txBody>
       </p:sp>
       <p:sp>
         <p:nvSpPr>
@@ -2198,6 +3167,13 @@
             <a:prstDash val="solid"/>
           </a:ln>
         </p:spPr>
+        <p:txBody>
+          <a:bodyPr/>
+          <a:lstStyle/>
+          <a:p>
+            <a:endParaRPr lang="sk-SK"/>
+          </a:p>
+        </p:txBody>
       </p:sp>
       <p:sp>
         <p:nvSpPr>
@@ -2214,7 +3190,9 @@
             <a:avLst/>
           </a:prstGeom>
           <a:solidFill>
-            <a:srgbClr val="0F1F3D"/>
+            <a:schemeClr val="accent1">
+              <a:lumMod val="75000"/>
+            </a:schemeClr>
           </a:solidFill>
           <a:ln w="12700">
             <a:solidFill>
@@ -2223,6 +3201,13 @@
             <a:prstDash val="solid"/>
           </a:ln>
         </p:spPr>
+        <p:txBody>
+          <a:bodyPr/>
+          <a:lstStyle/>
+          <a:p>
+            <a:endParaRPr lang="sk-SK"/>
+          </a:p>
+        </p:txBody>
       </p:sp>
       <p:sp>
         <p:nvSpPr>
@@ -2239,7 +3224,9 @@
             <a:avLst/>
           </a:prstGeom>
           <a:solidFill>
-            <a:srgbClr val="0F1F3D"/>
+            <a:schemeClr val="accent1">
+              <a:lumMod val="75000"/>
+            </a:schemeClr>
           </a:solidFill>
           <a:ln w="12700">
             <a:solidFill>
@@ -2248,6 +3235,13 @@
             <a:prstDash val="solid"/>
           </a:ln>
         </p:spPr>
+        <p:txBody>
+          <a:bodyPr/>
+          <a:lstStyle/>
+          <a:p>
+            <a:endParaRPr lang="sk-SK"/>
+          </a:p>
+        </p:txBody>
       </p:sp>
       <p:sp>
         <p:nvSpPr>
@@ -2273,6 +3267,13 @@
             <a:prstDash val="solid"/>
           </a:ln>
         </p:spPr>
+        <p:txBody>
+          <a:bodyPr/>
+          <a:lstStyle/>
+          <a:p>
+            <a:endParaRPr lang="sk-SK"/>
+          </a:p>
+        </p:txBody>
       </p:sp>
       <p:sp>
         <p:nvSpPr>
@@ -2298,6 +3299,13 @@
             <a:prstDash val="solid"/>
           </a:ln>
         </p:spPr>
+        <p:txBody>
+          <a:bodyPr/>
+          <a:lstStyle/>
+          <a:p>
+            <a:endParaRPr lang="sk-SK"/>
+          </a:p>
+        </p:txBody>
       </p:sp>
       <p:sp>
         <p:nvSpPr>
@@ -2323,6 +3331,13 @@
             <a:prstDash val="solid"/>
           </a:ln>
         </p:spPr>
+        <p:txBody>
+          <a:bodyPr/>
+          <a:lstStyle/>
+          <a:p>
+            <a:endParaRPr lang="sk-SK"/>
+          </a:p>
+        </p:txBody>
       </p:sp>
       <p:sp>
         <p:nvSpPr>
@@ -2348,6 +3363,13 @@
             <a:prstDash val="solid"/>
           </a:ln>
         </p:spPr>
+        <p:txBody>
+          <a:bodyPr/>
+          <a:lstStyle/>
+          <a:p>
+            <a:endParaRPr lang="sk-SK"/>
+          </a:p>
+        </p:txBody>
       </p:sp>
       <p:sp>
         <p:nvSpPr>
@@ -2373,6 +3395,13 @@
             <a:prstDash val="solid"/>
           </a:ln>
         </p:spPr>
+        <p:txBody>
+          <a:bodyPr/>
+          <a:lstStyle/>
+          <a:p>
+            <a:endParaRPr lang="sk-SK"/>
+          </a:p>
+        </p:txBody>
       </p:sp>
       <p:sp>
         <p:nvSpPr>
@@ -2389,7 +3418,9 @@
             <a:avLst/>
           </a:prstGeom>
           <a:solidFill>
-            <a:srgbClr val="0F1F3D"/>
+            <a:schemeClr val="accent1">
+              <a:lumMod val="75000"/>
+            </a:schemeClr>
           </a:solidFill>
           <a:ln w="12700">
             <a:solidFill>
@@ -2398,6 +3429,13 @@
             <a:prstDash val="solid"/>
           </a:ln>
         </p:spPr>
+        <p:txBody>
+          <a:bodyPr/>
+          <a:lstStyle/>
+          <a:p>
+            <a:endParaRPr lang="sk-SK"/>
+          </a:p>
+        </p:txBody>
       </p:sp>
       <p:sp>
         <p:nvSpPr>
@@ -2423,6 +3461,13 @@
             <a:prstDash val="solid"/>
           </a:ln>
         </p:spPr>
+        <p:txBody>
+          <a:bodyPr/>
+          <a:lstStyle/>
+          <a:p>
+            <a:endParaRPr lang="sk-SK"/>
+          </a:p>
+        </p:txBody>
       </p:sp>
       <p:sp>
         <p:nvSpPr>
@@ -2448,6 +3493,13 @@
             <a:prstDash val="solid"/>
           </a:ln>
         </p:spPr>
+        <p:txBody>
+          <a:bodyPr/>
+          <a:lstStyle/>
+          <a:p>
+            <a:endParaRPr lang="sk-SK"/>
+          </a:p>
+        </p:txBody>
       </p:sp>
       <p:sp>
         <p:nvSpPr>
@@ -2473,276 +3525,13 @@
             <a:prstDash val="solid"/>
           </a:ln>
         </p:spPr>
-      </p:sp>
-      <p:sp>
-        <p:nvSpPr>
-          <p:cNvPr id="38" name="Shape 36"/>
-          <p:cNvSpPr/>
-          <p:nvPr/>
-        </p:nvSpPr>
-        <p:spPr>
-          <a:xfrm>
-            <a:off x="6400800" y="3840480"/>
-            <a:ext cx="201168" cy="731520"/>
-          </a:xfrm>
-          <a:prstGeom prst="rect">
-            <a:avLst/>
-          </a:prstGeom>
-          <a:solidFill>
-            <a:srgbClr val="0D9488">
-              <a:alpha val="80000"/>
-            </a:srgbClr>
-          </a:solidFill>
-          <a:ln w="12700">
-            <a:solidFill>
-              <a:srgbClr val="0F1F3D"/>
-            </a:solidFill>
-            <a:prstDash val="solid"/>
-          </a:ln>
-        </p:spPr>
-      </p:sp>
-      <p:sp>
-        <p:nvSpPr>
-          <p:cNvPr id="39" name="Shape 37"/>
-          <p:cNvSpPr/>
-          <p:nvPr/>
-        </p:nvSpPr>
-        <p:spPr>
-          <a:xfrm>
-            <a:off x="6647688" y="3291840"/>
-            <a:ext cx="201168" cy="1280160"/>
-          </a:xfrm>
-          <a:prstGeom prst="rect">
-            <a:avLst/>
-          </a:prstGeom>
-          <a:solidFill>
-            <a:srgbClr val="14B8A6">
-              <a:alpha val="80000"/>
-            </a:srgbClr>
-          </a:solidFill>
-          <a:ln w="12700">
-            <a:solidFill>
-              <a:srgbClr val="0F1F3D"/>
-            </a:solidFill>
-            <a:prstDash val="solid"/>
-          </a:ln>
-        </p:spPr>
-      </p:sp>
-      <p:sp>
-        <p:nvSpPr>
-          <p:cNvPr id="40" name="Shape 38"/>
-          <p:cNvSpPr/>
-          <p:nvPr/>
-        </p:nvSpPr>
-        <p:spPr>
-          <a:xfrm>
-            <a:off x="6894576" y="2651760"/>
-            <a:ext cx="201168" cy="1920240"/>
-          </a:xfrm>
-          <a:prstGeom prst="rect">
-            <a:avLst/>
-          </a:prstGeom>
-          <a:solidFill>
-            <a:srgbClr val="F59E0B">
-              <a:alpha val="80000"/>
-            </a:srgbClr>
-          </a:solidFill>
-          <a:ln w="12700">
-            <a:solidFill>
-              <a:srgbClr val="0F1F3D"/>
-            </a:solidFill>
-            <a:prstDash val="solid"/>
-          </a:ln>
-        </p:spPr>
-      </p:sp>
-      <p:sp>
-        <p:nvSpPr>
-          <p:cNvPr id="41" name="Shape 39"/>
-          <p:cNvSpPr/>
-          <p:nvPr/>
-        </p:nvSpPr>
-        <p:spPr>
-          <a:xfrm>
-            <a:off x="7141464" y="3017520"/>
-            <a:ext cx="201168" cy="1554480"/>
-          </a:xfrm>
-          <a:prstGeom prst="rect">
-            <a:avLst/>
-          </a:prstGeom>
-          <a:solidFill>
-            <a:srgbClr val="0D9488">
-              <a:alpha val="80000"/>
-            </a:srgbClr>
-          </a:solidFill>
-          <a:ln w="12700">
-            <a:solidFill>
-              <a:srgbClr val="0F1F3D"/>
-            </a:solidFill>
-            <a:prstDash val="solid"/>
-          </a:ln>
-        </p:spPr>
-      </p:sp>
-      <p:sp>
-        <p:nvSpPr>
-          <p:cNvPr id="42" name="Shape 40"/>
-          <p:cNvSpPr/>
-          <p:nvPr/>
-        </p:nvSpPr>
-        <p:spPr>
-          <a:xfrm>
-            <a:off x="7388352" y="2011680"/>
-            <a:ext cx="201168" cy="2560320"/>
-          </a:xfrm>
-          <a:prstGeom prst="rect">
-            <a:avLst/>
-          </a:prstGeom>
-          <a:solidFill>
-            <a:srgbClr val="14B8A6">
-              <a:alpha val="80000"/>
-            </a:srgbClr>
-          </a:solidFill>
-          <a:ln w="12700">
-            <a:solidFill>
-              <a:srgbClr val="0F1F3D"/>
-            </a:solidFill>
-            <a:prstDash val="solid"/>
-          </a:ln>
-        </p:spPr>
-      </p:sp>
-      <p:sp>
-        <p:nvSpPr>
-          <p:cNvPr id="43" name="Shape 41"/>
-          <p:cNvSpPr/>
-          <p:nvPr/>
-        </p:nvSpPr>
-        <p:spPr>
-          <a:xfrm>
-            <a:off x="7635240" y="3474720"/>
-            <a:ext cx="201168" cy="1097280"/>
-          </a:xfrm>
-          <a:prstGeom prst="rect">
-            <a:avLst/>
-          </a:prstGeom>
-          <a:solidFill>
-            <a:srgbClr val="F59E0B">
-              <a:alpha val="80000"/>
-            </a:srgbClr>
-          </a:solidFill>
-          <a:ln w="12700">
-            <a:solidFill>
-              <a:srgbClr val="0F1F3D"/>
-            </a:solidFill>
-            <a:prstDash val="solid"/>
-          </a:ln>
-        </p:spPr>
-      </p:sp>
-      <p:sp>
-        <p:nvSpPr>
-          <p:cNvPr id="44" name="Shape 42"/>
-          <p:cNvSpPr/>
-          <p:nvPr/>
-        </p:nvSpPr>
-        <p:spPr>
-          <a:xfrm>
-            <a:off x="7882128" y="3749040"/>
-            <a:ext cx="201168" cy="822960"/>
-          </a:xfrm>
-          <a:prstGeom prst="rect">
-            <a:avLst/>
-          </a:prstGeom>
-          <a:solidFill>
-            <a:srgbClr val="0D9488">
-              <a:alpha val="80000"/>
-            </a:srgbClr>
-          </a:solidFill>
-          <a:ln w="12700">
-            <a:solidFill>
-              <a:srgbClr val="0F1F3D"/>
-            </a:solidFill>
-            <a:prstDash val="solid"/>
-          </a:ln>
-        </p:spPr>
-      </p:sp>
-      <p:sp>
-        <p:nvSpPr>
-          <p:cNvPr id="45" name="Shape 43"/>
-          <p:cNvSpPr/>
-          <p:nvPr/>
-        </p:nvSpPr>
-        <p:spPr>
-          <a:xfrm>
-            <a:off x="8129016" y="3200400"/>
-            <a:ext cx="201168" cy="1371600"/>
-          </a:xfrm>
-          <a:prstGeom prst="rect">
-            <a:avLst/>
-          </a:prstGeom>
-          <a:solidFill>
-            <a:srgbClr val="14B8A6">
-              <a:alpha val="80000"/>
-            </a:srgbClr>
-          </a:solidFill>
-          <a:ln w="12700">
-            <a:solidFill>
-              <a:srgbClr val="0F1F3D"/>
-            </a:solidFill>
-            <a:prstDash val="solid"/>
-          </a:ln>
-        </p:spPr>
-      </p:sp>
-      <p:sp>
-        <p:nvSpPr>
-          <p:cNvPr id="46" name="Shape 44"/>
-          <p:cNvSpPr/>
-          <p:nvPr/>
-        </p:nvSpPr>
-        <p:spPr>
-          <a:xfrm>
-            <a:off x="8375904" y="2468880"/>
-            <a:ext cx="201168" cy="2103120"/>
-          </a:xfrm>
-          <a:prstGeom prst="rect">
-            <a:avLst/>
-          </a:prstGeom>
-          <a:solidFill>
-            <a:srgbClr val="F59E0B">
-              <a:alpha val="80000"/>
-            </a:srgbClr>
-          </a:solidFill>
-          <a:ln w="12700">
-            <a:solidFill>
-              <a:srgbClr val="0F1F3D"/>
-            </a:solidFill>
-            <a:prstDash val="solid"/>
-          </a:ln>
-        </p:spPr>
-      </p:sp>
-      <p:sp>
-        <p:nvSpPr>
-          <p:cNvPr id="47" name="Shape 45"/>
-          <p:cNvSpPr/>
-          <p:nvPr/>
-        </p:nvSpPr>
-        <p:spPr>
-          <a:xfrm>
-            <a:off x="8622792" y="3657600"/>
-            <a:ext cx="201168" cy="914400"/>
-          </a:xfrm>
-          <a:prstGeom prst="rect">
-            <a:avLst/>
-          </a:prstGeom>
-          <a:solidFill>
-            <a:srgbClr val="0D9488">
-              <a:alpha val="80000"/>
-            </a:srgbClr>
-          </a:solidFill>
-          <a:ln w="12700">
-            <a:solidFill>
-              <a:srgbClr val="0F1F3D"/>
-            </a:solidFill>
-            <a:prstDash val="solid"/>
-          </a:ln>
-        </p:spPr>
+        <p:txBody>
+          <a:bodyPr/>
+          <a:lstStyle/>
+          <a:p>
+            <a:endParaRPr lang="sk-SK"/>
+          </a:p>
+        </p:txBody>
       </p:sp>
       <p:sp>
         <p:nvSpPr>
@@ -2768,6 +3557,91 @@
             <a:prstDash val="solid"/>
           </a:ln>
         </p:spPr>
+        <p:txBody>
+          <a:bodyPr/>
+          <a:lstStyle/>
+          <a:p>
+            <a:endParaRPr lang="sk-SK"/>
+          </a:p>
+        </p:txBody>
+      </p:sp>
+      <p:sp>
+        <p:nvSpPr>
+          <p:cNvPr id="50" name="Shape 0">
+            <a:extLst>
+              <a:ext uri="{FF2B5EF4-FFF2-40B4-BE49-F238E27FC236}">
+                <a16:creationId xmlns:a16="http://schemas.microsoft.com/office/drawing/2014/main" id="{80E00163-380B-8713-6FC0-6D3169C70A99}"/>
+              </a:ext>
+            </a:extLst>
+          </p:cNvPr>
+          <p:cNvSpPr/>
+          <p:nvPr/>
+        </p:nvSpPr>
+        <p:spPr>
+          <a:xfrm rot="5400000">
+            <a:off x="-2535867" y="2539746"/>
+            <a:ext cx="5143500" cy="64008"/>
+          </a:xfrm>
+          <a:prstGeom prst="rect">
+            <a:avLst/>
+          </a:prstGeom>
+          <a:solidFill>
+            <a:srgbClr val="0D9488"/>
+          </a:solidFill>
+          <a:ln w="12700">
+            <a:solidFill>
+              <a:srgbClr val="0D9488"/>
+            </a:solidFill>
+            <a:prstDash val="solid"/>
+          </a:ln>
+        </p:spPr>
+        <p:txBody>
+          <a:bodyPr/>
+          <a:lstStyle/>
+          <a:p>
+            <a:pPr algn="r"/>
+            <a:endParaRPr lang="sk-SK" dirty="0"/>
+          </a:p>
+        </p:txBody>
+      </p:sp>
+      <p:sp>
+        <p:nvSpPr>
+          <p:cNvPr id="51" name="Shape 0">
+            <a:extLst>
+              <a:ext uri="{FF2B5EF4-FFF2-40B4-BE49-F238E27FC236}">
+                <a16:creationId xmlns:a16="http://schemas.microsoft.com/office/drawing/2014/main" id="{58EFC75E-D161-998E-7C12-122B9D533688}"/>
+              </a:ext>
+            </a:extLst>
+          </p:cNvPr>
+          <p:cNvSpPr/>
+          <p:nvPr/>
+        </p:nvSpPr>
+        <p:spPr>
+          <a:xfrm rot="5400000">
+            <a:off x="6531102" y="2532922"/>
+            <a:ext cx="5143500" cy="64008"/>
+          </a:xfrm>
+          <a:prstGeom prst="rect">
+            <a:avLst/>
+          </a:prstGeom>
+          <a:solidFill>
+            <a:srgbClr val="0D9488"/>
+          </a:solidFill>
+          <a:ln w="12700">
+            <a:solidFill>
+              <a:srgbClr val="0D9488"/>
+            </a:solidFill>
+            <a:prstDash val="solid"/>
+          </a:ln>
+        </p:spPr>
+        <p:txBody>
+          <a:bodyPr/>
+          <a:lstStyle/>
+          <a:p>
+            <a:pPr algn="r"/>
+            <a:endParaRPr lang="sk-SK" dirty="0"/>
+          </a:p>
+        </p:txBody>
       </p:sp>
     </p:spTree>
   </p:cSld>
@@ -2785,6 +3659,7 @@
         <a:solidFill>
           <a:srgbClr val="F0F4FA"/>
         </a:solidFill>
+        <a:effectLst/>
       </p:bgPr>
     </p:bg>
     <p:spTree>
@@ -2825,6 +3700,13 @@
             <a:prstDash val="solid"/>
           </a:ln>
         </p:spPr>
+        <p:txBody>
+          <a:bodyPr/>
+          <a:lstStyle/>
+          <a:p>
+            <a:endParaRPr lang="sk-SK"/>
+          </a:p>
+        </p:txBody>
       </p:sp>
       <p:sp>
         <p:nvSpPr>
@@ -2850,6 +3732,13 @@
             <a:prstDash val="solid"/>
           </a:ln>
         </p:spPr>
+        <p:txBody>
+          <a:bodyPr/>
+          <a:lstStyle/>
+          <a:p>
+            <a:endParaRPr lang="sk-SK"/>
+          </a:p>
+        </p:txBody>
       </p:sp>
       <p:sp>
         <p:nvSpPr>
@@ -2872,7 +3761,7 @@
           <a:bodyPr wrap="square" lIns="0" tIns="0" rIns="0" bIns="0" rtlCol="0" anchor="ctr"/>
           <a:lstStyle/>
           <a:p>
-            <a:pPr algn="l" indent="0" marL="0">
+            <a:pPr marL="0" indent="0" algn="l">
               <a:buNone/>
             </a:pPr>
             <a:r>
@@ -2914,13 +3803,20 @@
             <a:prstDash val="solid"/>
           </a:ln>
           <a:effectLst>
-            <a:outerShdw sx="100000" sy="100000" kx="0" ky="0" algn="bl" rotWithShape="0" blurRad="101600" dist="38100" dir="8100000">
+            <a:outerShdw blurRad="101600" dist="38100" dir="8100000" algn="bl" rotWithShape="0">
               <a:srgbClr val="000000">
                 <a:alpha val="12000"/>
               </a:srgbClr>
             </a:outerShdw>
           </a:effectLst>
         </p:spPr>
+        <p:txBody>
+          <a:bodyPr/>
+          <a:lstStyle/>
+          <a:p>
+            <a:endParaRPr lang="sk-SK"/>
+          </a:p>
+        </p:txBody>
       </p:sp>
       <p:sp>
         <p:nvSpPr>
@@ -2946,6 +3842,13 @@
             <a:prstDash val="solid"/>
           </a:ln>
         </p:spPr>
+        <p:txBody>
+          <a:bodyPr/>
+          <a:lstStyle/>
+          <a:p>
+            <a:endParaRPr lang="sk-SK"/>
+          </a:p>
+        </p:txBody>
       </p:sp>
       <p:sp>
         <p:nvSpPr>
@@ -2968,7 +3871,7 @@
           <a:bodyPr wrap="square" lIns="0" tIns="0" rIns="0" bIns="0" rtlCol="0" anchor="ctr"/>
           <a:lstStyle/>
           <a:p>
-            <a:pPr indent="0" marL="0">
+            <a:pPr marL="0" indent="0">
               <a:buNone/>
             </a:pPr>
             <a:r>
@@ -3007,7 +3910,7 @@
           <a:bodyPr wrap="square" lIns="0" tIns="0" rIns="0" bIns="0" rtlCol="0" anchor="t"/>
           <a:lstStyle/>
           <a:p>
-            <a:pPr indent="0" marL="0">
+            <a:pPr marL="0" indent="0">
               <a:buNone/>
             </a:pPr>
             <a:r>
@@ -3019,7 +3922,40 @@
                 <a:ea typeface="Calibri" pitchFamily="34" charset="-122"/>
                 <a:cs typeface="Calibri" pitchFamily="34" charset="-120"/>
               </a:rPr>
-              <a:t>📊  Výpočet histogramov pre každý farebný kanál (R, G, B) zvlášť + fitovanie Gaussovej krivky</a:t>
+              <a:t>📊  Výpočet histogramov pre každý farebný kanál (R, G, B) zvlášť + fitovanie </a:t>
+            </a:r>
+            <a:r>
+              <a:rPr lang="en-US" sz="1100" dirty="0" err="1">
+                <a:solidFill>
+                  <a:srgbClr val="64748B"/>
+                </a:solidFill>
+                <a:latin typeface="Calibri" pitchFamily="34" charset="0"/>
+                <a:ea typeface="Calibri" pitchFamily="34" charset="-122"/>
+                <a:cs typeface="Calibri" pitchFamily="34" charset="-120"/>
+              </a:rPr>
+              <a:t>Gaussovej</a:t>
+            </a:r>
+            <a:r>
+              <a:rPr lang="en-US" sz="1100" dirty="0">
+                <a:solidFill>
+                  <a:srgbClr val="64748B"/>
+                </a:solidFill>
+                <a:latin typeface="Calibri" pitchFamily="34" charset="0"/>
+                <a:ea typeface="Calibri" pitchFamily="34" charset="-122"/>
+                <a:cs typeface="Calibri" pitchFamily="34" charset="-120"/>
+              </a:rPr>
+              <a:t> </a:t>
+            </a:r>
+            <a:r>
+              <a:rPr lang="en-US" sz="1100" dirty="0" err="1">
+                <a:solidFill>
+                  <a:srgbClr val="64748B"/>
+                </a:solidFill>
+                <a:latin typeface="Calibri" pitchFamily="34" charset="0"/>
+                <a:ea typeface="Calibri" pitchFamily="34" charset="-122"/>
+                <a:cs typeface="Calibri" pitchFamily="34" charset="-120"/>
+              </a:rPr>
+              <a:t>krivky</a:t>
             </a:r>
             <a:endParaRPr lang="en-US" sz="1100" dirty="0"/>
           </a:p>
@@ -3049,13 +3985,20 @@
             <a:prstDash val="solid"/>
           </a:ln>
           <a:effectLst>
-            <a:outerShdw sx="100000" sy="100000" kx="0" ky="0" algn="bl" rotWithShape="0" blurRad="101600" dist="38100" dir="8100000">
+            <a:outerShdw blurRad="101600" dist="38100" dir="8100000" algn="bl" rotWithShape="0">
               <a:srgbClr val="000000">
                 <a:alpha val="12000"/>
               </a:srgbClr>
             </a:outerShdw>
           </a:effectLst>
         </p:spPr>
+        <p:txBody>
+          <a:bodyPr/>
+          <a:lstStyle/>
+          <a:p>
+            <a:endParaRPr lang="sk-SK"/>
+          </a:p>
+        </p:txBody>
       </p:sp>
       <p:sp>
         <p:nvSpPr>
@@ -3081,6 +4024,13 @@
             <a:prstDash val="solid"/>
           </a:ln>
         </p:spPr>
+        <p:txBody>
+          <a:bodyPr/>
+          <a:lstStyle/>
+          <a:p>
+            <a:endParaRPr lang="sk-SK"/>
+          </a:p>
+        </p:txBody>
       </p:sp>
       <p:sp>
         <p:nvSpPr>
@@ -3103,7 +4053,7 @@
           <a:bodyPr wrap="square" lIns="0" tIns="0" rIns="0" bIns="0" rtlCol="0" anchor="ctr"/>
           <a:lstStyle/>
           <a:p>
-            <a:pPr indent="0" marL="0">
+            <a:pPr marL="0" indent="0">
               <a:buNone/>
             </a:pPr>
             <a:r>
@@ -3142,7 +4092,7 @@
           <a:bodyPr wrap="square" lIns="0" tIns="0" rIns="0" bIns="0" rtlCol="0" anchor="t"/>
           <a:lstStyle/>
           <a:p>
-            <a:pPr indent="0" marL="0">
+            <a:pPr marL="0" indent="0">
               <a:buNone/>
             </a:pPr>
             <a:r>
@@ -3184,13 +4134,20 @@
             <a:prstDash val="solid"/>
           </a:ln>
           <a:effectLst>
-            <a:outerShdw sx="100000" sy="100000" kx="0" ky="0" algn="bl" rotWithShape="0" blurRad="101600" dist="38100" dir="8100000">
+            <a:outerShdw blurRad="101600" dist="38100" dir="8100000" algn="bl" rotWithShape="0">
               <a:srgbClr val="000000">
                 <a:alpha val="12000"/>
               </a:srgbClr>
             </a:outerShdw>
           </a:effectLst>
         </p:spPr>
+        <p:txBody>
+          <a:bodyPr/>
+          <a:lstStyle/>
+          <a:p>
+            <a:endParaRPr lang="sk-SK"/>
+          </a:p>
+        </p:txBody>
       </p:sp>
       <p:sp>
         <p:nvSpPr>
@@ -3216,6 +4173,13 @@
             <a:prstDash val="solid"/>
           </a:ln>
         </p:spPr>
+        <p:txBody>
+          <a:bodyPr/>
+          <a:lstStyle/>
+          <a:p>
+            <a:endParaRPr lang="sk-SK"/>
+          </a:p>
+        </p:txBody>
       </p:sp>
       <p:sp>
         <p:nvSpPr>
@@ -3238,7 +4202,7 @@
           <a:bodyPr wrap="square" lIns="0" tIns="0" rIns="0" bIns="0" rtlCol="0" anchor="ctr"/>
           <a:lstStyle/>
           <a:p>
-            <a:pPr indent="0" marL="0">
+            <a:pPr marL="0" indent="0">
               <a:buNone/>
             </a:pPr>
             <a:r>
@@ -3277,7 +4241,7 @@
           <a:bodyPr wrap="square" lIns="0" tIns="0" rIns="0" bIns="0" rtlCol="0" anchor="t"/>
           <a:lstStyle/>
           <a:p>
-            <a:pPr indent="0" marL="0">
+            <a:pPr marL="0" indent="0">
               <a:buNone/>
             </a:pPr>
             <a:r>
@@ -3319,13 +4283,20 @@
             <a:prstDash val="solid"/>
           </a:ln>
           <a:effectLst>
-            <a:outerShdw sx="100000" sy="100000" kx="0" ky="0" algn="bl" rotWithShape="0" blurRad="101600" dist="38100" dir="8100000">
+            <a:outerShdw blurRad="101600" dist="38100" dir="8100000" algn="bl" rotWithShape="0">
               <a:srgbClr val="000000">
                 <a:alpha val="12000"/>
               </a:srgbClr>
             </a:outerShdw>
           </a:effectLst>
         </p:spPr>
+        <p:txBody>
+          <a:bodyPr/>
+          <a:lstStyle/>
+          <a:p>
+            <a:endParaRPr lang="sk-SK"/>
+          </a:p>
+        </p:txBody>
       </p:sp>
       <p:sp>
         <p:nvSpPr>
@@ -3351,6 +4322,13 @@
             <a:prstDash val="solid"/>
           </a:ln>
         </p:spPr>
+        <p:txBody>
+          <a:bodyPr/>
+          <a:lstStyle/>
+          <a:p>
+            <a:endParaRPr lang="sk-SK"/>
+          </a:p>
+        </p:txBody>
       </p:sp>
       <p:sp>
         <p:nvSpPr>
@@ -3373,7 +4351,7 @@
           <a:bodyPr wrap="square" lIns="0" tIns="0" rIns="0" bIns="0" rtlCol="0" anchor="ctr"/>
           <a:lstStyle/>
           <a:p>
-            <a:pPr indent="0" marL="0">
+            <a:pPr marL="0" indent="0">
               <a:buNone/>
             </a:pPr>
             <a:r>
@@ -3412,7 +4390,7 @@
           <a:bodyPr wrap="square" lIns="0" tIns="0" rIns="0" bIns="0" rtlCol="0" anchor="t"/>
           <a:lstStyle/>
           <a:p>
-            <a:pPr indent="0" marL="0">
+            <a:pPr marL="0" indent="0">
               <a:buNone/>
             </a:pPr>
             <a:r>
@@ -3454,6 +4432,13 @@
             <a:prstDash val="solid"/>
           </a:ln>
         </p:spPr>
+        <p:txBody>
+          <a:bodyPr/>
+          <a:lstStyle/>
+          <a:p>
+            <a:endParaRPr lang="sk-SK"/>
+          </a:p>
+        </p:txBody>
       </p:sp>
       <p:sp>
         <p:nvSpPr>
@@ -3476,7 +4461,7 @@
           <a:bodyPr wrap="square" rtlCol="0" anchor="ctr"/>
           <a:lstStyle/>
           <a:p>
-            <a:pPr algn="ctr" indent="0" marL="0">
+            <a:pPr marL="0" indent="0" algn="ctr">
               <a:buNone/>
             </a:pPr>
             <a:r>
@@ -3510,6 +4495,7 @@
         <a:solidFill>
           <a:srgbClr val="F0F4FA"/>
         </a:solidFill>
+        <a:effectLst/>
       </p:bgPr>
     </p:bg>
     <p:spTree>
@@ -3550,6 +4536,13 @@
             <a:prstDash val="solid"/>
           </a:ln>
         </p:spPr>
+        <p:txBody>
+          <a:bodyPr/>
+          <a:lstStyle/>
+          <a:p>
+            <a:endParaRPr lang="sk-SK"/>
+          </a:p>
+        </p:txBody>
       </p:sp>
       <p:sp>
         <p:nvSpPr>
@@ -3575,6 +4568,13 @@
             <a:prstDash val="solid"/>
           </a:ln>
         </p:spPr>
+        <p:txBody>
+          <a:bodyPr/>
+          <a:lstStyle/>
+          <a:p>
+            <a:endParaRPr lang="sk-SK"/>
+          </a:p>
+        </p:txBody>
       </p:sp>
       <p:sp>
         <p:nvSpPr>
@@ -3597,7 +4597,7 @@
           <a:bodyPr wrap="square" lIns="0" tIns="0" rIns="0" bIns="0" rtlCol="0" anchor="ctr"/>
           <a:lstStyle/>
           <a:p>
-            <a:pPr algn="l" indent="0" marL="0">
+            <a:pPr marL="0" indent="0" algn="l">
               <a:buNone/>
             </a:pPr>
             <a:r>
@@ -3639,24 +4639,31 @@
             <a:prstDash val="solid"/>
           </a:ln>
           <a:effectLst>
-            <a:outerShdw sx="100000" sy="100000" kx="0" ky="0" algn="bl" rotWithShape="0" blurRad="101600" dist="38100" dir="8100000">
+            <a:outerShdw blurRad="101600" dist="38100" dir="8100000" algn="bl" rotWithShape="0">
               <a:srgbClr val="000000">
                 <a:alpha val="12000"/>
               </a:srgbClr>
             </a:outerShdw>
           </a:effectLst>
         </p:spPr>
+        <p:txBody>
+          <a:bodyPr/>
+          <a:lstStyle/>
+          <a:p>
+            <a:endParaRPr lang="sk-SK"/>
+          </a:p>
+        </p:txBody>
       </p:sp>
       <p:pic>
         <p:nvPicPr>
-          <p:cNvPr id="6" name="Image 0" descr="preencoded.png">    </p:cNvPr>
+          <p:cNvPr id="6" name="Image 0" descr="preencoded.png"/>
           <p:cNvPicPr>
             <a:picLocks noChangeAspect="1"/>
           </p:cNvPicPr>
           <p:nvPr/>
         </p:nvPicPr>
         <p:blipFill>
-          <a:blip r:embed="rId1"/>
+          <a:blip r:embed="rId3"/>
           <a:stretch>
             <a:fillRect/>
           </a:stretch>
@@ -3679,8 +4686,8 @@
         </p:nvSpPr>
         <p:spPr>
           <a:xfrm>
-            <a:off x="274320" y="4800600"/>
-            <a:ext cx="8595360" cy="274320"/>
+            <a:off x="0" y="4869180"/>
+            <a:ext cx="9144000" cy="274320"/>
           </a:xfrm>
           <a:prstGeom prst="rect">
             <a:avLst/>
@@ -3695,6 +4702,13 @@
             <a:prstDash val="solid"/>
           </a:ln>
         </p:spPr>
+        <p:txBody>
+          <a:bodyPr/>
+          <a:lstStyle/>
+          <a:p>
+            <a:endParaRPr lang="sk-SK"/>
+          </a:p>
+        </p:txBody>
       </p:sp>
       <p:sp>
         <p:nvSpPr>
@@ -3704,8 +4718,8 @@
         </p:nvSpPr>
         <p:spPr>
           <a:xfrm>
-            <a:off x="274320" y="4800600"/>
-            <a:ext cx="8595360" cy="274320"/>
+            <a:off x="0" y="4869180"/>
+            <a:ext cx="9144000" cy="274320"/>
           </a:xfrm>
           <a:prstGeom prst="rect">
             <a:avLst/>
@@ -3717,7 +4731,7 @@
           <a:bodyPr wrap="square" rtlCol="0" anchor="ctr"/>
           <a:lstStyle/>
           <a:p>
-            <a:pPr algn="ctr" indent="0" marL="0">
+            <a:pPr marL="0" indent="0" algn="ctr">
               <a:buNone/>
             </a:pPr>
             <a:r>
@@ -3751,6 +4765,7 @@
         <a:solidFill>
           <a:srgbClr val="F0F4FA"/>
         </a:solidFill>
+        <a:effectLst/>
       </p:bgPr>
     </p:bg>
     <p:spTree>
@@ -3791,6 +4806,13 @@
             <a:prstDash val="solid"/>
           </a:ln>
         </p:spPr>
+        <p:txBody>
+          <a:bodyPr/>
+          <a:lstStyle/>
+          <a:p>
+            <a:endParaRPr lang="sk-SK"/>
+          </a:p>
+        </p:txBody>
       </p:sp>
       <p:sp>
         <p:nvSpPr>
@@ -3816,6 +4838,13 @@
             <a:prstDash val="solid"/>
           </a:ln>
         </p:spPr>
+        <p:txBody>
+          <a:bodyPr/>
+          <a:lstStyle/>
+          <a:p>
+            <a:endParaRPr lang="sk-SK"/>
+          </a:p>
+        </p:txBody>
       </p:sp>
       <p:sp>
         <p:nvSpPr>
@@ -3838,7 +4867,7 @@
           <a:bodyPr wrap="square" lIns="0" tIns="0" rIns="0" bIns="0" rtlCol="0" anchor="ctr"/>
           <a:lstStyle/>
           <a:p>
-            <a:pPr algn="l" indent="0" marL="0">
+            <a:pPr marL="0" indent="0" algn="l">
               <a:buNone/>
             </a:pPr>
             <a:r>
@@ -3880,24 +4909,31 @@
             <a:prstDash val="solid"/>
           </a:ln>
           <a:effectLst>
-            <a:outerShdw sx="100000" sy="100000" kx="0" ky="0" algn="bl" rotWithShape="0" blurRad="101600" dist="38100" dir="8100000">
+            <a:outerShdw blurRad="101600" dist="38100" dir="8100000" algn="bl" rotWithShape="0">
               <a:srgbClr val="000000">
                 <a:alpha val="12000"/>
               </a:srgbClr>
             </a:outerShdw>
           </a:effectLst>
         </p:spPr>
+        <p:txBody>
+          <a:bodyPr/>
+          <a:lstStyle/>
+          <a:p>
+            <a:endParaRPr lang="sk-SK"/>
+          </a:p>
+        </p:txBody>
       </p:sp>
       <p:pic>
         <p:nvPicPr>
-          <p:cNvPr id="6" name="Image 0" descr="preencoded.png">    </p:cNvPr>
+          <p:cNvPr id="6" name="Image 0" descr="preencoded.png"/>
           <p:cNvPicPr>
             <a:picLocks noChangeAspect="1"/>
           </p:cNvPicPr>
           <p:nvPr/>
         </p:nvPicPr>
         <p:blipFill>
-          <a:blip r:embed="rId1"/>
+          <a:blip r:embed="rId3"/>
           <a:stretch>
             <a:fillRect/>
           </a:stretch>
@@ -3936,6 +4972,13 @@
             <a:prstDash val="solid"/>
           </a:ln>
         </p:spPr>
+        <p:txBody>
+          <a:bodyPr/>
+          <a:lstStyle/>
+          <a:p>
+            <a:endParaRPr lang="sk-SK"/>
+          </a:p>
+        </p:txBody>
       </p:sp>
       <p:sp>
         <p:nvSpPr>
@@ -3958,7 +5001,7 @@
           <a:bodyPr wrap="square" rtlCol="0" anchor="ctr"/>
           <a:lstStyle/>
           <a:p>
-            <a:pPr algn="ctr" indent="0" marL="0">
+            <a:pPr marL="0" indent="0" algn="ctr">
               <a:buNone/>
             </a:pPr>
             <a:r>
@@ -3973,10 +5016,90 @@
               <a:t>Metóda
 </a:t>
             </a:r>
-            <a:pPr algn="ctr" indent="0" marL="0">
+            <a:r>
+              <a:rPr lang="en-US" sz="1100" b="1" dirty="0">
+                <a:solidFill>
+                  <a:srgbClr val="FFFFFF"/>
+                </a:solidFill>
+                <a:latin typeface="Calibri" pitchFamily="34" charset="0"/>
+                <a:ea typeface="Calibri" pitchFamily="34" charset="-122"/>
+                <a:cs typeface="Calibri" pitchFamily="34" charset="-120"/>
+              </a:rPr>
+              <a:t>CDF → LUT → remap</a:t>
+            </a:r>
+            <a:endParaRPr lang="en-US" sz="800" dirty="0"/>
+          </a:p>
+        </p:txBody>
+      </p:sp>
+      <p:sp>
+        <p:nvSpPr>
+          <p:cNvPr id="9" name="Shape 6"/>
+          <p:cNvSpPr/>
+          <p:nvPr/>
+        </p:nvSpPr>
+        <p:spPr>
+          <a:xfrm>
+            <a:off x="2286000" y="4553712"/>
+            <a:ext cx="2286000" cy="589788"/>
+          </a:xfrm>
+          <a:prstGeom prst="rect">
+            <a:avLst/>
+          </a:prstGeom>
+          <a:solidFill>
+            <a:srgbClr val="1A3260"/>
+          </a:solidFill>
+          <a:ln w="12700">
+            <a:solidFill>
+              <a:srgbClr val="1A3260"/>
+            </a:solidFill>
+            <a:prstDash val="solid"/>
+          </a:ln>
+        </p:spPr>
+        <p:txBody>
+          <a:bodyPr/>
+          <a:lstStyle/>
+          <a:p>
+            <a:endParaRPr lang="sk-SK"/>
+          </a:p>
+        </p:txBody>
+      </p:sp>
+      <p:sp>
+        <p:nvSpPr>
+          <p:cNvPr id="10" name="Text 7"/>
+          <p:cNvSpPr/>
+          <p:nvPr/>
+        </p:nvSpPr>
+        <p:spPr>
+          <a:xfrm>
+            <a:off x="2286000" y="4553712"/>
+            <a:ext cx="2286000" cy="589788"/>
+          </a:xfrm>
+          <a:prstGeom prst="rect">
+            <a:avLst/>
+          </a:prstGeom>
+          <a:noFill/>
+          <a:ln/>
+        </p:spPr>
+        <p:txBody>
+          <a:bodyPr wrap="square" rtlCol="0" anchor="ctr"/>
+          <a:lstStyle/>
+          <a:p>
+            <a:pPr marL="0" indent="0" algn="ctr">
               <a:buNone/>
             </a:pPr>
             <a:r>
+              <a:rPr lang="en-US" sz="800" dirty="0">
+                <a:solidFill>
+                  <a:srgbClr val="FFFFFF"/>
+                </a:solidFill>
+                <a:latin typeface="Calibri" pitchFamily="34" charset="0"/>
+                <a:ea typeface="Calibri" pitchFamily="34" charset="-122"/>
+                <a:cs typeface="Calibri" pitchFamily="34" charset="-120"/>
+              </a:rPr>
+              <a:t>Diff
+</a:t>
+            </a:r>
+            <a:r>
               <a:rPr lang="en-US" sz="1100" b="1" dirty="0">
                 <a:solidFill>
                   <a:srgbClr val="FFFFFF"/>
@@ -3985,7 +5108,7 @@
                 <a:ea typeface="Calibri" pitchFamily="34" charset="-122"/>
                 <a:cs typeface="Calibri" pitchFamily="34" charset="-120"/>
               </a:rPr>
-              <a:t>CDF → LUT → remap</a:t>
+              <a:t>avg = 0.00 px</a:t>
             </a:r>
             <a:endParaRPr lang="en-US" sz="800" dirty="0"/>
           </a:p>
@@ -3993,38 +5116,45 @@
       </p:sp>
       <p:sp>
         <p:nvSpPr>
-          <p:cNvPr id="9" name="Shape 6"/>
-          <p:cNvSpPr/>
-          <p:nvPr/>
-        </p:nvSpPr>
-        <p:spPr>
-          <a:xfrm>
-            <a:off x="2286000" y="4553712"/>
+          <p:cNvPr id="11" name="Shape 8"/>
+          <p:cNvSpPr/>
+          <p:nvPr/>
+        </p:nvSpPr>
+        <p:spPr>
+          <a:xfrm>
+            <a:off x="4572000" y="4553712"/>
             <a:ext cx="2286000" cy="589788"/>
           </a:xfrm>
           <a:prstGeom prst="rect">
             <a:avLst/>
           </a:prstGeom>
           <a:solidFill>
-            <a:srgbClr val="1A3260"/>
-          </a:solidFill>
-          <a:ln w="12700">
-            <a:solidFill>
-              <a:srgbClr val="1A3260"/>
-            </a:solidFill>
-            <a:prstDash val="solid"/>
-          </a:ln>
-        </p:spPr>
-      </p:sp>
-      <p:sp>
-        <p:nvSpPr>
-          <p:cNvPr id="10" name="Text 7"/>
-          <p:cNvSpPr/>
-          <p:nvPr/>
-        </p:nvSpPr>
-        <p:spPr>
-          <a:xfrm>
-            <a:off x="2286000" y="4553712"/>
+            <a:srgbClr val="0F1F3D"/>
+          </a:solidFill>
+          <a:ln w="12700">
+            <a:solidFill>
+              <a:srgbClr val="0F1F3D"/>
+            </a:solidFill>
+            <a:prstDash val="solid"/>
+          </a:ln>
+        </p:spPr>
+        <p:txBody>
+          <a:bodyPr/>
+          <a:lstStyle/>
+          <a:p>
+            <a:endParaRPr lang="sk-SK"/>
+          </a:p>
+        </p:txBody>
+      </p:sp>
+      <p:sp>
+        <p:nvSpPr>
+          <p:cNvPr id="12" name="Text 9"/>
+          <p:cNvSpPr/>
+          <p:nvPr/>
+        </p:nvSpPr>
+        <p:spPr>
+          <a:xfrm>
+            <a:off x="4572000" y="4553712"/>
             <a:ext cx="2286000" cy="589788"/>
           </a:xfrm>
           <a:prstGeom prst="rect">
@@ -4037,168 +5167,93 @@
           <a:bodyPr wrap="square" rtlCol="0" anchor="ctr"/>
           <a:lstStyle/>
           <a:p>
-            <a:pPr algn="ctr" indent="0" marL="0">
+            <a:pPr marL="0" indent="0" algn="ctr">
               <a:buNone/>
             </a:pPr>
             <a:r>
               <a:rPr lang="en-US" sz="800" dirty="0">
                 <a:solidFill>
-                  <a:srgbClr val="FFFFFF"/>
-                </a:solidFill>
-                <a:latin typeface="Calibri" pitchFamily="34" charset="0"/>
-                <a:ea typeface="Calibri" pitchFamily="34" charset="-122"/>
-                <a:cs typeface="Calibri" pitchFamily="34" charset="-120"/>
-              </a:rPr>
-              <a:t>Diff
+                  <a:srgbClr val="14B8A6"/>
+                </a:solidFill>
+                <a:latin typeface="Calibri" pitchFamily="34" charset="0"/>
+                <a:ea typeface="Calibri" pitchFamily="34" charset="-122"/>
+                <a:cs typeface="Calibri" pitchFamily="34" charset="-120"/>
+              </a:rPr>
+              <a:t>OpenCV
 </a:t>
             </a:r>
-            <a:pPr algn="ctr" indent="0" marL="0">
+            <a:r>
+              <a:rPr lang="en-US" sz="1100" b="1" dirty="0">
+                <a:solidFill>
+                  <a:srgbClr val="14B8A6"/>
+                </a:solidFill>
+                <a:latin typeface="Calibri" pitchFamily="34" charset="0"/>
+                <a:ea typeface="Calibri" pitchFamily="34" charset="-122"/>
+                <a:cs typeface="Calibri" pitchFamily="34" charset="-120"/>
+              </a:rPr>
+              <a:t>cv2.equalizeHist</a:t>
+            </a:r>
+            <a:endParaRPr lang="en-US" sz="800" dirty="0"/>
+          </a:p>
+        </p:txBody>
+      </p:sp>
+      <p:sp>
+        <p:nvSpPr>
+          <p:cNvPr id="13" name="Shape 10"/>
+          <p:cNvSpPr/>
+          <p:nvPr/>
+        </p:nvSpPr>
+        <p:spPr>
+          <a:xfrm>
+            <a:off x="6858000" y="4553712"/>
+            <a:ext cx="2286000" cy="589788"/>
+          </a:xfrm>
+          <a:prstGeom prst="rect">
+            <a:avLst/>
+          </a:prstGeom>
+          <a:solidFill>
+            <a:srgbClr val="1A3260"/>
+          </a:solidFill>
+          <a:ln w="12700">
+            <a:solidFill>
+              <a:srgbClr val="1A3260"/>
+            </a:solidFill>
+            <a:prstDash val="solid"/>
+          </a:ln>
+        </p:spPr>
+        <p:txBody>
+          <a:bodyPr/>
+          <a:lstStyle/>
+          <a:p>
+            <a:endParaRPr lang="sk-SK"/>
+          </a:p>
+        </p:txBody>
+      </p:sp>
+      <p:sp>
+        <p:nvSpPr>
+          <p:cNvPr id="14" name="Text 11"/>
+          <p:cNvSpPr/>
+          <p:nvPr/>
+        </p:nvSpPr>
+        <p:spPr>
+          <a:xfrm>
+            <a:off x="6858000" y="4553712"/>
+            <a:ext cx="2286000" cy="589788"/>
+          </a:xfrm>
+          <a:prstGeom prst="rect">
+            <a:avLst/>
+          </a:prstGeom>
+          <a:noFill/>
+          <a:ln/>
+        </p:spPr>
+        <p:txBody>
+          <a:bodyPr wrap="square" rtlCol="0" anchor="ctr"/>
+          <a:lstStyle/>
+          <a:p>
+            <a:pPr marL="0" indent="0" algn="ctr">
               <a:buNone/>
             </a:pPr>
             <a:r>
-              <a:rPr lang="en-US" sz="1100" b="1" dirty="0">
-                <a:solidFill>
-                  <a:srgbClr val="FFFFFF"/>
-                </a:solidFill>
-                <a:latin typeface="Calibri" pitchFamily="34" charset="0"/>
-                <a:ea typeface="Calibri" pitchFamily="34" charset="-122"/>
-                <a:cs typeface="Calibri" pitchFamily="34" charset="-120"/>
-              </a:rPr>
-              <a:t>avg = 0.00 px</a:t>
-            </a:r>
-            <a:endParaRPr lang="en-US" sz="800" dirty="0"/>
-          </a:p>
-        </p:txBody>
-      </p:sp>
-      <p:sp>
-        <p:nvSpPr>
-          <p:cNvPr id="11" name="Shape 8"/>
-          <p:cNvSpPr/>
-          <p:nvPr/>
-        </p:nvSpPr>
-        <p:spPr>
-          <a:xfrm>
-            <a:off x="4572000" y="4553712"/>
-            <a:ext cx="2286000" cy="589788"/>
-          </a:xfrm>
-          <a:prstGeom prst="rect">
-            <a:avLst/>
-          </a:prstGeom>
-          <a:solidFill>
-            <a:srgbClr val="0F1F3D"/>
-          </a:solidFill>
-          <a:ln w="12700">
-            <a:solidFill>
-              <a:srgbClr val="0F1F3D"/>
-            </a:solidFill>
-            <a:prstDash val="solid"/>
-          </a:ln>
-        </p:spPr>
-      </p:sp>
-      <p:sp>
-        <p:nvSpPr>
-          <p:cNvPr id="12" name="Text 9"/>
-          <p:cNvSpPr/>
-          <p:nvPr/>
-        </p:nvSpPr>
-        <p:spPr>
-          <a:xfrm>
-            <a:off x="4572000" y="4553712"/>
-            <a:ext cx="2286000" cy="589788"/>
-          </a:xfrm>
-          <a:prstGeom prst="rect">
-            <a:avLst/>
-          </a:prstGeom>
-          <a:noFill/>
-          <a:ln/>
-        </p:spPr>
-        <p:txBody>
-          <a:bodyPr wrap="square" rtlCol="0" anchor="ctr"/>
-          <a:lstStyle/>
-          <a:p>
-            <a:pPr algn="ctr" indent="0" marL="0">
-              <a:buNone/>
-            </a:pPr>
-            <a:r>
-              <a:rPr lang="en-US" sz="800" dirty="0">
-                <a:solidFill>
-                  <a:srgbClr val="14B8A6"/>
-                </a:solidFill>
-                <a:latin typeface="Calibri" pitchFamily="34" charset="0"/>
-                <a:ea typeface="Calibri" pitchFamily="34" charset="-122"/>
-                <a:cs typeface="Calibri" pitchFamily="34" charset="-120"/>
-              </a:rPr>
-              <a:t>OpenCV
-</a:t>
-            </a:r>
-            <a:pPr algn="ctr" indent="0" marL="0">
-              <a:buNone/>
-            </a:pPr>
-            <a:r>
-              <a:rPr lang="en-US" sz="1100" b="1" dirty="0">
-                <a:solidFill>
-                  <a:srgbClr val="14B8A6"/>
-                </a:solidFill>
-                <a:latin typeface="Calibri" pitchFamily="34" charset="0"/>
-                <a:ea typeface="Calibri" pitchFamily="34" charset="-122"/>
-                <a:cs typeface="Calibri" pitchFamily="34" charset="-120"/>
-              </a:rPr>
-              <a:t>cv2.equalizeHist</a:t>
-            </a:r>
-            <a:endParaRPr lang="en-US" sz="800" dirty="0"/>
-          </a:p>
-        </p:txBody>
-      </p:sp>
-      <p:sp>
-        <p:nvSpPr>
-          <p:cNvPr id="13" name="Shape 10"/>
-          <p:cNvSpPr/>
-          <p:nvPr/>
-        </p:nvSpPr>
-        <p:spPr>
-          <a:xfrm>
-            <a:off x="6858000" y="4553712"/>
-            <a:ext cx="2286000" cy="589788"/>
-          </a:xfrm>
-          <a:prstGeom prst="rect">
-            <a:avLst/>
-          </a:prstGeom>
-          <a:solidFill>
-            <a:srgbClr val="1A3260"/>
-          </a:solidFill>
-          <a:ln w="12700">
-            <a:solidFill>
-              <a:srgbClr val="1A3260"/>
-            </a:solidFill>
-            <a:prstDash val="solid"/>
-          </a:ln>
-        </p:spPr>
-      </p:sp>
-      <p:sp>
-        <p:nvSpPr>
-          <p:cNvPr id="14" name="Text 11"/>
-          <p:cNvSpPr/>
-          <p:nvPr/>
-        </p:nvSpPr>
-        <p:spPr>
-          <a:xfrm>
-            <a:off x="6858000" y="4553712"/>
-            <a:ext cx="2286000" cy="589788"/>
-          </a:xfrm>
-          <a:prstGeom prst="rect">
-            <a:avLst/>
-          </a:prstGeom>
-          <a:noFill/>
-          <a:ln/>
-        </p:spPr>
-        <p:txBody>
-          <a:bodyPr wrap="square" rtlCol="0" anchor="ctr"/>
-          <a:lstStyle/>
-          <a:p>
-            <a:pPr algn="ctr" indent="0" marL="0">
-              <a:buNone/>
-            </a:pPr>
-            <a:r>
               <a:rPr lang="en-US" sz="800" dirty="0">
                 <a:solidFill>
                   <a:srgbClr val="14B8A6"/>
@@ -4210,9 +5265,6 @@
               <a:t>Rýchlosť
 </a:t>
             </a:r>
-            <a:pPr algn="ctr" indent="0" marL="0">
-              <a:buNone/>
-            </a:pPr>
             <a:r>
               <a:rPr lang="en-US" sz="1100" b="1" dirty="0">
                 <a:solidFill>
@@ -4244,6 +5296,7 @@
         <a:solidFill>
           <a:srgbClr val="F0F4FA"/>
         </a:solidFill>
+        <a:effectLst/>
       </p:bgPr>
     </p:bg>
     <p:spTree>
@@ -4284,6 +5337,13 @@
             <a:prstDash val="solid"/>
           </a:ln>
         </p:spPr>
+        <p:txBody>
+          <a:bodyPr/>
+          <a:lstStyle/>
+          <a:p>
+            <a:endParaRPr lang="sk-SK"/>
+          </a:p>
+        </p:txBody>
       </p:sp>
       <p:sp>
         <p:nvSpPr>
@@ -4309,6 +5369,13 @@
             <a:prstDash val="solid"/>
           </a:ln>
         </p:spPr>
+        <p:txBody>
+          <a:bodyPr/>
+          <a:lstStyle/>
+          <a:p>
+            <a:endParaRPr lang="sk-SK"/>
+          </a:p>
+        </p:txBody>
       </p:sp>
       <p:sp>
         <p:nvSpPr>
@@ -4331,7 +5398,7 @@
           <a:bodyPr wrap="square" lIns="0" tIns="0" rIns="0" bIns="0" rtlCol="0" anchor="ctr"/>
           <a:lstStyle/>
           <a:p>
-            <a:pPr algn="l" indent="0" marL="0">
+            <a:pPr marL="0" indent="0" algn="l">
               <a:buNone/>
             </a:pPr>
             <a:r>
@@ -4373,354 +5440,383 @@
             <a:prstDash val="solid"/>
           </a:ln>
           <a:effectLst>
-            <a:outerShdw sx="100000" sy="100000" kx="0" ky="0" algn="bl" rotWithShape="0" blurRad="101600" dist="38100" dir="8100000">
+            <a:outerShdw blurRad="101600" dist="38100" dir="8100000" algn="bl" rotWithShape="0">
               <a:srgbClr val="000000">
                 <a:alpha val="12000"/>
               </a:srgbClr>
             </a:outerShdw>
           </a:effectLst>
         </p:spPr>
+        <p:txBody>
+          <a:bodyPr/>
+          <a:lstStyle/>
+          <a:p>
+            <a:endParaRPr lang="sk-SK"/>
+          </a:p>
+        </p:txBody>
+      </p:sp>
+      <p:sp>
+        <p:nvSpPr>
+          <p:cNvPr id="7" name="Shape 4"/>
+          <p:cNvSpPr/>
+          <p:nvPr/>
+        </p:nvSpPr>
+        <p:spPr>
+          <a:xfrm>
+            <a:off x="0" y="4553712"/>
+            <a:ext cx="2286000" cy="589788"/>
+          </a:xfrm>
+          <a:prstGeom prst="rect">
+            <a:avLst/>
+          </a:prstGeom>
+          <a:solidFill>
+            <a:srgbClr val="0F1F3D"/>
+          </a:solidFill>
+          <a:ln w="12700">
+            <a:solidFill>
+              <a:srgbClr val="0F1F3D"/>
+            </a:solidFill>
+            <a:prstDash val="solid"/>
+          </a:ln>
+        </p:spPr>
+        <p:txBody>
+          <a:bodyPr/>
+          <a:lstStyle/>
+          <a:p>
+            <a:endParaRPr lang="sk-SK"/>
+          </a:p>
+        </p:txBody>
+      </p:sp>
+      <p:sp>
+        <p:nvSpPr>
+          <p:cNvPr id="8" name="Text 5"/>
+          <p:cNvSpPr/>
+          <p:nvPr/>
+        </p:nvSpPr>
+        <p:spPr>
+          <a:xfrm>
+            <a:off x="0" y="4553712"/>
+            <a:ext cx="2286000" cy="589788"/>
+          </a:xfrm>
+          <a:prstGeom prst="rect">
+            <a:avLst/>
+          </a:prstGeom>
+          <a:noFill/>
+          <a:ln/>
+        </p:spPr>
+        <p:txBody>
+          <a:bodyPr wrap="square" rtlCol="0" anchor="ctr"/>
+          <a:lstStyle/>
+          <a:p>
+            <a:pPr marL="0" indent="0" algn="ctr">
+              <a:buNone/>
+            </a:pPr>
+            <a:r>
+              <a:rPr lang="en-US" sz="800" dirty="0">
+                <a:solidFill>
+                  <a:srgbClr val="FFFFFF"/>
+                </a:solidFill>
+                <a:latin typeface="Calibri" pitchFamily="34" charset="0"/>
+                <a:ea typeface="Calibri" pitchFamily="34" charset="-122"/>
+                <a:cs typeface="Calibri" pitchFamily="34" charset="-120"/>
+              </a:rPr>
+              <a:t>Priestor
+</a:t>
+            </a:r>
+            <a:r>
+              <a:rPr lang="en-US" sz="1100" b="1" dirty="0">
+                <a:solidFill>
+                  <a:srgbClr val="FFFFFF"/>
+                </a:solidFill>
+                <a:latin typeface="Calibri" pitchFamily="34" charset="0"/>
+                <a:ea typeface="Calibri" pitchFamily="34" charset="-122"/>
+                <a:cs typeface="Calibri" pitchFamily="34" charset="-120"/>
+              </a:rPr>
+              <a:t>BGR → YCrCb</a:t>
+            </a:r>
+            <a:endParaRPr lang="en-US" sz="800" dirty="0"/>
+          </a:p>
+        </p:txBody>
+      </p:sp>
+      <p:sp>
+        <p:nvSpPr>
+          <p:cNvPr id="9" name="Shape 6"/>
+          <p:cNvSpPr/>
+          <p:nvPr/>
+        </p:nvSpPr>
+        <p:spPr>
+          <a:xfrm>
+            <a:off x="2286000" y="4553712"/>
+            <a:ext cx="2286000" cy="589788"/>
+          </a:xfrm>
+          <a:prstGeom prst="rect">
+            <a:avLst/>
+          </a:prstGeom>
+          <a:solidFill>
+            <a:srgbClr val="1A3260"/>
+          </a:solidFill>
+          <a:ln w="12700">
+            <a:solidFill>
+              <a:srgbClr val="1A3260"/>
+            </a:solidFill>
+            <a:prstDash val="solid"/>
+          </a:ln>
+        </p:spPr>
+        <p:txBody>
+          <a:bodyPr/>
+          <a:lstStyle/>
+          <a:p>
+            <a:endParaRPr lang="sk-SK"/>
+          </a:p>
+        </p:txBody>
+      </p:sp>
+      <p:sp>
+        <p:nvSpPr>
+          <p:cNvPr id="10" name="Text 7"/>
+          <p:cNvSpPr/>
+          <p:nvPr/>
+        </p:nvSpPr>
+        <p:spPr>
+          <a:xfrm>
+            <a:off x="2286000" y="4553712"/>
+            <a:ext cx="2286000" cy="589788"/>
+          </a:xfrm>
+          <a:prstGeom prst="rect">
+            <a:avLst/>
+          </a:prstGeom>
+          <a:noFill/>
+          <a:ln/>
+        </p:spPr>
+        <p:txBody>
+          <a:bodyPr wrap="square" rtlCol="0" anchor="ctr"/>
+          <a:lstStyle/>
+          <a:p>
+            <a:pPr marL="0" indent="0" algn="ctr">
+              <a:buNone/>
+            </a:pPr>
+            <a:r>
+              <a:rPr lang="en-US" sz="800" dirty="0">
+                <a:solidFill>
+                  <a:srgbClr val="FFFFFF"/>
+                </a:solidFill>
+                <a:latin typeface="Calibri" pitchFamily="34" charset="0"/>
+                <a:ea typeface="Calibri" pitchFamily="34" charset="-122"/>
+                <a:cs typeface="Calibri" pitchFamily="34" charset="-120"/>
+              </a:rPr>
+              <a:t>Ekvalizácia
+</a:t>
+            </a:r>
+            <a:r>
+              <a:rPr lang="en-US" sz="1100" b="1" dirty="0">
+                <a:solidFill>
+                  <a:srgbClr val="FFFFFF"/>
+                </a:solidFill>
+                <a:latin typeface="Calibri" pitchFamily="34" charset="0"/>
+                <a:ea typeface="Calibri" pitchFamily="34" charset="-122"/>
+                <a:cs typeface="Calibri" pitchFamily="34" charset="-120"/>
+              </a:rPr>
+              <a:t>len Y kanál</a:t>
+            </a:r>
+            <a:endParaRPr lang="en-US" sz="800" dirty="0"/>
+          </a:p>
+        </p:txBody>
+      </p:sp>
+      <p:sp>
+        <p:nvSpPr>
+          <p:cNvPr id="11" name="Shape 8"/>
+          <p:cNvSpPr/>
+          <p:nvPr/>
+        </p:nvSpPr>
+        <p:spPr>
+          <a:xfrm>
+            <a:off x="4572000" y="4553712"/>
+            <a:ext cx="2286000" cy="589788"/>
+          </a:xfrm>
+          <a:prstGeom prst="rect">
+            <a:avLst/>
+          </a:prstGeom>
+          <a:solidFill>
+            <a:srgbClr val="0F1F3D"/>
+          </a:solidFill>
+          <a:ln w="12700">
+            <a:solidFill>
+              <a:srgbClr val="0F1F3D"/>
+            </a:solidFill>
+            <a:prstDash val="solid"/>
+          </a:ln>
+        </p:spPr>
+        <p:txBody>
+          <a:bodyPr/>
+          <a:lstStyle/>
+          <a:p>
+            <a:endParaRPr lang="sk-SK"/>
+          </a:p>
+        </p:txBody>
+      </p:sp>
+      <p:sp>
+        <p:nvSpPr>
+          <p:cNvPr id="12" name="Text 9"/>
+          <p:cNvSpPr/>
+          <p:nvPr/>
+        </p:nvSpPr>
+        <p:spPr>
+          <a:xfrm>
+            <a:off x="4572000" y="4553712"/>
+            <a:ext cx="2286000" cy="589788"/>
+          </a:xfrm>
+          <a:prstGeom prst="rect">
+            <a:avLst/>
+          </a:prstGeom>
+          <a:noFill/>
+          <a:ln/>
+        </p:spPr>
+        <p:txBody>
+          <a:bodyPr wrap="square" rtlCol="0" anchor="ctr"/>
+          <a:lstStyle/>
+          <a:p>
+            <a:pPr marL="0" indent="0" algn="ctr">
+              <a:buNone/>
+            </a:pPr>
+            <a:r>
+              <a:rPr lang="en-US" sz="800" dirty="0">
+                <a:solidFill>
+                  <a:srgbClr val="14B8A6"/>
+                </a:solidFill>
+                <a:latin typeface="Calibri" pitchFamily="34" charset="0"/>
+                <a:ea typeface="Calibri" pitchFamily="34" charset="-122"/>
+                <a:cs typeface="Calibri" pitchFamily="34" charset="-120"/>
+              </a:rPr>
+              <a:t>Diff
+</a:t>
+            </a:r>
+            <a:r>
+              <a:rPr lang="en-US" sz="1100" b="1" dirty="0">
+                <a:solidFill>
+                  <a:srgbClr val="14B8A6"/>
+                </a:solidFill>
+                <a:latin typeface="Calibri" pitchFamily="34" charset="0"/>
+                <a:ea typeface="Calibri" pitchFamily="34" charset="-122"/>
+                <a:cs typeface="Calibri" pitchFamily="34" charset="-120"/>
+              </a:rPr>
+              <a:t>avg = 0.00 px</a:t>
+            </a:r>
+            <a:endParaRPr lang="en-US" sz="800" dirty="0"/>
+          </a:p>
+        </p:txBody>
+      </p:sp>
+      <p:sp>
+        <p:nvSpPr>
+          <p:cNvPr id="13" name="Shape 10"/>
+          <p:cNvSpPr/>
+          <p:nvPr/>
+        </p:nvSpPr>
+        <p:spPr>
+          <a:xfrm>
+            <a:off x="6858000" y="4553712"/>
+            <a:ext cx="2286000" cy="589788"/>
+          </a:xfrm>
+          <a:prstGeom prst="rect">
+            <a:avLst/>
+          </a:prstGeom>
+          <a:solidFill>
+            <a:srgbClr val="1A3260"/>
+          </a:solidFill>
+          <a:ln w="12700">
+            <a:solidFill>
+              <a:srgbClr val="1A3260"/>
+            </a:solidFill>
+            <a:prstDash val="solid"/>
+          </a:ln>
+        </p:spPr>
+        <p:txBody>
+          <a:bodyPr/>
+          <a:lstStyle/>
+          <a:p>
+            <a:endParaRPr lang="sk-SK"/>
+          </a:p>
+        </p:txBody>
+      </p:sp>
+      <p:sp>
+        <p:nvSpPr>
+          <p:cNvPr id="14" name="Text 11"/>
+          <p:cNvSpPr/>
+          <p:nvPr/>
+        </p:nvSpPr>
+        <p:spPr>
+          <a:xfrm>
+            <a:off x="6858000" y="4553712"/>
+            <a:ext cx="2286000" cy="589788"/>
+          </a:xfrm>
+          <a:prstGeom prst="rect">
+            <a:avLst/>
+          </a:prstGeom>
+          <a:noFill/>
+          <a:ln/>
+        </p:spPr>
+        <p:txBody>
+          <a:bodyPr wrap="square" rtlCol="0" anchor="ctr"/>
+          <a:lstStyle/>
+          <a:p>
+            <a:pPr marL="0" indent="0" algn="ctr">
+              <a:buNone/>
+            </a:pPr>
+            <a:r>
+              <a:rPr lang="en-US" sz="800" dirty="0">
+                <a:solidFill>
+                  <a:srgbClr val="14B8A6"/>
+                </a:solidFill>
+                <a:latin typeface="Calibri" pitchFamily="34" charset="0"/>
+                <a:ea typeface="Calibri" pitchFamily="34" charset="-122"/>
+                <a:cs typeface="Calibri" pitchFamily="34" charset="-120"/>
+              </a:rPr>
+              <a:t>Farba
+</a:t>
+            </a:r>
+            <a:r>
+              <a:rPr lang="en-US" sz="1100" b="1" dirty="0">
+                <a:solidFill>
+                  <a:srgbClr val="14B8A6"/>
+                </a:solidFill>
+                <a:latin typeface="Calibri" pitchFamily="34" charset="0"/>
+                <a:ea typeface="Calibri" pitchFamily="34" charset="-122"/>
+                <a:cs typeface="Calibri" pitchFamily="34" charset="-120"/>
+              </a:rPr>
+              <a:t>zachovaná</a:t>
+            </a:r>
+            <a:endParaRPr lang="en-US" sz="800" dirty="0"/>
+          </a:p>
+        </p:txBody>
       </p:sp>
       <p:pic>
         <p:nvPicPr>
-          <p:cNvPr id="6" name="Image 0" descr="preencoded.png">    </p:cNvPr>
+          <p:cNvPr id="18" name="Obrázok 17">
+            <a:extLst>
+              <a:ext uri="{FF2B5EF4-FFF2-40B4-BE49-F238E27FC236}">
+                <a16:creationId xmlns:a16="http://schemas.microsoft.com/office/drawing/2014/main" id="{82136F55-5A46-4B0A-B14B-3F3426E1F1E8}"/>
+              </a:ext>
+            </a:extLst>
+          </p:cNvPr>
           <p:cNvPicPr>
             <a:picLocks noChangeAspect="1"/>
           </p:cNvPicPr>
           <p:nvPr/>
         </p:nvPicPr>
         <p:blipFill>
-          <a:blip r:embed="rId1"/>
+          <a:blip r:embed="rId3"/>
           <a:stretch>
             <a:fillRect/>
           </a:stretch>
         </p:blipFill>
         <p:spPr>
           <a:xfrm>
-            <a:off x="320040" y="777240"/>
-            <a:ext cx="8503920" cy="3657600"/>
+            <a:off x="1329690" y="749406"/>
+            <a:ext cx="6525009" cy="3728576"/>
           </a:xfrm>
           <a:prstGeom prst="rect">
             <a:avLst/>
           </a:prstGeom>
         </p:spPr>
       </p:pic>
-      <p:sp>
-        <p:nvSpPr>
-          <p:cNvPr id="7" name="Shape 4"/>
-          <p:cNvSpPr/>
-          <p:nvPr/>
-        </p:nvSpPr>
-        <p:spPr>
-          <a:xfrm>
-            <a:off x="0" y="4553712"/>
-            <a:ext cx="2286000" cy="589788"/>
-          </a:xfrm>
-          <a:prstGeom prst="rect">
-            <a:avLst/>
-          </a:prstGeom>
-          <a:solidFill>
-            <a:srgbClr val="0F1F3D"/>
-          </a:solidFill>
-          <a:ln w="12700">
-            <a:solidFill>
-              <a:srgbClr val="0F1F3D"/>
-            </a:solidFill>
-            <a:prstDash val="solid"/>
-          </a:ln>
-        </p:spPr>
-      </p:sp>
-      <p:sp>
-        <p:nvSpPr>
-          <p:cNvPr id="8" name="Text 5"/>
-          <p:cNvSpPr/>
-          <p:nvPr/>
-        </p:nvSpPr>
-        <p:spPr>
-          <a:xfrm>
-            <a:off x="0" y="4553712"/>
-            <a:ext cx="2286000" cy="589788"/>
-          </a:xfrm>
-          <a:prstGeom prst="rect">
-            <a:avLst/>
-          </a:prstGeom>
-          <a:noFill/>
-          <a:ln/>
-        </p:spPr>
-        <p:txBody>
-          <a:bodyPr wrap="square" rtlCol="0" anchor="ctr"/>
-          <a:lstStyle/>
-          <a:p>
-            <a:pPr algn="ctr" indent="0" marL="0">
-              <a:buNone/>
-            </a:pPr>
-            <a:r>
-              <a:rPr lang="en-US" sz="800" dirty="0">
-                <a:solidFill>
-                  <a:srgbClr val="FFFFFF"/>
-                </a:solidFill>
-                <a:latin typeface="Calibri" pitchFamily="34" charset="0"/>
-                <a:ea typeface="Calibri" pitchFamily="34" charset="-122"/>
-                <a:cs typeface="Calibri" pitchFamily="34" charset="-120"/>
-              </a:rPr>
-              <a:t>Priestor
-</a:t>
-            </a:r>
-            <a:pPr algn="ctr" indent="0" marL="0">
-              <a:buNone/>
-            </a:pPr>
-            <a:r>
-              <a:rPr lang="en-US" sz="1100" b="1" dirty="0">
-                <a:solidFill>
-                  <a:srgbClr val="FFFFFF"/>
-                </a:solidFill>
-                <a:latin typeface="Calibri" pitchFamily="34" charset="0"/>
-                <a:ea typeface="Calibri" pitchFamily="34" charset="-122"/>
-                <a:cs typeface="Calibri" pitchFamily="34" charset="-120"/>
-              </a:rPr>
-              <a:t>BGR → YCrCb</a:t>
-            </a:r>
-            <a:endParaRPr lang="en-US" sz="800" dirty="0"/>
-          </a:p>
-        </p:txBody>
-      </p:sp>
-      <p:sp>
-        <p:nvSpPr>
-          <p:cNvPr id="9" name="Shape 6"/>
-          <p:cNvSpPr/>
-          <p:nvPr/>
-        </p:nvSpPr>
-        <p:spPr>
-          <a:xfrm>
-            <a:off x="2286000" y="4553712"/>
-            <a:ext cx="2286000" cy="589788"/>
-          </a:xfrm>
-          <a:prstGeom prst="rect">
-            <a:avLst/>
-          </a:prstGeom>
-          <a:solidFill>
-            <a:srgbClr val="1A3260"/>
-          </a:solidFill>
-          <a:ln w="12700">
-            <a:solidFill>
-              <a:srgbClr val="1A3260"/>
-            </a:solidFill>
-            <a:prstDash val="solid"/>
-          </a:ln>
-        </p:spPr>
-      </p:sp>
-      <p:sp>
-        <p:nvSpPr>
-          <p:cNvPr id="10" name="Text 7"/>
-          <p:cNvSpPr/>
-          <p:nvPr/>
-        </p:nvSpPr>
-        <p:spPr>
-          <a:xfrm>
-            <a:off x="2286000" y="4553712"/>
-            <a:ext cx="2286000" cy="589788"/>
-          </a:xfrm>
-          <a:prstGeom prst="rect">
-            <a:avLst/>
-          </a:prstGeom>
-          <a:noFill/>
-          <a:ln/>
-        </p:spPr>
-        <p:txBody>
-          <a:bodyPr wrap="square" rtlCol="0" anchor="ctr"/>
-          <a:lstStyle/>
-          <a:p>
-            <a:pPr algn="ctr" indent="0" marL="0">
-              <a:buNone/>
-            </a:pPr>
-            <a:r>
-              <a:rPr lang="en-US" sz="800" dirty="0">
-                <a:solidFill>
-                  <a:srgbClr val="FFFFFF"/>
-                </a:solidFill>
-                <a:latin typeface="Calibri" pitchFamily="34" charset="0"/>
-                <a:ea typeface="Calibri" pitchFamily="34" charset="-122"/>
-                <a:cs typeface="Calibri" pitchFamily="34" charset="-120"/>
-              </a:rPr>
-              <a:t>Ekvalizácia
-</a:t>
-            </a:r>
-            <a:pPr algn="ctr" indent="0" marL="0">
-              <a:buNone/>
-            </a:pPr>
-            <a:r>
-              <a:rPr lang="en-US" sz="1100" b="1" dirty="0">
-                <a:solidFill>
-                  <a:srgbClr val="FFFFFF"/>
-                </a:solidFill>
-                <a:latin typeface="Calibri" pitchFamily="34" charset="0"/>
-                <a:ea typeface="Calibri" pitchFamily="34" charset="-122"/>
-                <a:cs typeface="Calibri" pitchFamily="34" charset="-120"/>
-              </a:rPr>
-              <a:t>len Y kanál</a:t>
-            </a:r>
-            <a:endParaRPr lang="en-US" sz="800" dirty="0"/>
-          </a:p>
-        </p:txBody>
-      </p:sp>
-      <p:sp>
-        <p:nvSpPr>
-          <p:cNvPr id="11" name="Shape 8"/>
-          <p:cNvSpPr/>
-          <p:nvPr/>
-        </p:nvSpPr>
-        <p:spPr>
-          <a:xfrm>
-            <a:off x="4572000" y="4553712"/>
-            <a:ext cx="2286000" cy="589788"/>
-          </a:xfrm>
-          <a:prstGeom prst="rect">
-            <a:avLst/>
-          </a:prstGeom>
-          <a:solidFill>
-            <a:srgbClr val="0F1F3D"/>
-          </a:solidFill>
-          <a:ln w="12700">
-            <a:solidFill>
-              <a:srgbClr val="0F1F3D"/>
-            </a:solidFill>
-            <a:prstDash val="solid"/>
-          </a:ln>
-        </p:spPr>
-      </p:sp>
-      <p:sp>
-        <p:nvSpPr>
-          <p:cNvPr id="12" name="Text 9"/>
-          <p:cNvSpPr/>
-          <p:nvPr/>
-        </p:nvSpPr>
-        <p:spPr>
-          <a:xfrm>
-            <a:off x="4572000" y="4553712"/>
-            <a:ext cx="2286000" cy="589788"/>
-          </a:xfrm>
-          <a:prstGeom prst="rect">
-            <a:avLst/>
-          </a:prstGeom>
-          <a:noFill/>
-          <a:ln/>
-        </p:spPr>
-        <p:txBody>
-          <a:bodyPr wrap="square" rtlCol="0" anchor="ctr"/>
-          <a:lstStyle/>
-          <a:p>
-            <a:pPr algn="ctr" indent="0" marL="0">
-              <a:buNone/>
-            </a:pPr>
-            <a:r>
-              <a:rPr lang="en-US" sz="800" dirty="0">
-                <a:solidFill>
-                  <a:srgbClr val="14B8A6"/>
-                </a:solidFill>
-                <a:latin typeface="Calibri" pitchFamily="34" charset="0"/>
-                <a:ea typeface="Calibri" pitchFamily="34" charset="-122"/>
-                <a:cs typeface="Calibri" pitchFamily="34" charset="-120"/>
-              </a:rPr>
-              <a:t>Diff
-</a:t>
-            </a:r>
-            <a:pPr algn="ctr" indent="0" marL="0">
-              <a:buNone/>
-            </a:pPr>
-            <a:r>
-              <a:rPr lang="en-US" sz="1100" b="1" dirty="0">
-                <a:solidFill>
-                  <a:srgbClr val="14B8A6"/>
-                </a:solidFill>
-                <a:latin typeface="Calibri" pitchFamily="34" charset="0"/>
-                <a:ea typeface="Calibri" pitchFamily="34" charset="-122"/>
-                <a:cs typeface="Calibri" pitchFamily="34" charset="-120"/>
-              </a:rPr>
-              <a:t>avg = 0.00 px</a:t>
-            </a:r>
-            <a:endParaRPr lang="en-US" sz="800" dirty="0"/>
-          </a:p>
-        </p:txBody>
-      </p:sp>
-      <p:sp>
-        <p:nvSpPr>
-          <p:cNvPr id="13" name="Shape 10"/>
-          <p:cNvSpPr/>
-          <p:nvPr/>
-        </p:nvSpPr>
-        <p:spPr>
-          <a:xfrm>
-            <a:off x="6858000" y="4553712"/>
-            <a:ext cx="2286000" cy="589788"/>
-          </a:xfrm>
-          <a:prstGeom prst="rect">
-            <a:avLst/>
-          </a:prstGeom>
-          <a:solidFill>
-            <a:srgbClr val="1A3260"/>
-          </a:solidFill>
-          <a:ln w="12700">
-            <a:solidFill>
-              <a:srgbClr val="1A3260"/>
-            </a:solidFill>
-            <a:prstDash val="solid"/>
-          </a:ln>
-        </p:spPr>
-      </p:sp>
-      <p:sp>
-        <p:nvSpPr>
-          <p:cNvPr id="14" name="Text 11"/>
-          <p:cNvSpPr/>
-          <p:nvPr/>
-        </p:nvSpPr>
-        <p:spPr>
-          <a:xfrm>
-            <a:off x="6858000" y="4553712"/>
-            <a:ext cx="2286000" cy="589788"/>
-          </a:xfrm>
-          <a:prstGeom prst="rect">
-            <a:avLst/>
-          </a:prstGeom>
-          <a:noFill/>
-          <a:ln/>
-        </p:spPr>
-        <p:txBody>
-          <a:bodyPr wrap="square" rtlCol="0" anchor="ctr"/>
-          <a:lstStyle/>
-          <a:p>
-            <a:pPr algn="ctr" indent="0" marL="0">
-              <a:buNone/>
-            </a:pPr>
-            <a:r>
-              <a:rPr lang="en-US" sz="800" dirty="0">
-                <a:solidFill>
-                  <a:srgbClr val="14B8A6"/>
-                </a:solidFill>
-                <a:latin typeface="Calibri" pitchFamily="34" charset="0"/>
-                <a:ea typeface="Calibri" pitchFamily="34" charset="-122"/>
-                <a:cs typeface="Calibri" pitchFamily="34" charset="-120"/>
-              </a:rPr>
-              <a:t>Farba
-</a:t>
-            </a:r>
-            <a:pPr algn="ctr" indent="0" marL="0">
-              <a:buNone/>
-            </a:pPr>
-            <a:r>
-              <a:rPr lang="en-US" sz="1100" b="1" dirty="0">
-                <a:solidFill>
-                  <a:srgbClr val="14B8A6"/>
-                </a:solidFill>
-                <a:latin typeface="Calibri" pitchFamily="34" charset="0"/>
-                <a:ea typeface="Calibri" pitchFamily="34" charset="-122"/>
-                <a:cs typeface="Calibri" pitchFamily="34" charset="-120"/>
-              </a:rPr>
-              <a:t>zachovaná</a:t>
-            </a:r>
-            <a:endParaRPr lang="en-US" sz="800" dirty="0"/>
-          </a:p>
-        </p:txBody>
-      </p:sp>
     </p:spTree>
   </p:cSld>
   <p:clrMapOvr>
@@ -4737,6 +5833,7 @@
         <a:solidFill>
           <a:srgbClr val="F0F4FA"/>
         </a:solidFill>
+        <a:effectLst/>
       </p:bgPr>
     </p:bg>
     <p:spTree>
@@ -4777,6 +5874,13 @@
             <a:prstDash val="solid"/>
           </a:ln>
         </p:spPr>
+        <p:txBody>
+          <a:bodyPr/>
+          <a:lstStyle/>
+          <a:p>
+            <a:endParaRPr lang="sk-SK"/>
+          </a:p>
+        </p:txBody>
       </p:sp>
       <p:sp>
         <p:nvSpPr>
@@ -4802,6 +5906,13 @@
             <a:prstDash val="solid"/>
           </a:ln>
         </p:spPr>
+        <p:txBody>
+          <a:bodyPr/>
+          <a:lstStyle/>
+          <a:p>
+            <a:endParaRPr lang="sk-SK"/>
+          </a:p>
+        </p:txBody>
       </p:sp>
       <p:sp>
         <p:nvSpPr>
@@ -4824,7 +5935,7 @@
           <a:bodyPr wrap="square" lIns="0" tIns="0" rIns="0" bIns="0" rtlCol="0" anchor="ctr"/>
           <a:lstStyle/>
           <a:p>
-            <a:pPr algn="l" indent="0" marL="0">
+            <a:pPr marL="0" indent="0" algn="l">
               <a:buNone/>
             </a:pPr>
             <a:r>
@@ -4866,354 +5977,383 @@
             <a:prstDash val="solid"/>
           </a:ln>
           <a:effectLst>
-            <a:outerShdw sx="100000" sy="100000" kx="0" ky="0" algn="bl" rotWithShape="0" blurRad="101600" dist="38100" dir="8100000">
+            <a:outerShdw blurRad="101600" dist="38100" dir="8100000" algn="bl" rotWithShape="0">
               <a:srgbClr val="000000">
                 <a:alpha val="12000"/>
               </a:srgbClr>
             </a:outerShdw>
           </a:effectLst>
         </p:spPr>
+        <p:txBody>
+          <a:bodyPr/>
+          <a:lstStyle/>
+          <a:p>
+            <a:endParaRPr lang="sk-SK"/>
+          </a:p>
+        </p:txBody>
+      </p:sp>
+      <p:sp>
+        <p:nvSpPr>
+          <p:cNvPr id="7" name="Shape 4"/>
+          <p:cNvSpPr/>
+          <p:nvPr/>
+        </p:nvSpPr>
+        <p:spPr>
+          <a:xfrm>
+            <a:off x="0" y="4553712"/>
+            <a:ext cx="2286000" cy="589788"/>
+          </a:xfrm>
+          <a:prstGeom prst="rect">
+            <a:avLst/>
+          </a:prstGeom>
+          <a:solidFill>
+            <a:srgbClr val="0F1F3D"/>
+          </a:solidFill>
+          <a:ln w="12700">
+            <a:solidFill>
+              <a:srgbClr val="0F1F3D"/>
+            </a:solidFill>
+            <a:prstDash val="solid"/>
+          </a:ln>
+        </p:spPr>
+        <p:txBody>
+          <a:bodyPr/>
+          <a:lstStyle/>
+          <a:p>
+            <a:endParaRPr lang="sk-SK"/>
+          </a:p>
+        </p:txBody>
+      </p:sp>
+      <p:sp>
+        <p:nvSpPr>
+          <p:cNvPr id="8" name="Text 5"/>
+          <p:cNvSpPr/>
+          <p:nvPr/>
+        </p:nvSpPr>
+        <p:spPr>
+          <a:xfrm>
+            <a:off x="0" y="4553712"/>
+            <a:ext cx="2286000" cy="589788"/>
+          </a:xfrm>
+          <a:prstGeom prst="rect">
+            <a:avLst/>
+          </a:prstGeom>
+          <a:noFill/>
+          <a:ln/>
+        </p:spPr>
+        <p:txBody>
+          <a:bodyPr wrap="square" rtlCol="0" anchor="ctr"/>
+          <a:lstStyle/>
+          <a:p>
+            <a:pPr marL="0" indent="0" algn="ctr">
+              <a:buNone/>
+            </a:pPr>
+            <a:r>
+              <a:rPr lang="en-US" sz="800" dirty="0">
+                <a:solidFill>
+                  <a:srgbClr val="FFFFFF"/>
+                </a:solidFill>
+                <a:latin typeface="Calibri" pitchFamily="34" charset="0"/>
+                <a:ea typeface="Calibri" pitchFamily="34" charset="-122"/>
+                <a:cs typeface="Calibri" pitchFamily="34" charset="-120"/>
+              </a:rPr>
+              <a:t>Mriežka
+</a:t>
+            </a:r>
+            <a:r>
+              <a:rPr lang="en-US" sz="1100" b="1" dirty="0">
+                <a:solidFill>
+                  <a:srgbClr val="FFFFFF"/>
+                </a:solidFill>
+                <a:latin typeface="Calibri" pitchFamily="34" charset="0"/>
+                <a:ea typeface="Calibri" pitchFamily="34" charset="-122"/>
+                <a:cs typeface="Calibri" pitchFamily="34" charset="-120"/>
+              </a:rPr>
+              <a:t>8 × 8 dlaždíc</a:t>
+            </a:r>
+            <a:endParaRPr lang="en-US" sz="800" dirty="0"/>
+          </a:p>
+        </p:txBody>
+      </p:sp>
+      <p:sp>
+        <p:nvSpPr>
+          <p:cNvPr id="9" name="Shape 6"/>
+          <p:cNvSpPr/>
+          <p:nvPr/>
+        </p:nvSpPr>
+        <p:spPr>
+          <a:xfrm>
+            <a:off x="2286000" y="4553712"/>
+            <a:ext cx="2286000" cy="589788"/>
+          </a:xfrm>
+          <a:prstGeom prst="rect">
+            <a:avLst/>
+          </a:prstGeom>
+          <a:solidFill>
+            <a:srgbClr val="1A3260"/>
+          </a:solidFill>
+          <a:ln w="12700">
+            <a:solidFill>
+              <a:srgbClr val="1A3260"/>
+            </a:solidFill>
+            <a:prstDash val="solid"/>
+          </a:ln>
+        </p:spPr>
+        <p:txBody>
+          <a:bodyPr/>
+          <a:lstStyle/>
+          <a:p>
+            <a:endParaRPr lang="sk-SK"/>
+          </a:p>
+        </p:txBody>
+      </p:sp>
+      <p:sp>
+        <p:nvSpPr>
+          <p:cNvPr id="10" name="Text 7"/>
+          <p:cNvSpPr/>
+          <p:nvPr/>
+        </p:nvSpPr>
+        <p:spPr>
+          <a:xfrm>
+            <a:off x="2286000" y="4553712"/>
+            <a:ext cx="2286000" cy="589788"/>
+          </a:xfrm>
+          <a:prstGeom prst="rect">
+            <a:avLst/>
+          </a:prstGeom>
+          <a:noFill/>
+          <a:ln/>
+        </p:spPr>
+        <p:txBody>
+          <a:bodyPr wrap="square" rtlCol="0" anchor="ctr"/>
+          <a:lstStyle/>
+          <a:p>
+            <a:pPr marL="0" indent="0" algn="ctr">
+              <a:buNone/>
+            </a:pPr>
+            <a:r>
+              <a:rPr lang="en-US" sz="800" dirty="0">
+                <a:solidFill>
+                  <a:srgbClr val="FFFFFF"/>
+                </a:solidFill>
+                <a:latin typeface="Calibri" pitchFamily="34" charset="0"/>
+                <a:ea typeface="Calibri" pitchFamily="34" charset="-122"/>
+                <a:cs typeface="Calibri" pitchFamily="34" charset="-120"/>
+              </a:rPr>
+              <a:t>Clip limit
+</a:t>
+            </a:r>
+            <a:r>
+              <a:rPr lang="en-US" sz="1100" b="1" dirty="0">
+                <a:solidFill>
+                  <a:srgbClr val="FFFFFF"/>
+                </a:solidFill>
+                <a:latin typeface="Calibri" pitchFamily="34" charset="0"/>
+                <a:ea typeface="Calibri" pitchFamily="34" charset="-122"/>
+                <a:cs typeface="Calibri" pitchFamily="34" charset="-120"/>
+              </a:rPr>
+              <a:t>2.0</a:t>
+            </a:r>
+            <a:endParaRPr lang="en-US" sz="800" dirty="0"/>
+          </a:p>
+        </p:txBody>
+      </p:sp>
+      <p:sp>
+        <p:nvSpPr>
+          <p:cNvPr id="11" name="Shape 8"/>
+          <p:cNvSpPr/>
+          <p:nvPr/>
+        </p:nvSpPr>
+        <p:spPr>
+          <a:xfrm>
+            <a:off x="4572000" y="4553712"/>
+            <a:ext cx="2286000" cy="589788"/>
+          </a:xfrm>
+          <a:prstGeom prst="rect">
+            <a:avLst/>
+          </a:prstGeom>
+          <a:solidFill>
+            <a:srgbClr val="0F1F3D"/>
+          </a:solidFill>
+          <a:ln w="12700">
+            <a:solidFill>
+              <a:srgbClr val="0F1F3D"/>
+            </a:solidFill>
+            <a:prstDash val="solid"/>
+          </a:ln>
+        </p:spPr>
+        <p:txBody>
+          <a:bodyPr/>
+          <a:lstStyle/>
+          <a:p>
+            <a:endParaRPr lang="sk-SK"/>
+          </a:p>
+        </p:txBody>
+      </p:sp>
+      <p:sp>
+        <p:nvSpPr>
+          <p:cNvPr id="12" name="Text 9"/>
+          <p:cNvSpPr/>
+          <p:nvPr/>
+        </p:nvSpPr>
+        <p:spPr>
+          <a:xfrm>
+            <a:off x="4572000" y="4553712"/>
+            <a:ext cx="2286000" cy="589788"/>
+          </a:xfrm>
+          <a:prstGeom prst="rect">
+            <a:avLst/>
+          </a:prstGeom>
+          <a:noFill/>
+          <a:ln/>
+        </p:spPr>
+        <p:txBody>
+          <a:bodyPr wrap="square" rtlCol="0" anchor="ctr"/>
+          <a:lstStyle/>
+          <a:p>
+            <a:pPr marL="0" indent="0" algn="ctr">
+              <a:buNone/>
+            </a:pPr>
+            <a:r>
+              <a:rPr lang="en-US" sz="800" dirty="0">
+                <a:solidFill>
+                  <a:srgbClr val="14B8A6"/>
+                </a:solidFill>
+                <a:latin typeface="Calibri" pitchFamily="34" charset="0"/>
+                <a:ea typeface="Calibri" pitchFamily="34" charset="-122"/>
+                <a:cs typeface="Calibri" pitchFamily="34" charset="-120"/>
+              </a:rPr>
+              <a:t>Interpolácia
+</a:t>
+            </a:r>
+            <a:r>
+              <a:rPr lang="en-US" sz="1100" b="1" dirty="0">
+                <a:solidFill>
+                  <a:srgbClr val="14B8A6"/>
+                </a:solidFill>
+                <a:latin typeface="Calibri" pitchFamily="34" charset="0"/>
+                <a:ea typeface="Calibri" pitchFamily="34" charset="-122"/>
+                <a:cs typeface="Calibri" pitchFamily="34" charset="-120"/>
+              </a:rPr>
+              <a:t>bilineárna</a:t>
+            </a:r>
+            <a:endParaRPr lang="en-US" sz="800" dirty="0"/>
+          </a:p>
+        </p:txBody>
+      </p:sp>
+      <p:sp>
+        <p:nvSpPr>
+          <p:cNvPr id="13" name="Shape 10"/>
+          <p:cNvSpPr/>
+          <p:nvPr/>
+        </p:nvSpPr>
+        <p:spPr>
+          <a:xfrm>
+            <a:off x="6858000" y="4553712"/>
+            <a:ext cx="2286000" cy="589788"/>
+          </a:xfrm>
+          <a:prstGeom prst="rect">
+            <a:avLst/>
+          </a:prstGeom>
+          <a:solidFill>
+            <a:srgbClr val="1A3260"/>
+          </a:solidFill>
+          <a:ln w="12700">
+            <a:solidFill>
+              <a:srgbClr val="1A3260"/>
+            </a:solidFill>
+            <a:prstDash val="solid"/>
+          </a:ln>
+        </p:spPr>
+        <p:txBody>
+          <a:bodyPr/>
+          <a:lstStyle/>
+          <a:p>
+            <a:endParaRPr lang="sk-SK"/>
+          </a:p>
+        </p:txBody>
+      </p:sp>
+      <p:sp>
+        <p:nvSpPr>
+          <p:cNvPr id="14" name="Text 11"/>
+          <p:cNvSpPr/>
+          <p:nvPr/>
+        </p:nvSpPr>
+        <p:spPr>
+          <a:xfrm>
+            <a:off x="6858000" y="4553712"/>
+            <a:ext cx="2286000" cy="589788"/>
+          </a:xfrm>
+          <a:prstGeom prst="rect">
+            <a:avLst/>
+          </a:prstGeom>
+          <a:noFill/>
+          <a:ln/>
+        </p:spPr>
+        <p:txBody>
+          <a:bodyPr wrap="square" rtlCol="0" anchor="ctr"/>
+          <a:lstStyle/>
+          <a:p>
+            <a:pPr marL="0" indent="0" algn="ctr">
+              <a:buNone/>
+            </a:pPr>
+            <a:r>
+              <a:rPr lang="en-US" sz="800" dirty="0">
+                <a:solidFill>
+                  <a:srgbClr val="14B8A6"/>
+                </a:solidFill>
+                <a:latin typeface="Calibri" pitchFamily="34" charset="0"/>
+                <a:ea typeface="Calibri" pitchFamily="34" charset="-122"/>
+                <a:cs typeface="Calibri" pitchFamily="34" charset="-120"/>
+              </a:rPr>
+              <a:t>Diff
+</a:t>
+            </a:r>
+            <a:r>
+              <a:rPr lang="en-US" sz="1100" b="1" dirty="0">
+                <a:solidFill>
+                  <a:srgbClr val="14B8A6"/>
+                </a:solidFill>
+                <a:latin typeface="Calibri" pitchFamily="34" charset="0"/>
+                <a:ea typeface="Calibri" pitchFamily="34" charset="-122"/>
+                <a:cs typeface="Calibri" pitchFamily="34" charset="-120"/>
+              </a:rPr>
+              <a:t>avg ≈ 1.0 px</a:t>
+            </a:r>
+            <a:endParaRPr lang="en-US" sz="800" dirty="0"/>
+          </a:p>
+        </p:txBody>
       </p:sp>
       <p:pic>
         <p:nvPicPr>
-          <p:cNvPr id="6" name="Image 0" descr="preencoded.png">    </p:cNvPr>
+          <p:cNvPr id="18" name="Obrázok 17">
+            <a:extLst>
+              <a:ext uri="{FF2B5EF4-FFF2-40B4-BE49-F238E27FC236}">
+                <a16:creationId xmlns:a16="http://schemas.microsoft.com/office/drawing/2014/main" id="{DC2140FA-965C-9514-F66D-54CB7FA36819}"/>
+              </a:ext>
+            </a:extLst>
+          </p:cNvPr>
           <p:cNvPicPr>
             <a:picLocks noChangeAspect="1"/>
           </p:cNvPicPr>
           <p:nvPr/>
         </p:nvPicPr>
         <p:blipFill>
-          <a:blip r:embed="rId1"/>
+          <a:blip r:embed="rId3"/>
           <a:stretch>
             <a:fillRect/>
           </a:stretch>
         </p:blipFill>
         <p:spPr>
           <a:xfrm>
-            <a:off x="320040" y="777240"/>
-            <a:ext cx="8503920" cy="3657600"/>
+            <a:off x="849630" y="744854"/>
+            <a:ext cx="7471410" cy="3735705"/>
           </a:xfrm>
           <a:prstGeom prst="rect">
             <a:avLst/>
           </a:prstGeom>
         </p:spPr>
       </p:pic>
-      <p:sp>
-        <p:nvSpPr>
-          <p:cNvPr id="7" name="Shape 4"/>
-          <p:cNvSpPr/>
-          <p:nvPr/>
-        </p:nvSpPr>
-        <p:spPr>
-          <a:xfrm>
-            <a:off x="0" y="4553712"/>
-            <a:ext cx="2286000" cy="589788"/>
-          </a:xfrm>
-          <a:prstGeom prst="rect">
-            <a:avLst/>
-          </a:prstGeom>
-          <a:solidFill>
-            <a:srgbClr val="0F1F3D"/>
-          </a:solidFill>
-          <a:ln w="12700">
-            <a:solidFill>
-              <a:srgbClr val="0F1F3D"/>
-            </a:solidFill>
-            <a:prstDash val="solid"/>
-          </a:ln>
-        </p:spPr>
-      </p:sp>
-      <p:sp>
-        <p:nvSpPr>
-          <p:cNvPr id="8" name="Text 5"/>
-          <p:cNvSpPr/>
-          <p:nvPr/>
-        </p:nvSpPr>
-        <p:spPr>
-          <a:xfrm>
-            <a:off x="0" y="4553712"/>
-            <a:ext cx="2286000" cy="589788"/>
-          </a:xfrm>
-          <a:prstGeom prst="rect">
-            <a:avLst/>
-          </a:prstGeom>
-          <a:noFill/>
-          <a:ln/>
-        </p:spPr>
-        <p:txBody>
-          <a:bodyPr wrap="square" rtlCol="0" anchor="ctr"/>
-          <a:lstStyle/>
-          <a:p>
-            <a:pPr algn="ctr" indent="0" marL="0">
-              <a:buNone/>
-            </a:pPr>
-            <a:r>
-              <a:rPr lang="en-US" sz="800" dirty="0">
-                <a:solidFill>
-                  <a:srgbClr val="FFFFFF"/>
-                </a:solidFill>
-                <a:latin typeface="Calibri" pitchFamily="34" charset="0"/>
-                <a:ea typeface="Calibri" pitchFamily="34" charset="-122"/>
-                <a:cs typeface="Calibri" pitchFamily="34" charset="-120"/>
-              </a:rPr>
-              <a:t>Mriežka
-</a:t>
-            </a:r>
-            <a:pPr algn="ctr" indent="0" marL="0">
-              <a:buNone/>
-            </a:pPr>
-            <a:r>
-              <a:rPr lang="en-US" sz="1100" b="1" dirty="0">
-                <a:solidFill>
-                  <a:srgbClr val="FFFFFF"/>
-                </a:solidFill>
-                <a:latin typeface="Calibri" pitchFamily="34" charset="0"/>
-                <a:ea typeface="Calibri" pitchFamily="34" charset="-122"/>
-                <a:cs typeface="Calibri" pitchFamily="34" charset="-120"/>
-              </a:rPr>
-              <a:t>8 × 8 dlaždíc</a:t>
-            </a:r>
-            <a:endParaRPr lang="en-US" sz="800" dirty="0"/>
-          </a:p>
-        </p:txBody>
-      </p:sp>
-      <p:sp>
-        <p:nvSpPr>
-          <p:cNvPr id="9" name="Shape 6"/>
-          <p:cNvSpPr/>
-          <p:nvPr/>
-        </p:nvSpPr>
-        <p:spPr>
-          <a:xfrm>
-            <a:off x="2286000" y="4553712"/>
-            <a:ext cx="2286000" cy="589788"/>
-          </a:xfrm>
-          <a:prstGeom prst="rect">
-            <a:avLst/>
-          </a:prstGeom>
-          <a:solidFill>
-            <a:srgbClr val="1A3260"/>
-          </a:solidFill>
-          <a:ln w="12700">
-            <a:solidFill>
-              <a:srgbClr val="1A3260"/>
-            </a:solidFill>
-            <a:prstDash val="solid"/>
-          </a:ln>
-        </p:spPr>
-      </p:sp>
-      <p:sp>
-        <p:nvSpPr>
-          <p:cNvPr id="10" name="Text 7"/>
-          <p:cNvSpPr/>
-          <p:nvPr/>
-        </p:nvSpPr>
-        <p:spPr>
-          <a:xfrm>
-            <a:off x="2286000" y="4553712"/>
-            <a:ext cx="2286000" cy="589788"/>
-          </a:xfrm>
-          <a:prstGeom prst="rect">
-            <a:avLst/>
-          </a:prstGeom>
-          <a:noFill/>
-          <a:ln/>
-        </p:spPr>
-        <p:txBody>
-          <a:bodyPr wrap="square" rtlCol="0" anchor="ctr"/>
-          <a:lstStyle/>
-          <a:p>
-            <a:pPr algn="ctr" indent="0" marL="0">
-              <a:buNone/>
-            </a:pPr>
-            <a:r>
-              <a:rPr lang="en-US" sz="800" dirty="0">
-                <a:solidFill>
-                  <a:srgbClr val="FFFFFF"/>
-                </a:solidFill>
-                <a:latin typeface="Calibri" pitchFamily="34" charset="0"/>
-                <a:ea typeface="Calibri" pitchFamily="34" charset="-122"/>
-                <a:cs typeface="Calibri" pitchFamily="34" charset="-120"/>
-              </a:rPr>
-              <a:t>Clip limit
-</a:t>
-            </a:r>
-            <a:pPr algn="ctr" indent="0" marL="0">
-              <a:buNone/>
-            </a:pPr>
-            <a:r>
-              <a:rPr lang="en-US" sz="1100" b="1" dirty="0">
-                <a:solidFill>
-                  <a:srgbClr val="FFFFFF"/>
-                </a:solidFill>
-                <a:latin typeface="Calibri" pitchFamily="34" charset="0"/>
-                <a:ea typeface="Calibri" pitchFamily="34" charset="-122"/>
-                <a:cs typeface="Calibri" pitchFamily="34" charset="-120"/>
-              </a:rPr>
-              <a:t>2.0</a:t>
-            </a:r>
-            <a:endParaRPr lang="en-US" sz="800" dirty="0"/>
-          </a:p>
-        </p:txBody>
-      </p:sp>
-      <p:sp>
-        <p:nvSpPr>
-          <p:cNvPr id="11" name="Shape 8"/>
-          <p:cNvSpPr/>
-          <p:nvPr/>
-        </p:nvSpPr>
-        <p:spPr>
-          <a:xfrm>
-            <a:off x="4572000" y="4553712"/>
-            <a:ext cx="2286000" cy="589788"/>
-          </a:xfrm>
-          <a:prstGeom prst="rect">
-            <a:avLst/>
-          </a:prstGeom>
-          <a:solidFill>
-            <a:srgbClr val="0F1F3D"/>
-          </a:solidFill>
-          <a:ln w="12700">
-            <a:solidFill>
-              <a:srgbClr val="0F1F3D"/>
-            </a:solidFill>
-            <a:prstDash val="solid"/>
-          </a:ln>
-        </p:spPr>
-      </p:sp>
-      <p:sp>
-        <p:nvSpPr>
-          <p:cNvPr id="12" name="Text 9"/>
-          <p:cNvSpPr/>
-          <p:nvPr/>
-        </p:nvSpPr>
-        <p:spPr>
-          <a:xfrm>
-            <a:off x="4572000" y="4553712"/>
-            <a:ext cx="2286000" cy="589788"/>
-          </a:xfrm>
-          <a:prstGeom prst="rect">
-            <a:avLst/>
-          </a:prstGeom>
-          <a:noFill/>
-          <a:ln/>
-        </p:spPr>
-        <p:txBody>
-          <a:bodyPr wrap="square" rtlCol="0" anchor="ctr"/>
-          <a:lstStyle/>
-          <a:p>
-            <a:pPr algn="ctr" indent="0" marL="0">
-              <a:buNone/>
-            </a:pPr>
-            <a:r>
-              <a:rPr lang="en-US" sz="800" dirty="0">
-                <a:solidFill>
-                  <a:srgbClr val="14B8A6"/>
-                </a:solidFill>
-                <a:latin typeface="Calibri" pitchFamily="34" charset="0"/>
-                <a:ea typeface="Calibri" pitchFamily="34" charset="-122"/>
-                <a:cs typeface="Calibri" pitchFamily="34" charset="-120"/>
-              </a:rPr>
-              <a:t>Interpolácia
-</a:t>
-            </a:r>
-            <a:pPr algn="ctr" indent="0" marL="0">
-              <a:buNone/>
-            </a:pPr>
-            <a:r>
-              <a:rPr lang="en-US" sz="1100" b="1" dirty="0">
-                <a:solidFill>
-                  <a:srgbClr val="14B8A6"/>
-                </a:solidFill>
-                <a:latin typeface="Calibri" pitchFamily="34" charset="0"/>
-                <a:ea typeface="Calibri" pitchFamily="34" charset="-122"/>
-                <a:cs typeface="Calibri" pitchFamily="34" charset="-120"/>
-              </a:rPr>
-              <a:t>bilineárna</a:t>
-            </a:r>
-            <a:endParaRPr lang="en-US" sz="800" dirty="0"/>
-          </a:p>
-        </p:txBody>
-      </p:sp>
-      <p:sp>
-        <p:nvSpPr>
-          <p:cNvPr id="13" name="Shape 10"/>
-          <p:cNvSpPr/>
-          <p:nvPr/>
-        </p:nvSpPr>
-        <p:spPr>
-          <a:xfrm>
-            <a:off x="6858000" y="4553712"/>
-            <a:ext cx="2286000" cy="589788"/>
-          </a:xfrm>
-          <a:prstGeom prst="rect">
-            <a:avLst/>
-          </a:prstGeom>
-          <a:solidFill>
-            <a:srgbClr val="1A3260"/>
-          </a:solidFill>
-          <a:ln w="12700">
-            <a:solidFill>
-              <a:srgbClr val="1A3260"/>
-            </a:solidFill>
-            <a:prstDash val="solid"/>
-          </a:ln>
-        </p:spPr>
-      </p:sp>
-      <p:sp>
-        <p:nvSpPr>
-          <p:cNvPr id="14" name="Text 11"/>
-          <p:cNvSpPr/>
-          <p:nvPr/>
-        </p:nvSpPr>
-        <p:spPr>
-          <a:xfrm>
-            <a:off x="6858000" y="4553712"/>
-            <a:ext cx="2286000" cy="589788"/>
-          </a:xfrm>
-          <a:prstGeom prst="rect">
-            <a:avLst/>
-          </a:prstGeom>
-          <a:noFill/>
-          <a:ln/>
-        </p:spPr>
-        <p:txBody>
-          <a:bodyPr wrap="square" rtlCol="0" anchor="ctr"/>
-          <a:lstStyle/>
-          <a:p>
-            <a:pPr algn="ctr" indent="0" marL="0">
-              <a:buNone/>
-            </a:pPr>
-            <a:r>
-              <a:rPr lang="en-US" sz="800" dirty="0">
-                <a:solidFill>
-                  <a:srgbClr val="14B8A6"/>
-                </a:solidFill>
-                <a:latin typeface="Calibri" pitchFamily="34" charset="0"/>
-                <a:ea typeface="Calibri" pitchFamily="34" charset="-122"/>
-                <a:cs typeface="Calibri" pitchFamily="34" charset="-120"/>
-              </a:rPr>
-              <a:t>Diff
-</a:t>
-            </a:r>
-            <a:pPr algn="ctr" indent="0" marL="0">
-              <a:buNone/>
-            </a:pPr>
-            <a:r>
-              <a:rPr lang="en-US" sz="1100" b="1" dirty="0">
-                <a:solidFill>
-                  <a:srgbClr val="14B8A6"/>
-                </a:solidFill>
-                <a:latin typeface="Calibri" pitchFamily="34" charset="0"/>
-                <a:ea typeface="Calibri" pitchFamily="34" charset="-122"/>
-                <a:cs typeface="Calibri" pitchFamily="34" charset="-120"/>
-              </a:rPr>
-              <a:t>avg ≈ 1.0 px</a:t>
-            </a:r>
-            <a:endParaRPr lang="en-US" sz="800" dirty="0"/>
-          </a:p>
-        </p:txBody>
-      </p:sp>
     </p:spTree>
   </p:cSld>
   <p:clrMapOvr>
@@ -5230,6 +6370,7 @@
         <a:solidFill>
           <a:srgbClr val="F0F4FA"/>
         </a:solidFill>
+        <a:effectLst/>
       </p:bgPr>
     </p:bg>
     <p:spTree>
@@ -5270,6 +6411,13 @@
             <a:prstDash val="solid"/>
           </a:ln>
         </p:spPr>
+        <p:txBody>
+          <a:bodyPr/>
+          <a:lstStyle/>
+          <a:p>
+            <a:endParaRPr lang="sk-SK"/>
+          </a:p>
+        </p:txBody>
       </p:sp>
       <p:sp>
         <p:nvSpPr>
@@ -5295,6 +6443,13 @@
             <a:prstDash val="solid"/>
           </a:ln>
         </p:spPr>
+        <p:txBody>
+          <a:bodyPr/>
+          <a:lstStyle/>
+          <a:p>
+            <a:endParaRPr lang="sk-SK"/>
+          </a:p>
+        </p:txBody>
       </p:sp>
       <p:sp>
         <p:nvSpPr>
@@ -5317,7 +6472,7 @@
           <a:bodyPr wrap="square" lIns="0" tIns="0" rIns="0" bIns="0" rtlCol="0" anchor="ctr"/>
           <a:lstStyle/>
           <a:p>
-            <a:pPr algn="l" indent="0" marL="0">
+            <a:pPr marL="0" indent="0" algn="l">
               <a:buNone/>
             </a:pPr>
             <a:r>
@@ -5343,7 +6498,7 @@
         </p:nvSpPr>
         <p:spPr>
           <a:xfrm>
-            <a:off x="274320" y="777240"/>
+            <a:off x="274320" y="1315212"/>
             <a:ext cx="4023360" cy="320040"/>
           </a:xfrm>
           <a:prstGeom prst="rect">
@@ -5356,7 +6511,7 @@
           <a:bodyPr wrap="square" lIns="0" tIns="0" rIns="0" bIns="0" rtlCol="0" anchor="ctr"/>
           <a:lstStyle/>
           <a:p>
-            <a:pPr indent="0" marL="0">
+            <a:pPr marL="0" indent="0">
               <a:buNone/>
             </a:pPr>
             <a:r>
@@ -5383,13 +6538,13 @@
           <p:nvPr>
             <p:extLst>
               <p:ext uri="{D42A27DB-BD31-4B8C-83A1-F6EECF244321}">
-                <p14:modId xmlns:p14="http://schemas.microsoft.com/office/powerpoint/2010/main" val="1579011935"/>
+                <p14:modId xmlns:p14="http://schemas.microsoft.com/office/powerpoint/2010/main" val="365422604"/>
               </p:ext>
             </p:extLst>
           </p:nvPr>
         </p:nvGraphicFramePr>
         <p:xfrm>
-          <a:off x="274320" y="1115568"/>
+          <a:off x="274320" y="1837944"/>
           <a:ext cx="4023360" cy="2011680"/>
         </p:xfrm>
         <a:graphic>
@@ -5397,9 +6552,27 @@
             <a:tbl>
               <a:tblPr/>
               <a:tblGrid>
-                <a:gridCol w="1828800"/>
-                <a:gridCol w="1554480"/>
-                <a:gridCol w="640080"/>
+                <a:gridCol w="1828800">
+                  <a:extLst>
+                    <a:ext uri="{9D8B030D-6E8A-4147-A177-3AD203B41FA5}">
+                      <a16:colId xmlns:a16="http://schemas.microsoft.com/office/drawing/2014/main" val="20000"/>
+                    </a:ext>
+                  </a:extLst>
+                </a:gridCol>
+                <a:gridCol w="1303020">
+                  <a:extLst>
+                    <a:ext uri="{9D8B030D-6E8A-4147-A177-3AD203B41FA5}">
+                      <a16:colId xmlns:a16="http://schemas.microsoft.com/office/drawing/2014/main" val="20001"/>
+                    </a:ext>
+                  </a:extLst>
+                </a:gridCol>
+                <a:gridCol w="891540">
+                  <a:extLst>
+                    <a:ext uri="{9D8B030D-6E8A-4147-A177-3AD203B41FA5}">
+                      <a16:colId xmlns:a16="http://schemas.microsoft.com/office/drawing/2014/main" val="20002"/>
+                    </a:ext>
+                  </a:extLst>
+                </a:gridCol>
               </a:tblGrid>
               <a:tr h="402336">
                 <a:tc>
@@ -5407,7 +6580,7 @@
                     <a:bodyPr/>
                     <a:lstStyle/>
                     <a:p>
-                      <a:pPr algn="l" indent="0" marL="0">
+                      <a:pPr marL="0" indent="0" algn="l">
                         <a:buNone/>
                       </a:pPr>
                       <a:r>
@@ -5428,7 +6601,7 @@
                       </a:endParaRPr>
                     </a:p>
                   </a:txBody>
-                  <a:tcPr marL="91440" marR="91440" marT="45720" marB="45720">
+                  <a:tcPr anchor="ctr">
                     <a:lnL w="12700" cap="flat" cmpd="sng" algn="ctr">
                       <a:solidFill>
                         <a:srgbClr val="E2E8F0"/>
@@ -5475,7 +6648,7 @@
                     <a:bodyPr/>
                     <a:lstStyle/>
                     <a:p>
-                      <a:pPr algn="ctr" indent="0" marL="0">
+                      <a:pPr marL="0" indent="0" algn="ctr">
                         <a:buNone/>
                       </a:pPr>
                       <a:r>
@@ -5496,7 +6669,7 @@
                       </a:endParaRPr>
                     </a:p>
                   </a:txBody>
-                  <a:tcPr marL="91440" marR="91440" marT="45720" marB="45720">
+                  <a:tcPr anchor="ctr">
                     <a:lnL w="12700" cap="flat" cmpd="sng" algn="ctr">
                       <a:solidFill>
                         <a:srgbClr val="E2E8F0"/>
@@ -5543,7 +6716,7 @@
                     <a:bodyPr/>
                     <a:lstStyle/>
                     <a:p>
-                      <a:pPr algn="ctr" indent="0" marL="0">
+                      <a:pPr marL="0" indent="0" algn="ctr">
                         <a:buNone/>
                       </a:pPr>
                       <a:r>
@@ -5564,7 +6737,7 @@
                       </a:endParaRPr>
                     </a:p>
                   </a:txBody>
-                  <a:tcPr marL="91440" marR="91440" marT="45720" marB="45720">
+                  <a:tcPr anchor="ctr">
                     <a:lnL w="12700" cap="flat" cmpd="sng" algn="ctr">
                       <a:solidFill>
                         <a:srgbClr val="E2E8F0"/>
@@ -5606,6 +6779,11 @@
                     </a:solidFill>
                   </a:tcPr>
                 </a:tc>
+                <a:extLst>
+                  <a:ext uri="{0D108BD9-81ED-4DB2-BD59-A6C34878D82A}">
+                    <a16:rowId xmlns:a16="http://schemas.microsoft.com/office/drawing/2014/main" val="10000"/>
+                  </a:ext>
+                </a:extLst>
               </a:tr>
               <a:tr h="402336">
                 <a:tc>
@@ -5613,7 +6791,7 @@
                     <a:bodyPr/>
                     <a:lstStyle/>
                     <a:p>
-                      <a:pPr algn="l" indent="0" marL="0">
+                      <a:pPr marL="0" indent="0" algn="l">
                         <a:buNone/>
                       </a:pPr>
                       <a:r>
@@ -5634,7 +6812,7 @@
                       </a:endParaRPr>
                     </a:p>
                   </a:txBody>
-                  <a:tcPr marL="91440" marR="91440" marT="45720" marB="45720">
+                  <a:tcPr anchor="ctr">
                     <a:lnL w="12700" cap="flat" cmpd="sng" algn="ctr">
                       <a:solidFill>
                         <a:srgbClr val="E2E8F0"/>
@@ -5681,7 +6859,7 @@
                     <a:bodyPr/>
                     <a:lstStyle/>
                     <a:p>
-                      <a:pPr algn="ctr" indent="0" marL="0">
+                      <a:pPr marL="0" indent="0" algn="ctr">
                         <a:buNone/>
                       </a:pPr>
                       <a:r>
@@ -5693,7 +6871,7 @@
                           <a:ea typeface="Calibri" pitchFamily="34" charset="-122"/>
                           <a:cs typeface="Calibri" pitchFamily="34" charset="-120"/>
                         </a:rPr>
-                        <a:t>0.00  (presná zhoda)</a:t>
+                        <a:t>0.00</a:t>
                       </a:r>
                       <a:endParaRPr lang="en-US" sz="1100" dirty="0">
                         <a:latin typeface="Calibri" charset="0"/>
@@ -5702,7 +6880,7 @@
                       </a:endParaRPr>
                     </a:p>
                   </a:txBody>
-                  <a:tcPr marL="91440" marR="91440" marT="45720" marB="45720">
+                  <a:tcPr anchor="ctr">
                     <a:lnL w="12700" cap="flat" cmpd="sng" algn="ctr">
                       <a:solidFill>
                         <a:srgbClr val="E2E8F0"/>
@@ -5749,7 +6927,7 @@
                     <a:bodyPr/>
                     <a:lstStyle/>
                     <a:p>
-                      <a:pPr algn="ctr" indent="0" marL="0">
+                      <a:pPr marL="0" indent="0" algn="ctr">
                         <a:buNone/>
                       </a:pPr>
                       <a:r>
@@ -5770,7 +6948,7 @@
                       </a:endParaRPr>
                     </a:p>
                   </a:txBody>
-                  <a:tcPr marL="91440" marR="91440" marT="45720" marB="45720">
+                  <a:tcPr anchor="ctr">
                     <a:lnL w="12700" cap="flat" cmpd="sng" algn="ctr">
                       <a:solidFill>
                         <a:srgbClr val="E2E8F0"/>
@@ -5812,6 +6990,11 @@
                     </a:solidFill>
                   </a:tcPr>
                 </a:tc>
+                <a:extLst>
+                  <a:ext uri="{0D108BD9-81ED-4DB2-BD59-A6C34878D82A}">
+                    <a16:rowId xmlns:a16="http://schemas.microsoft.com/office/drawing/2014/main" val="10001"/>
+                  </a:ext>
+                </a:extLst>
               </a:tr>
               <a:tr h="402336">
                 <a:tc>
@@ -5819,7 +7002,7 @@
                     <a:bodyPr/>
                     <a:lstStyle/>
                     <a:p>
-                      <a:pPr algn="l" indent="0" marL="0">
+                      <a:pPr marL="0" indent="0" algn="l">
                         <a:buNone/>
                       </a:pPr>
                       <a:r>
@@ -5840,7 +7023,7 @@
                       </a:endParaRPr>
                     </a:p>
                   </a:txBody>
-                  <a:tcPr marL="91440" marR="91440" marT="45720" marB="45720">
+                  <a:tcPr anchor="ctr">
                     <a:lnL w="12700" cap="flat" cmpd="sng" algn="ctr">
                       <a:solidFill>
                         <a:srgbClr val="E2E8F0"/>
@@ -5887,7 +7070,7 @@
                     <a:bodyPr/>
                     <a:lstStyle/>
                     <a:p>
-                      <a:pPr algn="ctr" indent="0" marL="0">
+                      <a:pPr marL="0" indent="0" algn="ctr">
                         <a:buNone/>
                       </a:pPr>
                       <a:r>
@@ -5908,7 +7091,7 @@
                       </a:endParaRPr>
                     </a:p>
                   </a:txBody>
-                  <a:tcPr marL="91440" marR="91440" marT="45720" marB="45720">
+                  <a:tcPr anchor="ctr">
                     <a:lnL w="12700" cap="flat" cmpd="sng" algn="ctr">
                       <a:solidFill>
                         <a:srgbClr val="E2E8F0"/>
@@ -5955,7 +7138,7 @@
                     <a:bodyPr/>
                     <a:lstStyle/>
                     <a:p>
-                      <a:pPr algn="ctr" indent="0" marL="0">
+                      <a:pPr marL="0" indent="0" algn="ctr">
                         <a:buNone/>
                       </a:pPr>
                       <a:r>
@@ -5976,7 +7159,7 @@
                       </a:endParaRPr>
                     </a:p>
                   </a:txBody>
-                  <a:tcPr marL="91440" marR="91440" marT="45720" marB="45720">
+                  <a:tcPr anchor="ctr">
                     <a:lnL w="12700" cap="flat" cmpd="sng" algn="ctr">
                       <a:solidFill>
                         <a:srgbClr val="E2E8F0"/>
@@ -6018,6 +7201,11 @@
                     </a:solidFill>
                   </a:tcPr>
                 </a:tc>
+                <a:extLst>
+                  <a:ext uri="{0D108BD9-81ED-4DB2-BD59-A6C34878D82A}">
+                    <a16:rowId xmlns:a16="http://schemas.microsoft.com/office/drawing/2014/main" val="10002"/>
+                  </a:ext>
+                </a:extLst>
               </a:tr>
               <a:tr h="402336">
                 <a:tc>
@@ -6025,7 +7213,7 @@
                     <a:bodyPr/>
                     <a:lstStyle/>
                     <a:p>
-                      <a:pPr algn="l" indent="0" marL="0">
+                      <a:pPr marL="0" indent="0" algn="l">
                         <a:buNone/>
                       </a:pPr>
                       <a:r>
@@ -6046,7 +7234,7 @@
                       </a:endParaRPr>
                     </a:p>
                   </a:txBody>
-                  <a:tcPr marL="91440" marR="91440" marT="45720" marB="45720">
+                  <a:tcPr anchor="ctr">
                     <a:lnL w="12700" cap="flat" cmpd="sng" algn="ctr">
                       <a:solidFill>
                         <a:srgbClr val="E2E8F0"/>
@@ -6093,7 +7281,7 @@
                     <a:bodyPr/>
                     <a:lstStyle/>
                     <a:p>
-                      <a:pPr algn="ctr" indent="0" marL="0">
+                      <a:pPr marL="0" indent="0" algn="ctr">
                         <a:buNone/>
                       </a:pPr>
                       <a:r>
@@ -6114,7 +7302,7 @@
                       </a:endParaRPr>
                     </a:p>
                   </a:txBody>
-                  <a:tcPr marL="91440" marR="91440" marT="45720" marB="45720">
+                  <a:tcPr anchor="ctr">
                     <a:lnL w="12700" cap="flat" cmpd="sng" algn="ctr">
                       <a:solidFill>
                         <a:srgbClr val="E2E8F0"/>
@@ -6161,7 +7349,7 @@
                     <a:bodyPr/>
                     <a:lstStyle/>
                     <a:p>
-                      <a:pPr algn="ctr" indent="0" marL="0">
+                      <a:pPr marL="0" indent="0" algn="ctr">
                         <a:buNone/>
                       </a:pPr>
                       <a:r>
@@ -6182,7 +7370,7 @@
                       </a:endParaRPr>
                     </a:p>
                   </a:txBody>
-                  <a:tcPr marL="91440" marR="91440" marT="45720" marB="45720">
+                  <a:tcPr anchor="ctr">
                     <a:lnL w="12700" cap="flat" cmpd="sng" algn="ctr">
                       <a:solidFill>
                         <a:srgbClr val="E2E8F0"/>
@@ -6224,6 +7412,11 @@
                     </a:solidFill>
                   </a:tcPr>
                 </a:tc>
+                <a:extLst>
+                  <a:ext uri="{0D108BD9-81ED-4DB2-BD59-A6C34878D82A}">
+                    <a16:rowId xmlns:a16="http://schemas.microsoft.com/office/drawing/2014/main" val="10003"/>
+                  </a:ext>
+                </a:extLst>
               </a:tr>
               <a:tr h="402336">
                 <a:tc>
@@ -6231,7 +7424,7 @@
                     <a:bodyPr/>
                     <a:lstStyle/>
                     <a:p>
-                      <a:pPr algn="l" indent="0" marL="0">
+                      <a:pPr marL="0" indent="0" algn="l">
                         <a:buNone/>
                       </a:pPr>
                       <a:r>
@@ -6252,7 +7445,7 @@
                       </a:endParaRPr>
                     </a:p>
                   </a:txBody>
-                  <a:tcPr marL="91440" marR="91440" marT="45720" marB="45720">
+                  <a:tcPr anchor="ctr">
                     <a:lnL w="12700" cap="flat" cmpd="sng" algn="ctr">
                       <a:solidFill>
                         <a:srgbClr val="E2E8F0"/>
@@ -6299,7 +7492,7 @@
                     <a:bodyPr/>
                     <a:lstStyle/>
                     <a:p>
-                      <a:pPr algn="ctr" indent="0" marL="0">
+                      <a:pPr marL="0" indent="0" algn="ctr">
                         <a:buNone/>
                       </a:pPr>
                       <a:r>
@@ -6320,7 +7513,7 @@
                       </a:endParaRPr>
                     </a:p>
                   </a:txBody>
-                  <a:tcPr marL="91440" marR="91440" marT="45720" marB="45720">
+                  <a:tcPr anchor="ctr">
                     <a:lnL w="12700" cap="flat" cmpd="sng" algn="ctr">
                       <a:solidFill>
                         <a:srgbClr val="E2E8F0"/>
@@ -6367,8 +7560,22 @@
                     <a:bodyPr/>
                     <a:lstStyle/>
                     <a:p>
-                      <a:pPr algn="ctr" indent="0" marL="0">
+                      <a:pPr marL="0" marR="0" lvl="0" indent="0" algn="ctr" defTabSz="914400" rtl="0" eaLnBrk="1" fontAlgn="auto" latinLnBrk="0" hangingPunct="1">
+                        <a:lnSpc>
+                          <a:spcPct val="100000"/>
+                        </a:lnSpc>
+                        <a:spcBef>
+                          <a:spcPts val="0"/>
+                        </a:spcBef>
+                        <a:spcAft>
+                          <a:spcPts val="0"/>
+                        </a:spcAft>
+                        <a:buClrTx/>
+                        <a:buSzTx/>
+                        <a:buFontTx/>
                         <a:buNone/>
+                        <a:tabLst/>
+                        <a:defRPr/>
                       </a:pPr>
                       <a:r>
                         <a:rPr lang="en-US" sz="1100" dirty="0">
@@ -6379,7 +7586,7 @@
                           <a:ea typeface="Calibri" pitchFamily="34" charset="-122"/>
                           <a:cs typeface="Calibri" pitchFamily="34" charset="-120"/>
                         </a:rPr>
-                        <a:t>⚠️</a:t>
+                        <a:t>✅</a:t>
                       </a:r>
                       <a:endParaRPr lang="en-US" sz="1100" dirty="0">
                         <a:latin typeface="Calibri" charset="0"/>
@@ -6388,7 +7595,7 @@
                       </a:endParaRPr>
                     </a:p>
                   </a:txBody>
-                  <a:tcPr marL="91440" marR="91440" marT="45720" marB="45720">
+                  <a:tcPr anchor="ctr">
                     <a:lnL w="12700" cap="flat" cmpd="sng" algn="ctr">
                       <a:solidFill>
                         <a:srgbClr val="E2E8F0"/>
@@ -6430,6 +7637,11 @@
                     </a:solidFill>
                   </a:tcPr>
                 </a:tc>
+                <a:extLst>
+                  <a:ext uri="{0D108BD9-81ED-4DB2-BD59-A6C34878D82A}">
+                    <a16:rowId xmlns:a16="http://schemas.microsoft.com/office/drawing/2014/main" val="10004"/>
+                  </a:ext>
+                </a:extLst>
               </a:tr>
             </a:tbl>
           </a:graphicData>
@@ -6437,32 +7649,7 @@
       </p:graphicFrame>
       <p:sp>
         <p:nvSpPr>
-          <p:cNvPr id="7" name="Shape 4"/>
-          <p:cNvSpPr/>
-          <p:nvPr/>
-        </p:nvSpPr>
-        <p:spPr>
-          <a:xfrm>
-            <a:off x="274320" y="3200400"/>
-            <a:ext cx="4023360" cy="594360"/>
-          </a:xfrm>
-          <a:prstGeom prst="rect">
-            <a:avLst/>
-          </a:prstGeom>
-          <a:solidFill>
-            <a:srgbClr val="FFF7ED"/>
-          </a:solidFill>
-          <a:ln w="12700">
-            <a:solidFill>
-              <a:srgbClr val="FED7AA"/>
-            </a:solidFill>
-            <a:prstDash val="solid"/>
-          </a:ln>
-        </p:spPr>
-      </p:sp>
-      <p:sp>
-        <p:nvSpPr>
-          <p:cNvPr id="8" name="Text 5"/>
+          <p:cNvPr id="6" name="Text 5"/>
           <p:cNvSpPr/>
           <p:nvPr/>
         </p:nvSpPr>
@@ -6481,20 +7668,9 @@
           <a:bodyPr wrap="square" lIns="0" tIns="0" rIns="0" bIns="0" rtlCol="0" anchor="ctr"/>
           <a:lstStyle/>
           <a:p>
-            <a:pPr indent="0" marL="0">
+            <a:pPr marL="0" indent="0">
               <a:buNone/>
             </a:pPr>
-            <a:r>
-              <a:rPr lang="en-US" sz="950" dirty="0">
-                <a:solidFill>
-                  <a:srgbClr val="92400E"/>
-                </a:solidFill>
-                <a:latin typeface="Calibri" pitchFamily="34" charset="0"/>
-                <a:ea typeface="Calibri" pitchFamily="34" charset="-122"/>
-                <a:cs typeface="Calibri" pitchFamily="34" charset="-120"/>
-              </a:rPr>
-              <a:t>⚠️  Rozdiel ~1 px pri CLAHE pochádza z iného spôsobu interpolácie dlaždíc v OpenCV (C++). Vizuálne nerozoznateľné.</a:t>
-            </a:r>
             <a:endParaRPr lang="en-US" sz="950" dirty="0"/>
           </a:p>
         </p:txBody>
@@ -6507,7 +7683,7 @@
         </p:nvSpPr>
         <p:spPr>
           <a:xfrm>
-            <a:off x="4572000" y="777240"/>
+            <a:off x="5273040" y="777240"/>
             <a:ext cx="4297680" cy="320040"/>
           </a:xfrm>
           <a:prstGeom prst="rect">
@@ -6520,7 +7696,7 @@
           <a:bodyPr wrap="square" lIns="0" tIns="0" rIns="0" bIns="0" rtlCol="0" anchor="ctr"/>
           <a:lstStyle/>
           <a:p>
-            <a:pPr indent="0" marL="0">
+            <a:pPr marL="0" indent="0">
               <a:buNone/>
             </a:pPr>
             <a:r>
@@ -6532,7 +7708,18 @@
                 <a:ea typeface="Calibri" pitchFamily="34" charset="-122"/>
                 <a:cs typeface="Calibri" pitchFamily="34" charset="-120"/>
               </a:rPr>
-              <a:t>VÝPOČTOVÁ RÝCHLOSŤ</a:t>
+              <a:t>VÝPOČTOVÁ </a:t>
+            </a:r>
+            <a:r>
+              <a:rPr lang="sk-SK" sz="1200" b="1" dirty="0">
+                <a:solidFill>
+                  <a:srgbClr val="0D9488"/>
+                </a:solidFill>
+                <a:latin typeface="Calibri" pitchFamily="34" charset="0"/>
+                <a:ea typeface="Calibri" pitchFamily="34" charset="-122"/>
+                <a:cs typeface="Calibri" pitchFamily="34" charset="-120"/>
+              </a:rPr>
+              <a:t>NÁROČNOSŤ</a:t>
             </a:r>
             <a:endParaRPr lang="en-US" sz="1200" dirty="0"/>
           </a:p>
@@ -6559,7 +7746,7 @@
           <a:bodyPr wrap="square" lIns="0" tIns="0" rIns="0" bIns="0" rtlCol="0" anchor="ctr"/>
           <a:lstStyle/>
           <a:p>
-            <a:pPr algn="r" indent="0" marL="0">
+            <a:pPr marL="0" indent="0" algn="r">
               <a:buNone/>
             </a:pPr>
             <a:r>
@@ -6576,7 +7763,7 @@
             <a:endParaRPr lang="en-US" sz="850" dirty="0"/>
           </a:p>
           <a:p>
-            <a:pPr algn="r" indent="0" marL="0">
+            <a:pPr marL="0" indent="0" algn="r">
               <a:buNone/>
             </a:pPr>
             <a:r>
@@ -6618,6 +7805,13 @@
             <a:prstDash val="solid"/>
           </a:ln>
         </p:spPr>
+        <p:txBody>
+          <a:bodyPr/>
+          <a:lstStyle/>
+          <a:p>
+            <a:endParaRPr lang="sk-SK"/>
+          </a:p>
+        </p:txBody>
       </p:sp>
       <p:sp>
         <p:nvSpPr>
@@ -6643,6 +7837,13 @@
             <a:prstDash val="solid"/>
           </a:ln>
         </p:spPr>
+        <p:txBody>
+          <a:bodyPr/>
+          <a:lstStyle/>
+          <a:p>
+            <a:endParaRPr lang="sk-SK"/>
+          </a:p>
+        </p:txBody>
       </p:sp>
       <p:sp>
         <p:nvSpPr>
@@ -6665,10 +7866,21 @@
           <a:bodyPr wrap="square" lIns="0" tIns="0" rIns="0" bIns="0" rtlCol="0" anchor="ctr"/>
           <a:lstStyle/>
           <a:p>
-            <a:pPr indent="0" marL="0">
+            <a:pPr marL="0" indent="0">
               <a:buNone/>
             </a:pPr>
             <a:r>
+              <a:rPr lang="sk-SK" sz="1000" b="1" dirty="0">
+                <a:solidFill>
+                  <a:srgbClr val="92400E"/>
+                </a:solidFill>
+                <a:latin typeface="Calibri" pitchFamily="34" charset="0"/>
+                <a:ea typeface="Calibri" pitchFamily="34" charset="-122"/>
+                <a:cs typeface="Calibri" pitchFamily="34" charset="-120"/>
+              </a:rPr>
+              <a:t>1.41</a:t>
+            </a:r>
+            <a:r>
               <a:rPr lang="en-US" sz="1000" b="1" dirty="0">
                 <a:solidFill>
                   <a:srgbClr val="92400E"/>
@@ -6677,7 +7889,7 @@
                 <a:ea typeface="Calibri" pitchFamily="34" charset="-122"/>
                 <a:cs typeface="Calibri" pitchFamily="34" charset="-120"/>
               </a:rPr>
-              <a:t>2.74 ms</a:t>
+              <a:t> ms</a:t>
             </a:r>
             <a:endParaRPr lang="en-US" sz="1000" dirty="0"/>
           </a:p>
@@ -6704,7 +7916,7 @@
           <a:bodyPr wrap="square" lIns="0" tIns="0" rIns="0" bIns="0" rtlCol="0" anchor="ctr"/>
           <a:lstStyle/>
           <a:p>
-            <a:pPr algn="r" indent="0" marL="0">
+            <a:pPr marL="0" indent="0" algn="r">
               <a:buNone/>
             </a:pPr>
             <a:r>
@@ -6721,7 +7933,7 @@
             <a:endParaRPr lang="en-US" sz="850" dirty="0"/>
           </a:p>
           <a:p>
-            <a:pPr algn="r" indent="0" marL="0">
+            <a:pPr marL="0" indent="0" algn="r">
               <a:buNone/>
             </a:pPr>
             <a:r>
@@ -6763,6 +7975,13 @@
             <a:prstDash val="solid"/>
           </a:ln>
         </p:spPr>
+        <p:txBody>
+          <a:bodyPr/>
+          <a:lstStyle/>
+          <a:p>
+            <a:endParaRPr lang="sk-SK"/>
+          </a:p>
+        </p:txBody>
       </p:sp>
       <p:sp>
         <p:nvSpPr>
@@ -6788,6 +8007,13 @@
             <a:prstDash val="solid"/>
           </a:ln>
         </p:spPr>
+        <p:txBody>
+          <a:bodyPr/>
+          <a:lstStyle/>
+          <a:p>
+            <a:endParaRPr lang="sk-SK"/>
+          </a:p>
+        </p:txBody>
       </p:sp>
       <p:sp>
         <p:nvSpPr>
@@ -6810,7 +8036,7 @@
           <a:bodyPr wrap="square" lIns="0" tIns="0" rIns="0" bIns="0" rtlCol="0" anchor="ctr"/>
           <a:lstStyle/>
           <a:p>
-            <a:pPr indent="0" marL="0">
+            <a:pPr marL="0" indent="0">
               <a:buNone/>
             </a:pPr>
             <a:r>
@@ -6822,7 +8048,29 @@
                 <a:ea typeface="Calibri" pitchFamily="34" charset="-122"/>
                 <a:cs typeface="Calibri" pitchFamily="34" charset="-120"/>
               </a:rPr>
-              <a:t>0.44 ms</a:t>
+              <a:t>0.4</a:t>
+            </a:r>
+            <a:r>
+              <a:rPr lang="sk-SK" sz="1000" b="1" dirty="0">
+                <a:solidFill>
+                  <a:srgbClr val="0D9488"/>
+                </a:solidFill>
+                <a:latin typeface="Calibri" pitchFamily="34" charset="0"/>
+                <a:ea typeface="Calibri" pitchFamily="34" charset="-122"/>
+                <a:cs typeface="Calibri" pitchFamily="34" charset="-120"/>
+              </a:rPr>
+              <a:t>1</a:t>
+            </a:r>
+            <a:r>
+              <a:rPr lang="en-US" sz="1000" b="1" dirty="0">
+                <a:solidFill>
+                  <a:srgbClr val="0D9488"/>
+                </a:solidFill>
+                <a:latin typeface="Calibri" pitchFamily="34" charset="0"/>
+                <a:ea typeface="Calibri" pitchFamily="34" charset="-122"/>
+                <a:cs typeface="Calibri" pitchFamily="34" charset="-120"/>
+              </a:rPr>
+              <a:t> ms</a:t>
             </a:r>
             <a:endParaRPr lang="en-US" sz="1000" dirty="0"/>
           </a:p>
@@ -6849,7 +8097,7 @@
           <a:bodyPr wrap="square" lIns="0" tIns="0" rIns="0" bIns="0" rtlCol="0" anchor="ctr"/>
           <a:lstStyle/>
           <a:p>
-            <a:pPr algn="r" indent="0" marL="0">
+            <a:pPr marL="0" indent="0" algn="r">
               <a:buNone/>
             </a:pPr>
             <a:r>
@@ -6866,7 +8114,7 @@
             <a:endParaRPr lang="en-US" sz="850" dirty="0"/>
           </a:p>
           <a:p>
-            <a:pPr algn="r" indent="0" marL="0">
+            <a:pPr marL="0" indent="0" algn="r">
               <a:buNone/>
             </a:pPr>
             <a:r>
@@ -6908,6 +8156,13 @@
             <a:prstDash val="solid"/>
           </a:ln>
         </p:spPr>
+        <p:txBody>
+          <a:bodyPr/>
+          <a:lstStyle/>
+          <a:p>
+            <a:endParaRPr lang="sk-SK"/>
+          </a:p>
+        </p:txBody>
       </p:sp>
       <p:sp>
         <p:nvSpPr>
@@ -6933,6 +8188,13 @@
             <a:prstDash val="solid"/>
           </a:ln>
         </p:spPr>
+        <p:txBody>
+          <a:bodyPr/>
+          <a:lstStyle/>
+          <a:p>
+            <a:endParaRPr lang="sk-SK"/>
+          </a:p>
+        </p:txBody>
       </p:sp>
       <p:sp>
         <p:nvSpPr>
@@ -6955,10 +8217,21 @@
           <a:bodyPr wrap="square" lIns="0" tIns="0" rIns="0" bIns="0" rtlCol="0" anchor="ctr"/>
           <a:lstStyle/>
           <a:p>
-            <a:pPr indent="0" marL="0">
+            <a:pPr marL="0" indent="0">
               <a:buNone/>
             </a:pPr>
             <a:r>
+              <a:rPr lang="sk-SK" sz="1000" b="1" dirty="0">
+                <a:solidFill>
+                  <a:srgbClr val="92400E"/>
+                </a:solidFill>
+                <a:latin typeface="Calibri" pitchFamily="34" charset="0"/>
+                <a:ea typeface="Calibri" pitchFamily="34" charset="-122"/>
+                <a:cs typeface="Calibri" pitchFamily="34" charset="-120"/>
+              </a:rPr>
+              <a:t>27</a:t>
+            </a:r>
+            <a:r>
               <a:rPr lang="en-US" sz="1000" b="1" dirty="0">
                 <a:solidFill>
                   <a:srgbClr val="92400E"/>
@@ -6967,7 +8240,7 @@
                 <a:ea typeface="Calibri" pitchFamily="34" charset="-122"/>
                 <a:cs typeface="Calibri" pitchFamily="34" charset="-120"/>
               </a:rPr>
-              <a:t>30 ms</a:t>
+              <a:t> ms</a:t>
             </a:r>
             <a:endParaRPr lang="en-US" sz="1000" dirty="0"/>
           </a:p>
@@ -6994,7 +8267,7 @@
           <a:bodyPr wrap="square" lIns="0" tIns="0" rIns="0" bIns="0" rtlCol="0" anchor="ctr"/>
           <a:lstStyle/>
           <a:p>
-            <a:pPr algn="r" indent="0" marL="0">
+            <a:pPr marL="0" indent="0" algn="r">
               <a:buNone/>
             </a:pPr>
             <a:r>
@@ -7011,7 +8284,7 @@
             <a:endParaRPr lang="en-US" sz="850" dirty="0"/>
           </a:p>
           <a:p>
-            <a:pPr algn="r" indent="0" marL="0">
+            <a:pPr marL="0" indent="0" algn="r">
               <a:buNone/>
             </a:pPr>
             <a:r>
@@ -7053,6 +8326,13 @@
             <a:prstDash val="solid"/>
           </a:ln>
         </p:spPr>
+        <p:txBody>
+          <a:bodyPr/>
+          <a:lstStyle/>
+          <a:p>
+            <a:endParaRPr lang="sk-SK"/>
+          </a:p>
+        </p:txBody>
       </p:sp>
       <p:sp>
         <p:nvSpPr>
@@ -7078,6 +8358,13 @@
             <a:prstDash val="solid"/>
           </a:ln>
         </p:spPr>
+        <p:txBody>
+          <a:bodyPr/>
+          <a:lstStyle/>
+          <a:p>
+            <a:endParaRPr lang="sk-SK"/>
+          </a:p>
+        </p:txBody>
       </p:sp>
       <p:sp>
         <p:nvSpPr>
@@ -7100,7 +8387,7 @@
           <a:bodyPr wrap="square" lIns="0" tIns="0" rIns="0" bIns="0" rtlCol="0" anchor="ctr"/>
           <a:lstStyle/>
           <a:p>
-            <a:pPr indent="0" marL="0">
+            <a:pPr marL="0" indent="0">
               <a:buNone/>
             </a:pPr>
             <a:r>
@@ -7126,8 +8413,8 @@
         </p:nvSpPr>
         <p:spPr>
           <a:xfrm>
-            <a:off x="4572000" y="3200400"/>
-            <a:ext cx="1920240" cy="594360"/>
+            <a:off x="5806438" y="4080510"/>
+            <a:ext cx="1417503" cy="594360"/>
           </a:xfrm>
           <a:prstGeom prst="rect">
             <a:avLst/>
@@ -7142,13 +8429,20 @@
             <a:prstDash val="solid"/>
           </a:ln>
           <a:effectLst>
-            <a:outerShdw sx="100000" sy="100000" kx="0" ky="0" algn="bl" rotWithShape="0" blurRad="101600" dist="38100" dir="8100000">
+            <a:outerShdw blurRad="101600" dist="38100" dir="8100000" algn="bl" rotWithShape="0">
               <a:srgbClr val="000000">
                 <a:alpha val="12000"/>
               </a:srgbClr>
             </a:outerShdw>
           </a:effectLst>
         </p:spPr>
+        <p:txBody>
+          <a:bodyPr/>
+          <a:lstStyle/>
+          <a:p>
+            <a:endParaRPr lang="sk-SK"/>
+          </a:p>
+        </p:txBody>
       </p:sp>
       <p:sp>
         <p:nvSpPr>
@@ -7158,8 +8452,8 @@
         </p:nvSpPr>
         <p:spPr>
           <a:xfrm>
-            <a:off x="4572000" y="3200400"/>
-            <a:ext cx="1920240" cy="594360"/>
+            <a:off x="5806439" y="4088130"/>
+            <a:ext cx="1401897" cy="594360"/>
           </a:xfrm>
           <a:prstGeom prst="rect">
             <a:avLst/>
@@ -7171,7 +8465,7 @@
           <a:bodyPr wrap="square" rtlCol="0" anchor="ctr"/>
           <a:lstStyle/>
           <a:p>
-            <a:pPr algn="ctr" indent="0" marL="0">
+            <a:pPr marL="0" indent="0" algn="ctr">
               <a:buNone/>
             </a:pPr>
             <a:r>
@@ -7183,12 +8477,34 @@
                 <a:ea typeface="Calibri" pitchFamily="34" charset="-122"/>
                 <a:cs typeface="Calibri" pitchFamily="34" charset="-120"/>
               </a:rPr>
-              <a:t>~5×</a:t>
+              <a:t>~</a:t>
+            </a:r>
+            <a:r>
+              <a:rPr lang="sk-SK" sz="900" dirty="0">
+                <a:solidFill>
+                  <a:srgbClr val="FFFFFF"/>
+                </a:solidFill>
+                <a:latin typeface="Calibri" pitchFamily="34" charset="0"/>
+                <a:ea typeface="Calibri" pitchFamily="34" charset="-122"/>
+                <a:cs typeface="Calibri" pitchFamily="34" charset="-120"/>
+              </a:rPr>
+              <a:t>3.4</a:t>
+            </a:r>
+            <a:r>
+              <a:rPr lang="en-US" sz="900" dirty="0">
+                <a:solidFill>
+                  <a:srgbClr val="FFFFFF"/>
+                </a:solidFill>
+                <a:latin typeface="Calibri" pitchFamily="34" charset="0"/>
+                <a:ea typeface="Calibri" pitchFamily="34" charset="-122"/>
+                <a:cs typeface="Calibri" pitchFamily="34" charset="-120"/>
+              </a:rPr>
+              <a:t>×</a:t>
             </a:r>
             <a:endParaRPr lang="en-US" sz="900" dirty="0"/>
           </a:p>
           <a:p>
-            <a:pPr algn="ctr" indent="0" marL="0">
+            <a:pPr marL="0" indent="0" algn="ctr">
               <a:buNone/>
             </a:pPr>
             <a:r>
@@ -7214,8 +8530,8 @@
         </p:nvSpPr>
         <p:spPr>
           <a:xfrm>
-            <a:off x="6583680" y="3200400"/>
-            <a:ext cx="2286000" cy="594360"/>
+            <a:off x="7223577" y="4080510"/>
+            <a:ext cx="1417503" cy="594360"/>
           </a:xfrm>
           <a:prstGeom prst="rect">
             <a:avLst/>
@@ -7230,13 +8546,20 @@
             <a:prstDash val="solid"/>
           </a:ln>
           <a:effectLst>
-            <a:outerShdw sx="100000" sy="100000" kx="0" ky="0" algn="bl" rotWithShape="0" blurRad="101600" dist="38100" dir="8100000">
+            <a:outerShdw blurRad="101600" dist="38100" dir="8100000" algn="bl" rotWithShape="0">
               <a:srgbClr val="000000">
                 <a:alpha val="12000"/>
               </a:srgbClr>
             </a:outerShdw>
           </a:effectLst>
         </p:spPr>
+        <p:txBody>
+          <a:bodyPr/>
+          <a:lstStyle/>
+          <a:p>
+            <a:endParaRPr lang="sk-SK" dirty="0"/>
+          </a:p>
+        </p:txBody>
       </p:sp>
       <p:sp>
         <p:nvSpPr>
@@ -7246,8 +8569,8 @@
         </p:nvSpPr>
         <p:spPr>
           <a:xfrm>
-            <a:off x="6583680" y="3200400"/>
-            <a:ext cx="2286000" cy="594360"/>
+            <a:off x="7231562" y="4088130"/>
+            <a:ext cx="1401898" cy="594360"/>
           </a:xfrm>
           <a:prstGeom prst="rect">
             <a:avLst/>
@@ -7259,7 +8582,7 @@
           <a:bodyPr wrap="square" rtlCol="0" anchor="ctr"/>
           <a:lstStyle/>
           <a:p>
-            <a:pPr algn="ctr" indent="0" marL="0">
+            <a:pPr marL="0" indent="0" algn="ctr">
               <a:buNone/>
             </a:pPr>
             <a:r>
@@ -7271,12 +8594,34 @@
                 <a:ea typeface="Calibri" pitchFamily="34" charset="-122"/>
                 <a:cs typeface="Calibri" pitchFamily="34" charset="-120"/>
               </a:rPr>
-              <a:t>~60×</a:t>
+              <a:t>~6</a:t>
+            </a:r>
+            <a:r>
+              <a:rPr lang="sk-SK" sz="900" dirty="0">
+                <a:solidFill>
+                  <a:srgbClr val="FFFFFF"/>
+                </a:solidFill>
+                <a:latin typeface="Calibri" pitchFamily="34" charset="0"/>
+                <a:ea typeface="Calibri" pitchFamily="34" charset="-122"/>
+                <a:cs typeface="Calibri" pitchFamily="34" charset="-120"/>
+              </a:rPr>
+              <a:t>7</a:t>
+            </a:r>
+            <a:r>
+              <a:rPr lang="en-US" sz="900" dirty="0">
+                <a:solidFill>
+                  <a:srgbClr val="FFFFFF"/>
+                </a:solidFill>
+                <a:latin typeface="Calibri" pitchFamily="34" charset="0"/>
+                <a:ea typeface="Calibri" pitchFamily="34" charset="-122"/>
+                <a:cs typeface="Calibri" pitchFamily="34" charset="-120"/>
+              </a:rPr>
+              <a:t>×</a:t>
             </a:r>
             <a:endParaRPr lang="en-US" sz="900" dirty="0"/>
           </a:p>
           <a:p>
-            <a:pPr algn="ctr" indent="0" marL="0">
+            <a:pPr marL="0" indent="0" algn="ctr">
               <a:buNone/>
             </a:pPr>
             <a:r>
@@ -7288,7 +8633,29 @@
                 <a:ea typeface="Calibri" pitchFamily="34" charset="-122"/>
                 <a:cs typeface="Calibri" pitchFamily="34" charset="-120"/>
               </a:rPr>
-              <a:t>CLAHE spomaľ. (Python slučky)</a:t>
+              <a:t>CLAHE </a:t>
+            </a:r>
+            <a:r>
+              <a:rPr lang="en-US" sz="900" dirty="0" err="1">
+                <a:solidFill>
+                  <a:srgbClr val="FFFFFF"/>
+                </a:solidFill>
+                <a:latin typeface="Calibri" pitchFamily="34" charset="0"/>
+                <a:ea typeface="Calibri" pitchFamily="34" charset="-122"/>
+                <a:cs typeface="Calibri" pitchFamily="34" charset="-120"/>
+              </a:rPr>
+              <a:t>spomaľ</a:t>
+            </a:r>
+            <a:r>
+              <a:rPr lang="en-US" sz="900" dirty="0">
+                <a:solidFill>
+                  <a:srgbClr val="FFFFFF"/>
+                </a:solidFill>
+                <a:latin typeface="Calibri" pitchFamily="34" charset="0"/>
+                <a:ea typeface="Calibri" pitchFamily="34" charset="-122"/>
+                <a:cs typeface="Calibri" pitchFamily="34" charset="-120"/>
+              </a:rPr>
+              <a:t>.</a:t>
             </a:r>
             <a:endParaRPr lang="en-US" sz="900" dirty="0"/>
           </a:p>
@@ -7302,7 +8669,7 @@
         </p:nvSpPr>
         <p:spPr>
           <a:xfrm>
-            <a:off x="0" y="3913632"/>
+            <a:off x="0" y="4913376"/>
             <a:ext cx="9144000" cy="237744"/>
           </a:xfrm>
           <a:prstGeom prst="rect">
@@ -7318,6 +8685,13 @@
             <a:prstDash val="solid"/>
           </a:ln>
         </p:spPr>
+        <p:txBody>
+          <a:bodyPr/>
+          <a:lstStyle/>
+          <a:p>
+            <a:endParaRPr lang="sk-SK"/>
+          </a:p>
+        </p:txBody>
       </p:sp>
       <p:sp>
         <p:nvSpPr>
@@ -7327,7 +8701,7 @@
         </p:nvSpPr>
         <p:spPr>
           <a:xfrm>
-            <a:off x="274320" y="3913632"/>
+            <a:off x="274320" y="4919472"/>
             <a:ext cx="8595360" cy="237744"/>
           </a:xfrm>
           <a:prstGeom prst="rect">
@@ -7340,7 +8714,7 @@
           <a:bodyPr wrap="square" rtlCol="0" anchor="ctr"/>
           <a:lstStyle/>
           <a:p>
-            <a:pPr algn="ctr" indent="0" marL="0">
+            <a:pPr marL="0" indent="0" algn="ctr">
               <a:buNone/>
             </a:pPr>
             <a:r>
@@ -7355,496 +8729,6 @@
               <a:t>Manuálna CLAHE je pomalšia kvôli Python-level slučkám nad dlaždicami — OpenCV je implementovaná v C++</a:t>
             </a:r>
             <a:endParaRPr lang="en-US" sz="900" dirty="0"/>
-          </a:p>
-        </p:txBody>
-      </p:sp>
-      <p:sp>
-        <p:nvSpPr>
-          <p:cNvPr id="32" name="Shape 29"/>
-          <p:cNvSpPr/>
-          <p:nvPr/>
-        </p:nvSpPr>
-        <p:spPr>
-          <a:xfrm>
-            <a:off x="0" y="4169664"/>
-            <a:ext cx="1828800" cy="973836"/>
-          </a:xfrm>
-          <a:prstGeom prst="rect">
-            <a:avLst/>
-          </a:prstGeom>
-          <a:solidFill>
-            <a:srgbClr val="0D9488"/>
-          </a:solidFill>
-          <a:ln w="12700">
-            <a:solidFill>
-              <a:srgbClr val="0D9488"/>
-            </a:solidFill>
-            <a:prstDash val="solid"/>
-          </a:ln>
-        </p:spPr>
-      </p:sp>
-      <p:sp>
-        <p:nvSpPr>
-          <p:cNvPr id="33" name="Text 30"/>
-          <p:cNvSpPr/>
-          <p:nvPr/>
-        </p:nvSpPr>
-        <p:spPr>
-          <a:xfrm>
-            <a:off x="0" y="4169664"/>
-            <a:ext cx="1828800" cy="973836"/>
-          </a:xfrm>
-          <a:prstGeom prst="rect">
-            <a:avLst/>
-          </a:prstGeom>
-          <a:noFill/>
-          <a:ln/>
-        </p:spPr>
-        <p:txBody>
-          <a:bodyPr wrap="square" rtlCol="0" anchor="ctr"/>
-          <a:lstStyle/>
-          <a:p>
-            <a:pPr algn="ctr" indent="0" marL="0">
-              <a:buNone/>
-            </a:pPr>
-            <a:r>
-              <a:rPr lang="en-US" sz="1100" dirty="0">
-                <a:solidFill>
-                  <a:srgbClr val="FFFFFF"/>
-                </a:solidFill>
-                <a:latin typeface="Calibri" pitchFamily="34" charset="0"/>
-                <a:ea typeface="Calibri" pitchFamily="34" charset="-122"/>
-                <a:cs typeface="Calibri" pitchFamily="34" charset="-120"/>
-              </a:rPr>
-              <a:t>0 px</a:t>
-            </a:r>
-            <a:endParaRPr lang="en-US" sz="1100" dirty="0"/>
-          </a:p>
-          <a:p>
-            <a:pPr algn="ctr" indent="0" marL="0">
-              <a:buNone/>
-            </a:pPr>
-            <a:r>
-              <a:rPr lang="en-US" sz="1100" dirty="0">
-                <a:solidFill>
-                  <a:srgbClr val="FFFFFF"/>
-                </a:solidFill>
-                <a:latin typeface="Calibri" pitchFamily="34" charset="0"/>
-                <a:ea typeface="Calibri" pitchFamily="34" charset="-122"/>
-                <a:cs typeface="Calibri" pitchFamily="34" charset="-120"/>
-              </a:rPr>
-              <a:t>Histogram</a:t>
-            </a:r>
-            <a:endParaRPr lang="en-US" sz="1100" dirty="0"/>
-          </a:p>
-          <a:p>
-            <a:pPr algn="ctr" indent="0" marL="0">
-              <a:buNone/>
-            </a:pPr>
-            <a:r>
-              <a:rPr lang="en-US" sz="1100" dirty="0">
-                <a:solidFill>
-                  <a:srgbClr val="FFFFFF"/>
-                </a:solidFill>
-                <a:latin typeface="Calibri" pitchFamily="34" charset="0"/>
-                <a:ea typeface="Calibri" pitchFamily="34" charset="-122"/>
-                <a:cs typeface="Calibri" pitchFamily="34" charset="-120"/>
-              </a:rPr>
-              <a:t>diff</a:t>
-            </a:r>
-            <a:endParaRPr lang="en-US" sz="1100" dirty="0"/>
-          </a:p>
-        </p:txBody>
-      </p:sp>
-      <p:sp>
-        <p:nvSpPr>
-          <p:cNvPr id="34" name="Shape 31"/>
-          <p:cNvSpPr/>
-          <p:nvPr/>
-        </p:nvSpPr>
-        <p:spPr>
-          <a:xfrm>
-            <a:off x="1828800" y="4169664"/>
-            <a:ext cx="1828800" cy="973836"/>
-          </a:xfrm>
-          <a:prstGeom prst="rect">
-            <a:avLst/>
-          </a:prstGeom>
-          <a:solidFill>
-            <a:srgbClr val="0D9488"/>
-          </a:solidFill>
-          <a:ln w="12700">
-            <a:solidFill>
-              <a:srgbClr val="0D9488"/>
-            </a:solidFill>
-            <a:prstDash val="solid"/>
-          </a:ln>
-        </p:spPr>
-      </p:sp>
-      <p:sp>
-        <p:nvSpPr>
-          <p:cNvPr id="35" name="Text 32"/>
-          <p:cNvSpPr/>
-          <p:nvPr/>
-        </p:nvSpPr>
-        <p:spPr>
-          <a:xfrm>
-            <a:off x="1828800" y="4169664"/>
-            <a:ext cx="1828800" cy="973836"/>
-          </a:xfrm>
-          <a:prstGeom prst="rect">
-            <a:avLst/>
-          </a:prstGeom>
-          <a:noFill/>
-          <a:ln/>
-        </p:spPr>
-        <p:txBody>
-          <a:bodyPr wrap="square" rtlCol="0" anchor="ctr"/>
-          <a:lstStyle/>
-          <a:p>
-            <a:pPr algn="ctr" indent="0" marL="0">
-              <a:buNone/>
-            </a:pPr>
-            <a:r>
-              <a:rPr lang="en-US" sz="1100" dirty="0">
-                <a:solidFill>
-                  <a:srgbClr val="FFFFFF"/>
-                </a:solidFill>
-                <a:latin typeface="Calibri" pitchFamily="34" charset="0"/>
-                <a:ea typeface="Calibri" pitchFamily="34" charset="-122"/>
-                <a:cs typeface="Calibri" pitchFamily="34" charset="-120"/>
-              </a:rPr>
-              <a:t>0.00 px</a:t>
-            </a:r>
-            <a:endParaRPr lang="en-US" sz="1100" dirty="0"/>
-          </a:p>
-          <a:p>
-            <a:pPr algn="ctr" indent="0" marL="0">
-              <a:buNone/>
-            </a:pPr>
-            <a:r>
-              <a:rPr lang="en-US" sz="1100" dirty="0">
-                <a:solidFill>
-                  <a:srgbClr val="FFFFFF"/>
-                </a:solidFill>
-                <a:latin typeface="Calibri" pitchFamily="34" charset="0"/>
-                <a:ea typeface="Calibri" pitchFamily="34" charset="-122"/>
-                <a:cs typeface="Calibri" pitchFamily="34" charset="-120"/>
-              </a:rPr>
-              <a:t>Ekvaliz.</a:t>
-            </a:r>
-            <a:endParaRPr lang="en-US" sz="1100" dirty="0"/>
-          </a:p>
-          <a:p>
-            <a:pPr algn="ctr" indent="0" marL="0">
-              <a:buNone/>
-            </a:pPr>
-            <a:r>
-              <a:rPr lang="en-US" sz="1100" dirty="0">
-                <a:solidFill>
-                  <a:srgbClr val="FFFFFF"/>
-                </a:solidFill>
-                <a:latin typeface="Calibri" pitchFamily="34" charset="0"/>
-                <a:ea typeface="Calibri" pitchFamily="34" charset="-122"/>
-                <a:cs typeface="Calibri" pitchFamily="34" charset="-120"/>
-              </a:rPr>
-              <a:t>diff</a:t>
-            </a:r>
-            <a:endParaRPr lang="en-US" sz="1100" dirty="0"/>
-          </a:p>
-        </p:txBody>
-      </p:sp>
-      <p:sp>
-        <p:nvSpPr>
-          <p:cNvPr id="36" name="Shape 33"/>
-          <p:cNvSpPr/>
-          <p:nvPr/>
-        </p:nvSpPr>
-        <p:spPr>
-          <a:xfrm>
-            <a:off x="3657600" y="4169664"/>
-            <a:ext cx="1828800" cy="973836"/>
-          </a:xfrm>
-          <a:prstGeom prst="rect">
-            <a:avLst/>
-          </a:prstGeom>
-          <a:solidFill>
-            <a:srgbClr val="0D9488"/>
-          </a:solidFill>
-          <a:ln w="12700">
-            <a:solidFill>
-              <a:srgbClr val="0D9488"/>
-            </a:solidFill>
-            <a:prstDash val="solid"/>
-          </a:ln>
-        </p:spPr>
-      </p:sp>
-      <p:sp>
-        <p:nvSpPr>
-          <p:cNvPr id="37" name="Text 34"/>
-          <p:cNvSpPr/>
-          <p:nvPr/>
-        </p:nvSpPr>
-        <p:spPr>
-          <a:xfrm>
-            <a:off x="3657600" y="4169664"/>
-            <a:ext cx="1828800" cy="973836"/>
-          </a:xfrm>
-          <a:prstGeom prst="rect">
-            <a:avLst/>
-          </a:prstGeom>
-          <a:noFill/>
-          <a:ln/>
-        </p:spPr>
-        <p:txBody>
-          <a:bodyPr wrap="square" rtlCol="0" anchor="ctr"/>
-          <a:lstStyle/>
-          <a:p>
-            <a:pPr algn="ctr" indent="0" marL="0">
-              <a:buNone/>
-            </a:pPr>
-            <a:r>
-              <a:rPr lang="en-US" sz="1100" dirty="0">
-                <a:solidFill>
-                  <a:srgbClr val="FFFFFF"/>
-                </a:solidFill>
-                <a:latin typeface="Calibri" pitchFamily="34" charset="0"/>
-                <a:ea typeface="Calibri" pitchFamily="34" charset="-122"/>
-                <a:cs typeface="Calibri" pitchFamily="34" charset="-120"/>
-              </a:rPr>
-              <a:t>≈1.0 px</a:t>
-            </a:r>
-            <a:endParaRPr lang="en-US" sz="1100" dirty="0"/>
-          </a:p>
-          <a:p>
-            <a:pPr algn="ctr" indent="0" marL="0">
-              <a:buNone/>
-            </a:pPr>
-            <a:r>
-              <a:rPr lang="en-US" sz="1100" dirty="0">
-                <a:solidFill>
-                  <a:srgbClr val="FFFFFF"/>
-                </a:solidFill>
-                <a:latin typeface="Calibri" pitchFamily="34" charset="0"/>
-                <a:ea typeface="Calibri" pitchFamily="34" charset="-122"/>
-                <a:cs typeface="Calibri" pitchFamily="34" charset="-120"/>
-              </a:rPr>
-              <a:t>CLAHE</a:t>
-            </a:r>
-            <a:endParaRPr lang="en-US" sz="1100" dirty="0"/>
-          </a:p>
-          <a:p>
-            <a:pPr algn="ctr" indent="0" marL="0">
-              <a:buNone/>
-            </a:pPr>
-            <a:r>
-              <a:rPr lang="en-US" sz="1100" dirty="0">
-                <a:solidFill>
-                  <a:srgbClr val="FFFFFF"/>
-                </a:solidFill>
-                <a:latin typeface="Calibri" pitchFamily="34" charset="0"/>
-                <a:ea typeface="Calibri" pitchFamily="34" charset="-122"/>
-                <a:cs typeface="Calibri" pitchFamily="34" charset="-120"/>
-              </a:rPr>
-              <a:t>diff</a:t>
-            </a:r>
-            <a:endParaRPr lang="en-US" sz="1100" dirty="0"/>
-          </a:p>
-        </p:txBody>
-      </p:sp>
-      <p:sp>
-        <p:nvSpPr>
-          <p:cNvPr id="38" name="Shape 35"/>
-          <p:cNvSpPr/>
-          <p:nvPr/>
-        </p:nvSpPr>
-        <p:spPr>
-          <a:xfrm>
-            <a:off x="5486400" y="4169664"/>
-            <a:ext cx="1828800" cy="973836"/>
-          </a:xfrm>
-          <a:prstGeom prst="rect">
-            <a:avLst/>
-          </a:prstGeom>
-          <a:solidFill>
-            <a:srgbClr val="1A3260"/>
-          </a:solidFill>
-          <a:ln w="12700">
-            <a:solidFill>
-              <a:srgbClr val="1A3260"/>
-            </a:solidFill>
-            <a:prstDash val="solid"/>
-          </a:ln>
-        </p:spPr>
-      </p:sp>
-      <p:sp>
-        <p:nvSpPr>
-          <p:cNvPr id="39" name="Text 36"/>
-          <p:cNvSpPr/>
-          <p:nvPr/>
-        </p:nvSpPr>
-        <p:spPr>
-          <a:xfrm>
-            <a:off x="5486400" y="4169664"/>
-            <a:ext cx="1828800" cy="973836"/>
-          </a:xfrm>
-          <a:prstGeom prst="rect">
-            <a:avLst/>
-          </a:prstGeom>
-          <a:noFill/>
-          <a:ln/>
-        </p:spPr>
-        <p:txBody>
-          <a:bodyPr wrap="square" rtlCol="0" anchor="ctr"/>
-          <a:lstStyle/>
-          <a:p>
-            <a:pPr algn="ctr" indent="0" marL="0">
-              <a:buNone/>
-            </a:pPr>
-            <a:r>
-              <a:rPr lang="en-US" sz="1100" dirty="0">
-                <a:solidFill>
-                  <a:srgbClr val="FFFFFF"/>
-                </a:solidFill>
-                <a:latin typeface="Calibri" pitchFamily="34" charset="0"/>
-                <a:ea typeface="Calibri" pitchFamily="34" charset="-122"/>
-                <a:cs typeface="Calibri" pitchFamily="34" charset="-120"/>
-              </a:rPr>
-              <a:t>~5×</a:t>
-            </a:r>
-            <a:endParaRPr lang="en-US" sz="1100" dirty="0"/>
-          </a:p>
-          <a:p>
-            <a:pPr algn="ctr" indent="0" marL="0">
-              <a:buNone/>
-            </a:pPr>
-            <a:r>
-              <a:rPr lang="en-US" sz="1100" dirty="0">
-                <a:solidFill>
-                  <a:srgbClr val="FFFFFF"/>
-                </a:solidFill>
-                <a:latin typeface="Calibri" pitchFamily="34" charset="0"/>
-                <a:ea typeface="Calibri" pitchFamily="34" charset="-122"/>
-                <a:cs typeface="Calibri" pitchFamily="34" charset="-120"/>
-              </a:rPr>
-              <a:t>Spomaľ.</a:t>
-            </a:r>
-            <a:endParaRPr lang="en-US" sz="1100" dirty="0"/>
-          </a:p>
-          <a:p>
-            <a:pPr algn="ctr" indent="0" marL="0">
-              <a:buNone/>
-            </a:pPr>
-            <a:r>
-              <a:rPr lang="en-US" sz="1100" dirty="0">
-                <a:solidFill>
-                  <a:srgbClr val="FFFFFF"/>
-                </a:solidFill>
-                <a:latin typeface="Calibri" pitchFamily="34" charset="0"/>
-                <a:ea typeface="Calibri" pitchFamily="34" charset="-122"/>
-                <a:cs typeface="Calibri" pitchFamily="34" charset="-120"/>
-              </a:rPr>
-              <a:t>ekvaliz.</a:t>
-            </a:r>
-            <a:endParaRPr lang="en-US" sz="1100" dirty="0"/>
-          </a:p>
-        </p:txBody>
-      </p:sp>
-      <p:sp>
-        <p:nvSpPr>
-          <p:cNvPr id="40" name="Shape 37"/>
-          <p:cNvSpPr/>
-          <p:nvPr/>
-        </p:nvSpPr>
-        <p:spPr>
-          <a:xfrm>
-            <a:off x="7315200" y="4169664"/>
-            <a:ext cx="1828800" cy="973836"/>
-          </a:xfrm>
-          <a:prstGeom prst="rect">
-            <a:avLst/>
-          </a:prstGeom>
-          <a:solidFill>
-            <a:srgbClr val="DC2626"/>
-          </a:solidFill>
-          <a:ln w="12700">
-            <a:solidFill>
-              <a:srgbClr val="DC2626"/>
-            </a:solidFill>
-            <a:prstDash val="solid"/>
-          </a:ln>
-        </p:spPr>
-      </p:sp>
-      <p:sp>
-        <p:nvSpPr>
-          <p:cNvPr id="41" name="Text 38"/>
-          <p:cNvSpPr/>
-          <p:nvPr/>
-        </p:nvSpPr>
-        <p:spPr>
-          <a:xfrm>
-            <a:off x="7315200" y="4169664"/>
-            <a:ext cx="1828800" cy="973836"/>
-          </a:xfrm>
-          <a:prstGeom prst="rect">
-            <a:avLst/>
-          </a:prstGeom>
-          <a:noFill/>
-          <a:ln/>
-        </p:spPr>
-        <p:txBody>
-          <a:bodyPr wrap="square" rtlCol="0" anchor="ctr"/>
-          <a:lstStyle/>
-          <a:p>
-            <a:pPr algn="ctr" indent="0" marL="0">
-              <a:buNone/>
-            </a:pPr>
-            <a:r>
-              <a:rPr lang="en-US" sz="1100" dirty="0">
-                <a:solidFill>
-                  <a:srgbClr val="FFFFFF"/>
-                </a:solidFill>
-                <a:latin typeface="Calibri" pitchFamily="34" charset="0"/>
-                <a:ea typeface="Calibri" pitchFamily="34" charset="-122"/>
-                <a:cs typeface="Calibri" pitchFamily="34" charset="-120"/>
-              </a:rPr>
-              <a:t>~60×</a:t>
-            </a:r>
-            <a:endParaRPr lang="en-US" sz="1100" dirty="0"/>
-          </a:p>
-          <a:p>
-            <a:pPr algn="ctr" indent="0" marL="0">
-              <a:buNone/>
-            </a:pPr>
-            <a:r>
-              <a:rPr lang="en-US" sz="1100" dirty="0">
-                <a:solidFill>
-                  <a:srgbClr val="FFFFFF"/>
-                </a:solidFill>
-                <a:latin typeface="Calibri" pitchFamily="34" charset="0"/>
-                <a:ea typeface="Calibri" pitchFamily="34" charset="-122"/>
-                <a:cs typeface="Calibri" pitchFamily="34" charset="-120"/>
-              </a:rPr>
-              <a:t>Spomaľ.</a:t>
-            </a:r>
-            <a:endParaRPr lang="en-US" sz="1100" dirty="0"/>
-          </a:p>
-          <a:p>
-            <a:pPr algn="ctr" indent="0" marL="0">
-              <a:buNone/>
-            </a:pPr>
-            <a:r>
-              <a:rPr lang="en-US" sz="1100" dirty="0">
-                <a:solidFill>
-                  <a:srgbClr val="FFFFFF"/>
-                </a:solidFill>
-                <a:latin typeface="Calibri" pitchFamily="34" charset="0"/>
-                <a:ea typeface="Calibri" pitchFamily="34" charset="-122"/>
-                <a:cs typeface="Calibri" pitchFamily="34" charset="-120"/>
-              </a:rPr>
-              <a:t>CLAHE</a:t>
-            </a:r>
-            <a:endParaRPr lang="en-US" sz="1100" dirty="0"/>
           </a:p>
         </p:txBody>
       </p:sp>
@@ -7864,6 +8748,7 @@
         <a:solidFill>
           <a:srgbClr val="0F1F3D"/>
         </a:solidFill>
+        <a:effectLst/>
       </p:bgPr>
     </p:bg>
     <p:spTree>
@@ -7882,7 +8767,459 @@
       </p:grpSpPr>
       <p:sp>
         <p:nvSpPr>
-          <p:cNvPr id="2" name="Shape 0"/>
+          <p:cNvPr id="4" name="Text 2"/>
+          <p:cNvSpPr/>
+          <p:nvPr/>
+        </p:nvSpPr>
+        <p:spPr>
+          <a:xfrm>
+            <a:off x="365760" y="182880"/>
+            <a:ext cx="8229600" cy="594360"/>
+          </a:xfrm>
+          <a:prstGeom prst="rect">
+            <a:avLst/>
+          </a:prstGeom>
+          <a:noFill/>
+          <a:ln/>
+        </p:spPr>
+        <p:txBody>
+          <a:bodyPr wrap="square" lIns="0" tIns="0" rIns="0" bIns="0" rtlCol="0" anchor="ctr"/>
+          <a:lstStyle/>
+          <a:p>
+            <a:pPr marL="0" indent="0" algn="l">
+              <a:buNone/>
+            </a:pPr>
+            <a:r>
+              <a:rPr lang="en-US" sz="2800" b="1" dirty="0">
+                <a:solidFill>
+                  <a:srgbClr val="FFFFFF"/>
+                </a:solidFill>
+                <a:latin typeface="Calibri" pitchFamily="34" charset="0"/>
+                <a:ea typeface="Calibri" pitchFamily="34" charset="-122"/>
+                <a:cs typeface="Calibri" pitchFamily="34" charset="-120"/>
+              </a:rPr>
+              <a:t>Záver</a:t>
+            </a:r>
+            <a:endParaRPr lang="en-US" sz="2800" dirty="0"/>
+          </a:p>
+        </p:txBody>
+      </p:sp>
+      <p:sp>
+        <p:nvSpPr>
+          <p:cNvPr id="5" name="Shape 3"/>
+          <p:cNvSpPr/>
+          <p:nvPr/>
+        </p:nvSpPr>
+        <p:spPr>
+          <a:xfrm>
+            <a:off x="365760" y="960120"/>
+            <a:ext cx="8412480" cy="658368"/>
+          </a:xfrm>
+          <a:prstGeom prst="rect">
+            <a:avLst/>
+          </a:prstGeom>
+          <a:solidFill>
+            <a:srgbClr val="1A3260"/>
+          </a:solidFill>
+          <a:ln w="12700">
+            <a:solidFill>
+              <a:srgbClr val="0D9488"/>
+            </a:solidFill>
+            <a:prstDash val="solid"/>
+          </a:ln>
+        </p:spPr>
+        <p:txBody>
+          <a:bodyPr/>
+          <a:lstStyle/>
+          <a:p>
+            <a:endParaRPr lang="sk-SK"/>
+          </a:p>
+        </p:txBody>
+      </p:sp>
+      <p:sp>
+        <p:nvSpPr>
+          <p:cNvPr id="6" name="Text 4"/>
+          <p:cNvSpPr/>
+          <p:nvPr/>
+        </p:nvSpPr>
+        <p:spPr>
+          <a:xfrm>
+            <a:off x="502920" y="960120"/>
+            <a:ext cx="8138160" cy="658368"/>
+          </a:xfrm>
+          <a:prstGeom prst="rect">
+            <a:avLst/>
+          </a:prstGeom>
+          <a:noFill/>
+          <a:ln/>
+        </p:spPr>
+        <p:txBody>
+          <a:bodyPr wrap="square" lIns="0" tIns="0" rIns="0" bIns="0" rtlCol="0" anchor="ctr"/>
+          <a:lstStyle/>
+          <a:p>
+            <a:pPr marL="0" indent="0">
+              <a:buNone/>
+            </a:pPr>
+            <a:r>
+              <a:rPr lang="en-US" sz="1200" dirty="0">
+                <a:solidFill>
+                  <a:srgbClr val="FFFFFF"/>
+                </a:solidFill>
+                <a:latin typeface="Calibri" pitchFamily="34" charset="0"/>
+                <a:ea typeface="Calibri" pitchFamily="34" charset="-122"/>
+                <a:cs typeface="Calibri" pitchFamily="34" charset="-120"/>
+              </a:rPr>
+              <a:t>✅  Manuálny histogram (NumPy bincount) je bitovo identický s OpenCV – diferencia = 0</a:t>
+            </a:r>
+            <a:endParaRPr lang="en-US" sz="1200" dirty="0"/>
+          </a:p>
+        </p:txBody>
+      </p:sp>
+      <p:sp>
+        <p:nvSpPr>
+          <p:cNvPr id="7" name="Shape 5"/>
+          <p:cNvSpPr/>
+          <p:nvPr/>
+        </p:nvSpPr>
+        <p:spPr>
+          <a:xfrm>
+            <a:off x="365760" y="1719072"/>
+            <a:ext cx="8412480" cy="658368"/>
+          </a:xfrm>
+          <a:prstGeom prst="rect">
+            <a:avLst/>
+          </a:prstGeom>
+          <a:solidFill>
+            <a:srgbClr val="1A3260"/>
+          </a:solidFill>
+          <a:ln w="12700">
+            <a:solidFill>
+              <a:srgbClr val="0D9488"/>
+            </a:solidFill>
+            <a:prstDash val="solid"/>
+          </a:ln>
+        </p:spPr>
+        <p:txBody>
+          <a:bodyPr/>
+          <a:lstStyle/>
+          <a:p>
+            <a:endParaRPr lang="sk-SK"/>
+          </a:p>
+        </p:txBody>
+      </p:sp>
+      <p:sp>
+        <p:nvSpPr>
+          <p:cNvPr id="8" name="Text 6"/>
+          <p:cNvSpPr/>
+          <p:nvPr/>
+        </p:nvSpPr>
+        <p:spPr>
+          <a:xfrm>
+            <a:off x="502920" y="1719072"/>
+            <a:ext cx="8138160" cy="658368"/>
+          </a:xfrm>
+          <a:prstGeom prst="rect">
+            <a:avLst/>
+          </a:prstGeom>
+          <a:noFill/>
+          <a:ln/>
+        </p:spPr>
+        <p:txBody>
+          <a:bodyPr wrap="square" lIns="0" tIns="0" rIns="0" bIns="0" rtlCol="0" anchor="ctr"/>
+          <a:lstStyle/>
+          <a:p>
+            <a:pPr marL="0" indent="0">
+              <a:buNone/>
+            </a:pPr>
+            <a:r>
+              <a:rPr lang="en-US" sz="1200" dirty="0">
+                <a:solidFill>
+                  <a:srgbClr val="FFFFFF"/>
+                </a:solidFill>
+                <a:latin typeface="Calibri" pitchFamily="34" charset="0"/>
+                <a:ea typeface="Calibri" pitchFamily="34" charset="-122"/>
+                <a:cs typeface="Calibri" pitchFamily="34" charset="-120"/>
+              </a:rPr>
+              <a:t>✅  Histogramová ekvalizácia dáva rovnaký výsledok (diff 0.00 px) – zaokrúhľovanie v LUT je zanedbateľné</a:t>
+            </a:r>
+            <a:endParaRPr lang="en-US" sz="1200" dirty="0"/>
+          </a:p>
+        </p:txBody>
+      </p:sp>
+      <p:sp>
+        <p:nvSpPr>
+          <p:cNvPr id="9" name="Shape 7"/>
+          <p:cNvSpPr/>
+          <p:nvPr/>
+        </p:nvSpPr>
+        <p:spPr>
+          <a:xfrm>
+            <a:off x="365760" y="2478024"/>
+            <a:ext cx="8412480" cy="658368"/>
+          </a:xfrm>
+          <a:prstGeom prst="rect">
+            <a:avLst/>
+          </a:prstGeom>
+          <a:solidFill>
+            <a:srgbClr val="1A3260"/>
+          </a:solidFill>
+          <a:ln w="12700">
+            <a:solidFill>
+              <a:srgbClr val="0D9488"/>
+            </a:solidFill>
+            <a:prstDash val="solid"/>
+          </a:ln>
+        </p:spPr>
+        <p:txBody>
+          <a:bodyPr/>
+          <a:lstStyle/>
+          <a:p>
+            <a:endParaRPr lang="sk-SK"/>
+          </a:p>
+        </p:txBody>
+      </p:sp>
+      <p:sp>
+        <p:nvSpPr>
+          <p:cNvPr id="10" name="Text 8"/>
+          <p:cNvSpPr/>
+          <p:nvPr/>
+        </p:nvSpPr>
+        <p:spPr>
+          <a:xfrm>
+            <a:off x="502920" y="2478024"/>
+            <a:ext cx="8138160" cy="658368"/>
+          </a:xfrm>
+          <a:prstGeom prst="rect">
+            <a:avLst/>
+          </a:prstGeom>
+          <a:noFill/>
+          <a:ln/>
+        </p:spPr>
+        <p:txBody>
+          <a:bodyPr wrap="square" lIns="0" tIns="0" rIns="0" bIns="0" rtlCol="0" anchor="ctr"/>
+          <a:lstStyle/>
+          <a:p>
+            <a:r>
+              <a:rPr lang="en-US" sz="1200" dirty="0">
+                <a:solidFill>
+                  <a:srgbClr val="FFFFFF"/>
+                </a:solidFill>
+                <a:latin typeface="Calibri" pitchFamily="34" charset="0"/>
+                <a:ea typeface="Calibri" pitchFamily="34" charset="-122"/>
+                <a:cs typeface="Calibri" pitchFamily="34" charset="-120"/>
+              </a:rPr>
+              <a:t>✅  CLAHE sa líši o ~1 px kvôli rozdielnej interpolácii hraničných dlaždíc v C++ vs Python</a:t>
+            </a:r>
+            <a:endParaRPr lang="en-US" sz="1200" dirty="0"/>
+          </a:p>
+        </p:txBody>
+      </p:sp>
+      <p:sp>
+        <p:nvSpPr>
+          <p:cNvPr id="11" name="Shape 9"/>
+          <p:cNvSpPr/>
+          <p:nvPr/>
+        </p:nvSpPr>
+        <p:spPr>
+          <a:xfrm>
+            <a:off x="365760" y="3236976"/>
+            <a:ext cx="8412480" cy="658368"/>
+          </a:xfrm>
+          <a:prstGeom prst="rect">
+            <a:avLst/>
+          </a:prstGeom>
+          <a:solidFill>
+            <a:srgbClr val="1A3260"/>
+          </a:solidFill>
+          <a:ln w="12700">
+            <a:solidFill>
+              <a:srgbClr val="0D9488"/>
+            </a:solidFill>
+            <a:prstDash val="solid"/>
+          </a:ln>
+        </p:spPr>
+        <p:txBody>
+          <a:bodyPr/>
+          <a:lstStyle/>
+          <a:p>
+            <a:endParaRPr lang="sk-SK"/>
+          </a:p>
+        </p:txBody>
+      </p:sp>
+      <p:sp>
+        <p:nvSpPr>
+          <p:cNvPr id="12" name="Text 10"/>
+          <p:cNvSpPr/>
+          <p:nvPr/>
+        </p:nvSpPr>
+        <p:spPr>
+          <a:xfrm>
+            <a:off x="502920" y="3236976"/>
+            <a:ext cx="8138160" cy="658368"/>
+          </a:xfrm>
+          <a:prstGeom prst="rect">
+            <a:avLst/>
+          </a:prstGeom>
+          <a:noFill/>
+          <a:ln/>
+        </p:spPr>
+        <p:txBody>
+          <a:bodyPr wrap="square" lIns="0" tIns="0" rIns="0" bIns="0" rtlCol="0" anchor="ctr"/>
+          <a:lstStyle/>
+          <a:p>
+            <a:pPr marL="0" indent="0">
+              <a:buNone/>
+            </a:pPr>
+            <a:r>
+              <a:rPr lang="en-US" sz="1200" dirty="0">
+                <a:solidFill>
+                  <a:srgbClr val="FFFFFF"/>
+                </a:solidFill>
+                <a:latin typeface="Calibri" pitchFamily="34" charset="0"/>
+                <a:ea typeface="Calibri" pitchFamily="34" charset="-122"/>
+                <a:cs typeface="Calibri" pitchFamily="34" charset="-120"/>
+              </a:rPr>
+              <a:t>🚀  OpenCV je ~</a:t>
+            </a:r>
+            <a:r>
+              <a:rPr lang="sk-SK" sz="1200" dirty="0">
+                <a:solidFill>
+                  <a:srgbClr val="FFFFFF"/>
+                </a:solidFill>
+                <a:latin typeface="Calibri" pitchFamily="34" charset="0"/>
+                <a:ea typeface="Calibri" pitchFamily="34" charset="-122"/>
+                <a:cs typeface="Calibri" pitchFamily="34" charset="-120"/>
+              </a:rPr>
+              <a:t>3.4</a:t>
+            </a:r>
+            <a:r>
+              <a:rPr lang="en-US" sz="1200" dirty="0">
+                <a:solidFill>
+                  <a:srgbClr val="FFFFFF"/>
+                </a:solidFill>
+                <a:latin typeface="Calibri" pitchFamily="34" charset="0"/>
+                <a:ea typeface="Calibri" pitchFamily="34" charset="-122"/>
+                <a:cs typeface="Calibri" pitchFamily="34" charset="-120"/>
+              </a:rPr>
+              <a:t>× rýchlejšia pri ekvalizácii a až ~6</a:t>
+            </a:r>
+            <a:r>
+              <a:rPr lang="sk-SK" sz="1200" dirty="0">
+                <a:solidFill>
+                  <a:srgbClr val="FFFFFF"/>
+                </a:solidFill>
+                <a:latin typeface="Calibri" pitchFamily="34" charset="0"/>
+                <a:ea typeface="Calibri" pitchFamily="34" charset="-122"/>
+                <a:cs typeface="Calibri" pitchFamily="34" charset="-120"/>
+              </a:rPr>
+              <a:t>7</a:t>
+            </a:r>
+            <a:r>
+              <a:rPr lang="en-US" sz="1200" dirty="0">
+                <a:solidFill>
+                  <a:srgbClr val="FFFFFF"/>
+                </a:solidFill>
+                <a:latin typeface="Calibri" pitchFamily="34" charset="0"/>
+                <a:ea typeface="Calibri" pitchFamily="34" charset="-122"/>
+                <a:cs typeface="Calibri" pitchFamily="34" charset="-120"/>
+              </a:rPr>
+              <a:t>× pri CLAHE vďaka natívnej C++ implementácii</a:t>
+            </a:r>
+            <a:endParaRPr lang="en-US" sz="1200" dirty="0"/>
+          </a:p>
+        </p:txBody>
+      </p:sp>
+      <p:sp>
+        <p:nvSpPr>
+          <p:cNvPr id="13" name="Shape 11"/>
+          <p:cNvSpPr/>
+          <p:nvPr/>
+        </p:nvSpPr>
+        <p:spPr>
+          <a:xfrm>
+            <a:off x="365760" y="3995928"/>
+            <a:ext cx="8412480" cy="658368"/>
+          </a:xfrm>
+          <a:prstGeom prst="rect">
+            <a:avLst/>
+          </a:prstGeom>
+          <a:solidFill>
+            <a:srgbClr val="1A3260"/>
+          </a:solidFill>
+          <a:ln w="12700">
+            <a:solidFill>
+              <a:srgbClr val="0D9488"/>
+            </a:solidFill>
+            <a:prstDash val="solid"/>
+          </a:ln>
+        </p:spPr>
+        <p:txBody>
+          <a:bodyPr/>
+          <a:lstStyle/>
+          <a:p>
+            <a:endParaRPr lang="sk-SK"/>
+          </a:p>
+        </p:txBody>
+      </p:sp>
+      <p:sp>
+        <p:nvSpPr>
+          <p:cNvPr id="14" name="Text 12"/>
+          <p:cNvSpPr/>
+          <p:nvPr/>
+        </p:nvSpPr>
+        <p:spPr>
+          <a:xfrm>
+            <a:off x="502920" y="3995928"/>
+            <a:ext cx="8138160" cy="658368"/>
+          </a:xfrm>
+          <a:prstGeom prst="rect">
+            <a:avLst/>
+          </a:prstGeom>
+          <a:noFill/>
+          <a:ln/>
+        </p:spPr>
+        <p:txBody>
+          <a:bodyPr wrap="square" lIns="0" tIns="0" rIns="0" bIns="0" rtlCol="0" anchor="ctr"/>
+          <a:lstStyle/>
+          <a:p>
+            <a:pPr marL="0" indent="0">
+              <a:buNone/>
+            </a:pPr>
+            <a:r>
+              <a:rPr lang="en-US" sz="1200" dirty="0">
+                <a:solidFill>
+                  <a:srgbClr val="FFFFFF"/>
+                </a:solidFill>
+                <a:latin typeface="Calibri" pitchFamily="34" charset="0"/>
+                <a:ea typeface="Calibri" pitchFamily="34" charset="-122"/>
+                <a:cs typeface="Calibri" pitchFamily="34" charset="-120"/>
+              </a:rPr>
+              <a:t>🎓  </a:t>
+            </a:r>
+            <a:r>
+              <a:rPr lang="sk-SK" sz="1200" dirty="0">
+                <a:solidFill>
+                  <a:srgbClr val="FFFFFF"/>
+                </a:solidFill>
+                <a:latin typeface="Calibri" pitchFamily="34" charset="0"/>
+                <a:ea typeface="Calibri" pitchFamily="34" charset="-122"/>
+                <a:cs typeface="Calibri" pitchFamily="34" charset="-120"/>
+              </a:rPr>
+              <a:t>Zadanie považujeme za splnené</a:t>
+            </a:r>
+            <a:endParaRPr lang="en-US" sz="1200" dirty="0"/>
+          </a:p>
+        </p:txBody>
+      </p:sp>
+      <p:sp>
+        <p:nvSpPr>
+          <p:cNvPr id="20" name="Shape 0">
+            <a:extLst>
+              <a:ext uri="{FF2B5EF4-FFF2-40B4-BE49-F238E27FC236}">
+                <a16:creationId xmlns:a16="http://schemas.microsoft.com/office/drawing/2014/main" id="{ADE8DCF2-F151-7195-E9B2-E6F64647CFE8}"/>
+              </a:ext>
+            </a:extLst>
+          </p:cNvPr>
           <p:cNvSpPr/>
           <p:nvPr/>
         </p:nvSpPr>
@@ -7904,17 +9241,30 @@
             <a:prstDash val="solid"/>
           </a:ln>
         </p:spPr>
-      </p:sp>
-      <p:sp>
-        <p:nvSpPr>
-          <p:cNvPr id="3" name="Shape 1"/>
-          <p:cNvSpPr/>
-          <p:nvPr/>
-        </p:nvSpPr>
-        <p:spPr>
-          <a:xfrm>
-            <a:off x="0" y="64008"/>
-            <a:ext cx="109728" cy="5015484"/>
+        <p:txBody>
+          <a:bodyPr/>
+          <a:lstStyle/>
+          <a:p>
+            <a:endParaRPr lang="sk-SK"/>
+          </a:p>
+        </p:txBody>
+      </p:sp>
+      <p:sp>
+        <p:nvSpPr>
+          <p:cNvPr id="21" name="Shape 46">
+            <a:extLst>
+              <a:ext uri="{FF2B5EF4-FFF2-40B4-BE49-F238E27FC236}">
+                <a16:creationId xmlns:a16="http://schemas.microsoft.com/office/drawing/2014/main" id="{9964E6E0-5A28-077E-0C11-09BF3D0713E3}"/>
+              </a:ext>
+            </a:extLst>
+          </p:cNvPr>
+          <p:cNvSpPr/>
+          <p:nvPr/>
+        </p:nvSpPr>
+        <p:spPr>
+          <a:xfrm>
+            <a:off x="0" y="5079492"/>
+            <a:ext cx="9144000" cy="64008"/>
           </a:xfrm>
           <a:prstGeom prst="rect">
             <a:avLst/>
@@ -7929,17 +9279,185 @@
             <a:prstDash val="solid"/>
           </a:ln>
         </p:spPr>
-      </p:sp>
-      <p:sp>
-        <p:nvSpPr>
-          <p:cNvPr id="4" name="Text 2"/>
-          <p:cNvSpPr/>
-          <p:nvPr/>
-        </p:nvSpPr>
-        <p:spPr>
-          <a:xfrm>
-            <a:off x="365760" y="182880"/>
-            <a:ext cx="8229600" cy="594360"/>
+        <p:txBody>
+          <a:bodyPr/>
+          <a:lstStyle/>
+          <a:p>
+            <a:endParaRPr lang="sk-SK"/>
+          </a:p>
+        </p:txBody>
+      </p:sp>
+      <p:sp>
+        <p:nvSpPr>
+          <p:cNvPr id="22" name="Shape 0">
+            <a:extLst>
+              <a:ext uri="{FF2B5EF4-FFF2-40B4-BE49-F238E27FC236}">
+                <a16:creationId xmlns:a16="http://schemas.microsoft.com/office/drawing/2014/main" id="{5E3EDCEB-5488-3DE9-3375-7E357995B9B9}"/>
+              </a:ext>
+            </a:extLst>
+          </p:cNvPr>
+          <p:cNvSpPr/>
+          <p:nvPr/>
+        </p:nvSpPr>
+        <p:spPr>
+          <a:xfrm rot="5400000">
+            <a:off x="-2535867" y="2539746"/>
+            <a:ext cx="5143500" cy="64008"/>
+          </a:xfrm>
+          <a:prstGeom prst="rect">
+            <a:avLst/>
+          </a:prstGeom>
+          <a:solidFill>
+            <a:srgbClr val="0D9488"/>
+          </a:solidFill>
+          <a:ln w="12700">
+            <a:solidFill>
+              <a:srgbClr val="0D9488"/>
+            </a:solidFill>
+            <a:prstDash val="solid"/>
+          </a:ln>
+        </p:spPr>
+        <p:txBody>
+          <a:bodyPr/>
+          <a:lstStyle/>
+          <a:p>
+            <a:pPr algn="r"/>
+            <a:endParaRPr lang="sk-SK" dirty="0"/>
+          </a:p>
+        </p:txBody>
+      </p:sp>
+      <p:sp>
+        <p:nvSpPr>
+          <p:cNvPr id="23" name="Shape 0">
+            <a:extLst>
+              <a:ext uri="{FF2B5EF4-FFF2-40B4-BE49-F238E27FC236}">
+                <a16:creationId xmlns:a16="http://schemas.microsoft.com/office/drawing/2014/main" id="{52665BEB-9AAC-902D-CC89-3396D38A0BC5}"/>
+              </a:ext>
+            </a:extLst>
+          </p:cNvPr>
+          <p:cNvSpPr/>
+          <p:nvPr/>
+        </p:nvSpPr>
+        <p:spPr>
+          <a:xfrm rot="5400000">
+            <a:off x="6531102" y="2532922"/>
+            <a:ext cx="5143500" cy="64008"/>
+          </a:xfrm>
+          <a:prstGeom prst="rect">
+            <a:avLst/>
+          </a:prstGeom>
+          <a:solidFill>
+            <a:srgbClr val="0D9488"/>
+          </a:solidFill>
+          <a:ln w="12700">
+            <a:solidFill>
+              <a:srgbClr val="0D9488"/>
+            </a:solidFill>
+            <a:prstDash val="solid"/>
+          </a:ln>
+        </p:spPr>
+        <p:txBody>
+          <a:bodyPr/>
+          <a:lstStyle/>
+          <a:p>
+            <a:pPr algn="r"/>
+            <a:endParaRPr lang="sk-SK" dirty="0"/>
+          </a:p>
+        </p:txBody>
+      </p:sp>
+    </p:spTree>
+  </p:cSld>
+  <p:clrMapOvr>
+    <a:masterClrMapping/>
+  </p:clrMapOvr>
+</p:sld>
+</file>
+
+<file path=ppt/slides/slide9.xml><?xml version="1.0" encoding="utf-8"?>
+<p:sld xmlns:a="http://schemas.openxmlformats.org/drawingml/2006/main" xmlns:r="http://schemas.openxmlformats.org/officeDocument/2006/relationships" xmlns:p="http://schemas.openxmlformats.org/presentationml/2006/main">
+  <p:cSld>
+    <p:bg>
+      <p:bgPr>
+        <a:solidFill>
+          <a:srgbClr val="0F1F3D"/>
+        </a:solidFill>
+        <a:effectLst/>
+      </p:bgPr>
+    </p:bg>
+    <p:spTree>
+      <p:nvGrpSpPr>
+        <p:cNvPr id="1" name="">
+          <a:extLst>
+            <a:ext uri="{FF2B5EF4-FFF2-40B4-BE49-F238E27FC236}">
+              <a16:creationId xmlns:a16="http://schemas.microsoft.com/office/drawing/2014/main" id="{9767A69A-AD66-6AED-0FCD-CEC65E7B4E39}"/>
+            </a:ext>
+          </a:extLst>
+        </p:cNvPr>
+        <p:cNvGrpSpPr/>
+        <p:nvPr/>
+      </p:nvGrpSpPr>
+      <p:grpSpPr>
+        <a:xfrm>
+          <a:off x="0" y="0"/>
+          <a:ext cx="0" cy="0"/>
+          <a:chOff x="0" y="0"/>
+          <a:chExt cx="0" cy="0"/>
+        </a:xfrm>
+      </p:grpSpPr>
+      <p:sp>
+        <p:nvSpPr>
+          <p:cNvPr id="2" name="Shape 0">
+            <a:extLst>
+              <a:ext uri="{FF2B5EF4-FFF2-40B4-BE49-F238E27FC236}">
+                <a16:creationId xmlns:a16="http://schemas.microsoft.com/office/drawing/2014/main" id="{5CE977C3-F903-6036-BBAD-D6D206EDEEE5}"/>
+              </a:ext>
+            </a:extLst>
+          </p:cNvPr>
+          <p:cNvSpPr/>
+          <p:nvPr/>
+        </p:nvSpPr>
+        <p:spPr>
+          <a:xfrm>
+            <a:off x="0" y="0"/>
+            <a:ext cx="9144000" cy="64008"/>
+          </a:xfrm>
+          <a:prstGeom prst="rect">
+            <a:avLst/>
+          </a:prstGeom>
+          <a:solidFill>
+            <a:srgbClr val="0D9488"/>
+          </a:solidFill>
+          <a:ln w="12700">
+            <a:solidFill>
+              <a:srgbClr val="0D9488"/>
+            </a:solidFill>
+            <a:prstDash val="solid"/>
+          </a:ln>
+        </p:spPr>
+        <p:txBody>
+          <a:bodyPr/>
+          <a:lstStyle/>
+          <a:p>
+            <a:endParaRPr lang="sk-SK"/>
+          </a:p>
+        </p:txBody>
+      </p:sp>
+      <p:sp>
+        <p:nvSpPr>
+          <p:cNvPr id="4" name="Text 2">
+            <a:extLst>
+              <a:ext uri="{FF2B5EF4-FFF2-40B4-BE49-F238E27FC236}">
+                <a16:creationId xmlns:a16="http://schemas.microsoft.com/office/drawing/2014/main" id="{055EC658-D98A-53DE-1B8A-10FFE6067407}"/>
+              </a:ext>
+            </a:extLst>
+          </p:cNvPr>
+          <p:cNvSpPr/>
+          <p:nvPr/>
+        </p:nvSpPr>
+        <p:spPr>
+          <a:xfrm>
+            <a:off x="356429" y="914400"/>
+            <a:ext cx="5669280" cy="2011680"/>
           </a:xfrm>
           <a:prstGeom prst="rect">
             <a:avLst/>
@@ -7951,11 +9469,11 @@
           <a:bodyPr wrap="square" lIns="0" tIns="0" rIns="0" bIns="0" rtlCol="0" anchor="ctr"/>
           <a:lstStyle/>
           <a:p>
-            <a:pPr algn="l" indent="0" marL="0">
+            <a:pPr marL="0" indent="0" algn="l">
               <a:buNone/>
             </a:pPr>
             <a:r>
-              <a:rPr lang="en-US" sz="2800" b="1" dirty="0">
+              <a:rPr lang="sk-SK" sz="3600" b="1" dirty="0">
                 <a:solidFill>
                   <a:srgbClr val="FFFFFF"/>
                 </a:solidFill>
@@ -7963,22 +9481,106 @@
                 <a:ea typeface="Calibri" pitchFamily="34" charset="-122"/>
                 <a:cs typeface="Calibri" pitchFamily="34" charset="-120"/>
               </a:rPr>
-              <a:t>Záver</a:t>
-            </a:r>
-            <a:endParaRPr lang="en-US" sz="2800" dirty="0"/>
-          </a:p>
-        </p:txBody>
-      </p:sp>
-      <p:sp>
-        <p:nvSpPr>
-          <p:cNvPr id="5" name="Shape 3"/>
-          <p:cNvSpPr/>
-          <p:nvPr/>
-        </p:nvSpPr>
-        <p:spPr>
-          <a:xfrm>
-            <a:off x="365760" y="960120"/>
-            <a:ext cx="8412480" cy="658368"/>
+              <a:t>Ďakujeme za pozornosť</a:t>
+            </a:r>
+            <a:endParaRPr lang="en-US" sz="3600" dirty="0"/>
+          </a:p>
+        </p:txBody>
+      </p:sp>
+      <p:sp>
+        <p:nvSpPr>
+          <p:cNvPr id="8" name="Shape 6">
+            <a:extLst>
+              <a:ext uri="{FF2B5EF4-FFF2-40B4-BE49-F238E27FC236}">
+                <a16:creationId xmlns:a16="http://schemas.microsoft.com/office/drawing/2014/main" id="{43EB00CF-AF82-F0F2-F534-2E660773B4CE}"/>
+              </a:ext>
+            </a:extLst>
+          </p:cNvPr>
+          <p:cNvSpPr/>
+          <p:nvPr/>
+        </p:nvSpPr>
+        <p:spPr>
+          <a:xfrm>
+            <a:off x="6583680" y="731520"/>
+            <a:ext cx="384048" cy="566928"/>
+          </a:xfrm>
+          <a:prstGeom prst="rect">
+            <a:avLst/>
+          </a:prstGeom>
+          <a:solidFill>
+            <a:srgbClr val="0D9488"/>
+          </a:solidFill>
+          <a:ln w="12700">
+            <a:solidFill>
+              <a:srgbClr val="0F1F3D"/>
+            </a:solidFill>
+            <a:prstDash val="solid"/>
+          </a:ln>
+        </p:spPr>
+        <p:txBody>
+          <a:bodyPr/>
+          <a:lstStyle/>
+          <a:p>
+            <a:endParaRPr lang="sk-SK"/>
+          </a:p>
+        </p:txBody>
+      </p:sp>
+      <p:sp>
+        <p:nvSpPr>
+          <p:cNvPr id="9" name="Shape 7">
+            <a:extLst>
+              <a:ext uri="{FF2B5EF4-FFF2-40B4-BE49-F238E27FC236}">
+                <a16:creationId xmlns:a16="http://schemas.microsoft.com/office/drawing/2014/main" id="{EFD6E7F2-AE34-4151-AF6B-5FDBD970FDB3}"/>
+              </a:ext>
+            </a:extLst>
+          </p:cNvPr>
+          <p:cNvSpPr/>
+          <p:nvPr/>
+        </p:nvSpPr>
+        <p:spPr>
+          <a:xfrm>
+            <a:off x="7040880" y="731520"/>
+            <a:ext cx="384048" cy="566928"/>
+          </a:xfrm>
+          <a:prstGeom prst="rect">
+            <a:avLst/>
+          </a:prstGeom>
+          <a:solidFill>
+            <a:schemeClr val="accent1">
+              <a:lumMod val="75000"/>
+            </a:schemeClr>
+          </a:solidFill>
+          <a:ln w="12700">
+            <a:solidFill>
+              <a:srgbClr val="0F1F3D"/>
+            </a:solidFill>
+            <a:prstDash val="solid"/>
+          </a:ln>
+        </p:spPr>
+        <p:txBody>
+          <a:bodyPr/>
+          <a:lstStyle/>
+          <a:p>
+            <a:endParaRPr lang="sk-SK"/>
+          </a:p>
+        </p:txBody>
+      </p:sp>
+      <p:sp>
+        <p:nvSpPr>
+          <p:cNvPr id="10" name="Shape 8">
+            <a:extLst>
+              <a:ext uri="{FF2B5EF4-FFF2-40B4-BE49-F238E27FC236}">
+                <a16:creationId xmlns:a16="http://schemas.microsoft.com/office/drawing/2014/main" id="{A36B7F7D-D2CB-6CB3-3602-709EC00B668D}"/>
+              </a:ext>
+            </a:extLst>
+          </p:cNvPr>
+          <p:cNvSpPr/>
+          <p:nvPr/>
+        </p:nvSpPr>
+        <p:spPr>
+          <a:xfrm>
+            <a:off x="7498080" y="731520"/>
+            <a:ext cx="384048" cy="566928"/>
           </a:xfrm>
           <a:prstGeom prst="rect">
             <a:avLst/>
@@ -7988,67 +9590,1536 @@
           </a:solidFill>
           <a:ln w="12700">
             <a:solidFill>
+              <a:srgbClr val="0F1F3D"/>
+            </a:solidFill>
+            <a:prstDash val="solid"/>
+          </a:ln>
+        </p:spPr>
+        <p:txBody>
+          <a:bodyPr/>
+          <a:lstStyle/>
+          <a:p>
+            <a:endParaRPr lang="sk-SK"/>
+          </a:p>
+        </p:txBody>
+      </p:sp>
+      <p:sp>
+        <p:nvSpPr>
+          <p:cNvPr id="11" name="Shape 9">
+            <a:extLst>
+              <a:ext uri="{FF2B5EF4-FFF2-40B4-BE49-F238E27FC236}">
+                <a16:creationId xmlns:a16="http://schemas.microsoft.com/office/drawing/2014/main" id="{F874987D-1C17-F2EC-B75F-6B5E1DCEE52C}"/>
+              </a:ext>
+            </a:extLst>
+          </p:cNvPr>
+          <p:cNvSpPr/>
+          <p:nvPr/>
+        </p:nvSpPr>
+        <p:spPr>
+          <a:xfrm>
+            <a:off x="7955280" y="731520"/>
+            <a:ext cx="384048" cy="566928"/>
+          </a:xfrm>
+          <a:prstGeom prst="rect">
+            <a:avLst/>
+          </a:prstGeom>
+          <a:solidFill>
+            <a:srgbClr val="1A3260"/>
+          </a:solidFill>
+          <a:ln w="12700">
+            <a:solidFill>
+              <a:srgbClr val="0F1F3D"/>
+            </a:solidFill>
+            <a:prstDash val="solid"/>
+          </a:ln>
+        </p:spPr>
+        <p:txBody>
+          <a:bodyPr/>
+          <a:lstStyle/>
+          <a:p>
+            <a:endParaRPr lang="sk-SK"/>
+          </a:p>
+        </p:txBody>
+      </p:sp>
+      <p:sp>
+        <p:nvSpPr>
+          <p:cNvPr id="12" name="Shape 10">
+            <a:extLst>
+              <a:ext uri="{FF2B5EF4-FFF2-40B4-BE49-F238E27FC236}">
+                <a16:creationId xmlns:a16="http://schemas.microsoft.com/office/drawing/2014/main" id="{0260AD6E-31B6-E3D1-B141-8FA06BFCBD4B}"/>
+              </a:ext>
+            </a:extLst>
+          </p:cNvPr>
+          <p:cNvSpPr/>
+          <p:nvPr/>
+        </p:nvSpPr>
+        <p:spPr>
+          <a:xfrm>
+            <a:off x="8412480" y="731520"/>
+            <a:ext cx="384048" cy="566928"/>
+          </a:xfrm>
+          <a:prstGeom prst="rect">
+            <a:avLst/>
+          </a:prstGeom>
+          <a:solidFill>
+            <a:srgbClr val="14B8A6"/>
+          </a:solidFill>
+          <a:ln w="12700">
+            <a:solidFill>
+              <a:srgbClr val="0F1F3D"/>
+            </a:solidFill>
+            <a:prstDash val="solid"/>
+          </a:ln>
+        </p:spPr>
+        <p:txBody>
+          <a:bodyPr/>
+          <a:lstStyle/>
+          <a:p>
+            <a:endParaRPr lang="sk-SK"/>
+          </a:p>
+        </p:txBody>
+      </p:sp>
+      <p:sp>
+        <p:nvSpPr>
+          <p:cNvPr id="13" name="Shape 11">
+            <a:extLst>
+              <a:ext uri="{FF2B5EF4-FFF2-40B4-BE49-F238E27FC236}">
+                <a16:creationId xmlns:a16="http://schemas.microsoft.com/office/drawing/2014/main" id="{1A4616A5-6EF5-A102-E67C-0DF7DCB14BDA}"/>
+              </a:ext>
+            </a:extLst>
+          </p:cNvPr>
+          <p:cNvSpPr/>
+          <p:nvPr/>
+        </p:nvSpPr>
+        <p:spPr>
+          <a:xfrm>
+            <a:off x="6583680" y="1371600"/>
+            <a:ext cx="384048" cy="566928"/>
+          </a:xfrm>
+          <a:prstGeom prst="rect">
+            <a:avLst/>
+          </a:prstGeom>
+          <a:solidFill>
+            <a:srgbClr val="14B8A6"/>
+          </a:solidFill>
+          <a:ln w="12700">
+            <a:solidFill>
+              <a:srgbClr val="0F1F3D"/>
+            </a:solidFill>
+            <a:prstDash val="solid"/>
+          </a:ln>
+        </p:spPr>
+        <p:txBody>
+          <a:bodyPr/>
+          <a:lstStyle/>
+          <a:p>
+            <a:endParaRPr lang="sk-SK"/>
+          </a:p>
+        </p:txBody>
+      </p:sp>
+      <p:sp>
+        <p:nvSpPr>
+          <p:cNvPr id="14" name="Shape 12">
+            <a:extLst>
+              <a:ext uri="{FF2B5EF4-FFF2-40B4-BE49-F238E27FC236}">
+                <a16:creationId xmlns:a16="http://schemas.microsoft.com/office/drawing/2014/main" id="{EB305609-426C-FD78-E242-563F289A8212}"/>
+              </a:ext>
+            </a:extLst>
+          </p:cNvPr>
+          <p:cNvSpPr/>
+          <p:nvPr/>
+        </p:nvSpPr>
+        <p:spPr>
+          <a:xfrm>
+            <a:off x="7040880" y="1371600"/>
+            <a:ext cx="384048" cy="566928"/>
+          </a:xfrm>
+          <a:prstGeom prst="rect">
+            <a:avLst/>
+          </a:prstGeom>
+          <a:solidFill>
+            <a:srgbClr val="0D9488"/>
+          </a:solidFill>
+          <a:ln w="12700">
+            <a:solidFill>
+              <a:srgbClr val="0F1F3D"/>
+            </a:solidFill>
+            <a:prstDash val="solid"/>
+          </a:ln>
+        </p:spPr>
+        <p:txBody>
+          <a:bodyPr/>
+          <a:lstStyle/>
+          <a:p>
+            <a:endParaRPr lang="sk-SK"/>
+          </a:p>
+        </p:txBody>
+      </p:sp>
+      <p:sp>
+        <p:nvSpPr>
+          <p:cNvPr id="15" name="Shape 13">
+            <a:extLst>
+              <a:ext uri="{FF2B5EF4-FFF2-40B4-BE49-F238E27FC236}">
+                <a16:creationId xmlns:a16="http://schemas.microsoft.com/office/drawing/2014/main" id="{B2B66769-66D0-048D-ED35-B83D5FB0843F}"/>
+              </a:ext>
+            </a:extLst>
+          </p:cNvPr>
+          <p:cNvSpPr/>
+          <p:nvPr/>
+        </p:nvSpPr>
+        <p:spPr>
+          <a:xfrm>
+            <a:off x="7498080" y="1371600"/>
+            <a:ext cx="384048" cy="566928"/>
+          </a:xfrm>
+          <a:prstGeom prst="rect">
+            <a:avLst/>
+          </a:prstGeom>
+          <a:solidFill>
+            <a:schemeClr val="accent1">
+              <a:lumMod val="75000"/>
+            </a:schemeClr>
+          </a:solidFill>
+          <a:ln w="12700">
+            <a:solidFill>
+              <a:srgbClr val="0F1F3D"/>
+            </a:solidFill>
+            <a:prstDash val="solid"/>
+          </a:ln>
+        </p:spPr>
+        <p:txBody>
+          <a:bodyPr/>
+          <a:lstStyle/>
+          <a:p>
+            <a:endParaRPr lang="sk-SK"/>
+          </a:p>
+        </p:txBody>
+      </p:sp>
+      <p:sp>
+        <p:nvSpPr>
+          <p:cNvPr id="16" name="Shape 14">
+            <a:extLst>
+              <a:ext uri="{FF2B5EF4-FFF2-40B4-BE49-F238E27FC236}">
+                <a16:creationId xmlns:a16="http://schemas.microsoft.com/office/drawing/2014/main" id="{7E906219-5066-05E8-407A-F95E19517855}"/>
+              </a:ext>
+            </a:extLst>
+          </p:cNvPr>
+          <p:cNvSpPr/>
+          <p:nvPr/>
+        </p:nvSpPr>
+        <p:spPr>
+          <a:xfrm>
+            <a:off x="7955280" y="1371600"/>
+            <a:ext cx="384048" cy="566928"/>
+          </a:xfrm>
+          <a:prstGeom prst="rect">
+            <a:avLst/>
+          </a:prstGeom>
+          <a:solidFill>
+            <a:srgbClr val="1A3260"/>
+          </a:solidFill>
+          <a:ln w="12700">
+            <a:solidFill>
+              <a:srgbClr val="0F1F3D"/>
+            </a:solidFill>
+            <a:prstDash val="solid"/>
+          </a:ln>
+        </p:spPr>
+        <p:txBody>
+          <a:bodyPr/>
+          <a:lstStyle/>
+          <a:p>
+            <a:endParaRPr lang="sk-SK"/>
+          </a:p>
+        </p:txBody>
+      </p:sp>
+      <p:sp>
+        <p:nvSpPr>
+          <p:cNvPr id="17" name="Shape 15">
+            <a:extLst>
+              <a:ext uri="{FF2B5EF4-FFF2-40B4-BE49-F238E27FC236}">
+                <a16:creationId xmlns:a16="http://schemas.microsoft.com/office/drawing/2014/main" id="{353DFFFE-4796-CAF5-3BC3-9FBD0C79E6AD}"/>
+              </a:ext>
+            </a:extLst>
+          </p:cNvPr>
+          <p:cNvSpPr/>
+          <p:nvPr/>
+        </p:nvSpPr>
+        <p:spPr>
+          <a:xfrm>
+            <a:off x="8412480" y="1371600"/>
+            <a:ext cx="384048" cy="566928"/>
+          </a:xfrm>
+          <a:prstGeom prst="rect">
+            <a:avLst/>
+          </a:prstGeom>
+          <a:solidFill>
+            <a:srgbClr val="1A3260"/>
+          </a:solidFill>
+          <a:ln w="12700">
+            <a:solidFill>
+              <a:srgbClr val="0F1F3D"/>
+            </a:solidFill>
+            <a:prstDash val="solid"/>
+          </a:ln>
+        </p:spPr>
+        <p:txBody>
+          <a:bodyPr/>
+          <a:lstStyle/>
+          <a:p>
+            <a:endParaRPr lang="sk-SK"/>
+          </a:p>
+        </p:txBody>
+      </p:sp>
+      <p:sp>
+        <p:nvSpPr>
+          <p:cNvPr id="18" name="Shape 16">
+            <a:extLst>
+              <a:ext uri="{FF2B5EF4-FFF2-40B4-BE49-F238E27FC236}">
+                <a16:creationId xmlns:a16="http://schemas.microsoft.com/office/drawing/2014/main" id="{EF5DB196-71AC-81BC-6C22-AD5C1D298942}"/>
+              </a:ext>
+            </a:extLst>
+          </p:cNvPr>
+          <p:cNvSpPr/>
+          <p:nvPr/>
+        </p:nvSpPr>
+        <p:spPr>
+          <a:xfrm>
+            <a:off x="6583680" y="2011680"/>
+            <a:ext cx="384048" cy="566928"/>
+          </a:xfrm>
+          <a:prstGeom prst="rect">
+            <a:avLst/>
+          </a:prstGeom>
+          <a:solidFill>
+            <a:srgbClr val="1A3260"/>
+          </a:solidFill>
+          <a:ln w="12700">
+            <a:solidFill>
+              <a:srgbClr val="0F1F3D"/>
+            </a:solidFill>
+            <a:prstDash val="solid"/>
+          </a:ln>
+        </p:spPr>
+        <p:txBody>
+          <a:bodyPr/>
+          <a:lstStyle/>
+          <a:p>
+            <a:endParaRPr lang="sk-SK"/>
+          </a:p>
+        </p:txBody>
+      </p:sp>
+      <p:sp>
+        <p:nvSpPr>
+          <p:cNvPr id="19" name="Shape 17">
+            <a:extLst>
+              <a:ext uri="{FF2B5EF4-FFF2-40B4-BE49-F238E27FC236}">
+                <a16:creationId xmlns:a16="http://schemas.microsoft.com/office/drawing/2014/main" id="{8F3ACDD5-7736-D3CE-7F4C-4767B40B6C2A}"/>
+              </a:ext>
+            </a:extLst>
+          </p:cNvPr>
+          <p:cNvSpPr/>
+          <p:nvPr/>
+        </p:nvSpPr>
+        <p:spPr>
+          <a:xfrm>
+            <a:off x="7040880" y="2011680"/>
+            <a:ext cx="384048" cy="566928"/>
+          </a:xfrm>
+          <a:prstGeom prst="rect">
+            <a:avLst/>
+          </a:prstGeom>
+          <a:solidFill>
+            <a:srgbClr val="14B8A6"/>
+          </a:solidFill>
+          <a:ln w="12700">
+            <a:solidFill>
+              <a:srgbClr val="0F1F3D"/>
+            </a:solidFill>
+            <a:prstDash val="solid"/>
+          </a:ln>
+        </p:spPr>
+        <p:txBody>
+          <a:bodyPr/>
+          <a:lstStyle/>
+          <a:p>
+            <a:endParaRPr lang="sk-SK"/>
+          </a:p>
+        </p:txBody>
+      </p:sp>
+      <p:sp>
+        <p:nvSpPr>
+          <p:cNvPr id="20" name="Shape 18">
+            <a:extLst>
+              <a:ext uri="{FF2B5EF4-FFF2-40B4-BE49-F238E27FC236}">
+                <a16:creationId xmlns:a16="http://schemas.microsoft.com/office/drawing/2014/main" id="{6D97A2DA-05C7-C78B-F729-2B34D8130209}"/>
+              </a:ext>
+            </a:extLst>
+          </p:cNvPr>
+          <p:cNvSpPr/>
+          <p:nvPr/>
+        </p:nvSpPr>
+        <p:spPr>
+          <a:xfrm>
+            <a:off x="7498080" y="2011680"/>
+            <a:ext cx="384048" cy="566928"/>
+          </a:xfrm>
+          <a:prstGeom prst="rect">
+            <a:avLst/>
+          </a:prstGeom>
+          <a:solidFill>
+            <a:srgbClr val="0D9488"/>
+          </a:solidFill>
+          <a:ln w="12700">
+            <a:solidFill>
+              <a:srgbClr val="0F1F3D"/>
+            </a:solidFill>
+            <a:prstDash val="solid"/>
+          </a:ln>
+        </p:spPr>
+        <p:txBody>
+          <a:bodyPr/>
+          <a:lstStyle/>
+          <a:p>
+            <a:endParaRPr lang="sk-SK"/>
+          </a:p>
+        </p:txBody>
+      </p:sp>
+      <p:sp>
+        <p:nvSpPr>
+          <p:cNvPr id="21" name="Shape 19">
+            <a:extLst>
+              <a:ext uri="{FF2B5EF4-FFF2-40B4-BE49-F238E27FC236}">
+                <a16:creationId xmlns:a16="http://schemas.microsoft.com/office/drawing/2014/main" id="{D3440DE3-DACA-1F6E-4B47-BFAFF73F57E1}"/>
+              </a:ext>
+            </a:extLst>
+          </p:cNvPr>
+          <p:cNvSpPr/>
+          <p:nvPr/>
+        </p:nvSpPr>
+        <p:spPr>
+          <a:xfrm>
+            <a:off x="7955280" y="2011680"/>
+            <a:ext cx="384048" cy="566928"/>
+          </a:xfrm>
+          <a:prstGeom prst="rect">
+            <a:avLst/>
+          </a:prstGeom>
+          <a:solidFill>
+            <a:schemeClr val="accent1">
+              <a:lumMod val="75000"/>
+            </a:schemeClr>
+          </a:solidFill>
+          <a:ln w="12700">
+            <a:solidFill>
+              <a:srgbClr val="0F1F3D"/>
+            </a:solidFill>
+            <a:prstDash val="solid"/>
+          </a:ln>
+        </p:spPr>
+        <p:txBody>
+          <a:bodyPr/>
+          <a:lstStyle/>
+          <a:p>
+            <a:endParaRPr lang="sk-SK"/>
+          </a:p>
+        </p:txBody>
+      </p:sp>
+      <p:sp>
+        <p:nvSpPr>
+          <p:cNvPr id="22" name="Shape 20">
+            <a:extLst>
+              <a:ext uri="{FF2B5EF4-FFF2-40B4-BE49-F238E27FC236}">
+                <a16:creationId xmlns:a16="http://schemas.microsoft.com/office/drawing/2014/main" id="{5F5E5684-5235-C7C4-59C7-99599EEEBD88}"/>
+              </a:ext>
+            </a:extLst>
+          </p:cNvPr>
+          <p:cNvSpPr/>
+          <p:nvPr/>
+        </p:nvSpPr>
+        <p:spPr>
+          <a:xfrm>
+            <a:off x="8412480" y="2011680"/>
+            <a:ext cx="384048" cy="566928"/>
+          </a:xfrm>
+          <a:prstGeom prst="rect">
+            <a:avLst/>
+          </a:prstGeom>
+          <a:solidFill>
+            <a:srgbClr val="1A3260"/>
+          </a:solidFill>
+          <a:ln w="12700">
+            <a:solidFill>
+              <a:srgbClr val="0F1F3D"/>
+            </a:solidFill>
+            <a:prstDash val="solid"/>
+          </a:ln>
+        </p:spPr>
+        <p:txBody>
+          <a:bodyPr/>
+          <a:lstStyle/>
+          <a:p>
+            <a:endParaRPr lang="sk-SK"/>
+          </a:p>
+        </p:txBody>
+      </p:sp>
+      <p:sp>
+        <p:nvSpPr>
+          <p:cNvPr id="23" name="Shape 21">
+            <a:extLst>
+              <a:ext uri="{FF2B5EF4-FFF2-40B4-BE49-F238E27FC236}">
+                <a16:creationId xmlns:a16="http://schemas.microsoft.com/office/drawing/2014/main" id="{E27A2634-490A-0313-1525-05A37E69AB06}"/>
+              </a:ext>
+            </a:extLst>
+          </p:cNvPr>
+          <p:cNvSpPr/>
+          <p:nvPr/>
+        </p:nvSpPr>
+        <p:spPr>
+          <a:xfrm>
+            <a:off x="6583680" y="2651760"/>
+            <a:ext cx="384048" cy="566928"/>
+          </a:xfrm>
+          <a:prstGeom prst="rect">
+            <a:avLst/>
+          </a:prstGeom>
+          <a:solidFill>
+            <a:srgbClr val="1A3260"/>
+          </a:solidFill>
+          <a:ln w="12700">
+            <a:solidFill>
+              <a:srgbClr val="0F1F3D"/>
+            </a:solidFill>
+            <a:prstDash val="solid"/>
+          </a:ln>
+        </p:spPr>
+        <p:txBody>
+          <a:bodyPr/>
+          <a:lstStyle/>
+          <a:p>
+            <a:endParaRPr lang="sk-SK"/>
+          </a:p>
+        </p:txBody>
+      </p:sp>
+      <p:sp>
+        <p:nvSpPr>
+          <p:cNvPr id="24" name="Shape 22">
+            <a:extLst>
+              <a:ext uri="{FF2B5EF4-FFF2-40B4-BE49-F238E27FC236}">
+                <a16:creationId xmlns:a16="http://schemas.microsoft.com/office/drawing/2014/main" id="{71666C0A-FFC6-E295-7228-93B33FA9FE2B}"/>
+              </a:ext>
+            </a:extLst>
+          </p:cNvPr>
+          <p:cNvSpPr/>
+          <p:nvPr/>
+        </p:nvSpPr>
+        <p:spPr>
+          <a:xfrm>
+            <a:off x="7040880" y="2651760"/>
+            <a:ext cx="384048" cy="566928"/>
+          </a:xfrm>
+          <a:prstGeom prst="rect">
+            <a:avLst/>
+          </a:prstGeom>
+          <a:solidFill>
+            <a:srgbClr val="1A3260"/>
+          </a:solidFill>
+          <a:ln w="12700">
+            <a:solidFill>
+              <a:srgbClr val="0F1F3D"/>
+            </a:solidFill>
+            <a:prstDash val="solid"/>
+          </a:ln>
+        </p:spPr>
+        <p:txBody>
+          <a:bodyPr/>
+          <a:lstStyle/>
+          <a:p>
+            <a:endParaRPr lang="sk-SK"/>
+          </a:p>
+        </p:txBody>
+      </p:sp>
+      <p:sp>
+        <p:nvSpPr>
+          <p:cNvPr id="25" name="Shape 23">
+            <a:extLst>
+              <a:ext uri="{FF2B5EF4-FFF2-40B4-BE49-F238E27FC236}">
+                <a16:creationId xmlns:a16="http://schemas.microsoft.com/office/drawing/2014/main" id="{9E50C836-C453-7C7A-4F4B-44ADBA9332EC}"/>
+              </a:ext>
+            </a:extLst>
+          </p:cNvPr>
+          <p:cNvSpPr/>
+          <p:nvPr/>
+        </p:nvSpPr>
+        <p:spPr>
+          <a:xfrm>
+            <a:off x="7498080" y="2651760"/>
+            <a:ext cx="384048" cy="566928"/>
+          </a:xfrm>
+          <a:prstGeom prst="rect">
+            <a:avLst/>
+          </a:prstGeom>
+          <a:solidFill>
+            <a:srgbClr val="14B8A6"/>
+          </a:solidFill>
+          <a:ln w="12700">
+            <a:solidFill>
+              <a:srgbClr val="0F1F3D"/>
+            </a:solidFill>
+            <a:prstDash val="solid"/>
+          </a:ln>
+        </p:spPr>
+        <p:txBody>
+          <a:bodyPr/>
+          <a:lstStyle/>
+          <a:p>
+            <a:endParaRPr lang="sk-SK"/>
+          </a:p>
+        </p:txBody>
+      </p:sp>
+      <p:sp>
+        <p:nvSpPr>
+          <p:cNvPr id="26" name="Shape 24">
+            <a:extLst>
+              <a:ext uri="{FF2B5EF4-FFF2-40B4-BE49-F238E27FC236}">
+                <a16:creationId xmlns:a16="http://schemas.microsoft.com/office/drawing/2014/main" id="{5373F157-79A6-1D1A-62B7-CB5C0188CA90}"/>
+              </a:ext>
+            </a:extLst>
+          </p:cNvPr>
+          <p:cNvSpPr/>
+          <p:nvPr/>
+        </p:nvSpPr>
+        <p:spPr>
+          <a:xfrm>
+            <a:off x="7955280" y="2651760"/>
+            <a:ext cx="384048" cy="566928"/>
+          </a:xfrm>
+          <a:prstGeom prst="rect">
+            <a:avLst/>
+          </a:prstGeom>
+          <a:solidFill>
+            <a:srgbClr val="0D9488"/>
+          </a:solidFill>
+          <a:ln w="12700">
+            <a:solidFill>
+              <a:srgbClr val="0F1F3D"/>
+            </a:solidFill>
+            <a:prstDash val="solid"/>
+          </a:ln>
+        </p:spPr>
+        <p:txBody>
+          <a:bodyPr/>
+          <a:lstStyle/>
+          <a:p>
+            <a:endParaRPr lang="sk-SK"/>
+          </a:p>
+        </p:txBody>
+      </p:sp>
+      <p:sp>
+        <p:nvSpPr>
+          <p:cNvPr id="27" name="Shape 25">
+            <a:extLst>
+              <a:ext uri="{FF2B5EF4-FFF2-40B4-BE49-F238E27FC236}">
+                <a16:creationId xmlns:a16="http://schemas.microsoft.com/office/drawing/2014/main" id="{297C55F0-39D4-3248-46A0-3A85C57A8DCF}"/>
+              </a:ext>
+            </a:extLst>
+          </p:cNvPr>
+          <p:cNvSpPr/>
+          <p:nvPr/>
+        </p:nvSpPr>
+        <p:spPr>
+          <a:xfrm>
+            <a:off x="8412480" y="2651760"/>
+            <a:ext cx="384048" cy="566928"/>
+          </a:xfrm>
+          <a:prstGeom prst="rect">
+            <a:avLst/>
+          </a:prstGeom>
+          <a:solidFill>
+            <a:schemeClr val="accent1">
+              <a:lumMod val="75000"/>
+            </a:schemeClr>
+          </a:solidFill>
+          <a:ln w="12700">
+            <a:solidFill>
+              <a:srgbClr val="0F1F3D"/>
+            </a:solidFill>
+            <a:prstDash val="solid"/>
+          </a:ln>
+        </p:spPr>
+        <p:txBody>
+          <a:bodyPr/>
+          <a:lstStyle/>
+          <a:p>
+            <a:endParaRPr lang="sk-SK"/>
+          </a:p>
+        </p:txBody>
+      </p:sp>
+      <p:sp>
+        <p:nvSpPr>
+          <p:cNvPr id="28" name="Shape 26">
+            <a:extLst>
+              <a:ext uri="{FF2B5EF4-FFF2-40B4-BE49-F238E27FC236}">
+                <a16:creationId xmlns:a16="http://schemas.microsoft.com/office/drawing/2014/main" id="{2AF05362-D951-E524-EC1E-3C1E09B70D49}"/>
+              </a:ext>
+            </a:extLst>
+          </p:cNvPr>
+          <p:cNvSpPr/>
+          <p:nvPr/>
+        </p:nvSpPr>
+        <p:spPr>
+          <a:xfrm>
+            <a:off x="6583680" y="3291840"/>
+            <a:ext cx="384048" cy="566928"/>
+          </a:xfrm>
+          <a:prstGeom prst="rect">
+            <a:avLst/>
+          </a:prstGeom>
+          <a:solidFill>
+            <a:schemeClr val="accent1">
+              <a:lumMod val="75000"/>
+            </a:schemeClr>
+          </a:solidFill>
+          <a:ln w="12700">
+            <a:solidFill>
+              <a:srgbClr val="0F1F3D"/>
+            </a:solidFill>
+            <a:prstDash val="solid"/>
+          </a:ln>
+        </p:spPr>
+        <p:txBody>
+          <a:bodyPr/>
+          <a:lstStyle/>
+          <a:p>
+            <a:endParaRPr lang="sk-SK"/>
+          </a:p>
+        </p:txBody>
+      </p:sp>
+      <p:sp>
+        <p:nvSpPr>
+          <p:cNvPr id="29" name="Shape 27">
+            <a:extLst>
+              <a:ext uri="{FF2B5EF4-FFF2-40B4-BE49-F238E27FC236}">
+                <a16:creationId xmlns:a16="http://schemas.microsoft.com/office/drawing/2014/main" id="{FF5D0CCA-5FE7-75D0-A4C9-34FABF6303B2}"/>
+              </a:ext>
+            </a:extLst>
+          </p:cNvPr>
+          <p:cNvSpPr/>
+          <p:nvPr/>
+        </p:nvSpPr>
+        <p:spPr>
+          <a:xfrm>
+            <a:off x="7040880" y="3291840"/>
+            <a:ext cx="384048" cy="566928"/>
+          </a:xfrm>
+          <a:prstGeom prst="rect">
+            <a:avLst/>
+          </a:prstGeom>
+          <a:solidFill>
+            <a:srgbClr val="1A3260"/>
+          </a:solidFill>
+          <a:ln w="12700">
+            <a:solidFill>
+              <a:srgbClr val="0F1F3D"/>
+            </a:solidFill>
+            <a:prstDash val="solid"/>
+          </a:ln>
+        </p:spPr>
+        <p:txBody>
+          <a:bodyPr/>
+          <a:lstStyle/>
+          <a:p>
+            <a:endParaRPr lang="sk-SK"/>
+          </a:p>
+        </p:txBody>
+      </p:sp>
+      <p:sp>
+        <p:nvSpPr>
+          <p:cNvPr id="30" name="Shape 28">
+            <a:extLst>
+              <a:ext uri="{FF2B5EF4-FFF2-40B4-BE49-F238E27FC236}">
+                <a16:creationId xmlns:a16="http://schemas.microsoft.com/office/drawing/2014/main" id="{1555A7E7-0755-306F-9DDB-59DCBBDBA621}"/>
+              </a:ext>
+            </a:extLst>
+          </p:cNvPr>
+          <p:cNvSpPr/>
+          <p:nvPr/>
+        </p:nvSpPr>
+        <p:spPr>
+          <a:xfrm>
+            <a:off x="7498080" y="3291840"/>
+            <a:ext cx="384048" cy="566928"/>
+          </a:xfrm>
+          <a:prstGeom prst="rect">
+            <a:avLst/>
+          </a:prstGeom>
+          <a:solidFill>
+            <a:srgbClr val="1A3260"/>
+          </a:solidFill>
+          <a:ln w="12700">
+            <a:solidFill>
+              <a:srgbClr val="0F1F3D"/>
+            </a:solidFill>
+            <a:prstDash val="solid"/>
+          </a:ln>
+        </p:spPr>
+        <p:txBody>
+          <a:bodyPr/>
+          <a:lstStyle/>
+          <a:p>
+            <a:endParaRPr lang="sk-SK"/>
+          </a:p>
+        </p:txBody>
+      </p:sp>
+      <p:sp>
+        <p:nvSpPr>
+          <p:cNvPr id="31" name="Shape 29">
+            <a:extLst>
+              <a:ext uri="{FF2B5EF4-FFF2-40B4-BE49-F238E27FC236}">
+                <a16:creationId xmlns:a16="http://schemas.microsoft.com/office/drawing/2014/main" id="{96FA9F2B-EA9B-555D-116E-D0BA17A12E1A}"/>
+              </a:ext>
+            </a:extLst>
+          </p:cNvPr>
+          <p:cNvSpPr/>
+          <p:nvPr/>
+        </p:nvSpPr>
+        <p:spPr>
+          <a:xfrm>
+            <a:off x="7955280" y="3291840"/>
+            <a:ext cx="384048" cy="566928"/>
+          </a:xfrm>
+          <a:prstGeom prst="rect">
+            <a:avLst/>
+          </a:prstGeom>
+          <a:solidFill>
+            <a:srgbClr val="14B8A6"/>
+          </a:solidFill>
+          <a:ln w="12700">
+            <a:solidFill>
+              <a:srgbClr val="0F1F3D"/>
+            </a:solidFill>
+            <a:prstDash val="solid"/>
+          </a:ln>
+        </p:spPr>
+        <p:txBody>
+          <a:bodyPr/>
+          <a:lstStyle/>
+          <a:p>
+            <a:endParaRPr lang="sk-SK"/>
+          </a:p>
+        </p:txBody>
+      </p:sp>
+      <p:sp>
+        <p:nvSpPr>
+          <p:cNvPr id="32" name="Shape 30">
+            <a:extLst>
+              <a:ext uri="{FF2B5EF4-FFF2-40B4-BE49-F238E27FC236}">
+                <a16:creationId xmlns:a16="http://schemas.microsoft.com/office/drawing/2014/main" id="{1853BB65-09D5-8A39-A3FA-B1BC825DC4EB}"/>
+              </a:ext>
+            </a:extLst>
+          </p:cNvPr>
+          <p:cNvSpPr/>
+          <p:nvPr/>
+        </p:nvSpPr>
+        <p:spPr>
+          <a:xfrm>
+            <a:off x="8412480" y="3291840"/>
+            <a:ext cx="384048" cy="566928"/>
+          </a:xfrm>
+          <a:prstGeom prst="rect">
+            <a:avLst/>
+          </a:prstGeom>
+          <a:solidFill>
+            <a:srgbClr val="0D9488"/>
+          </a:solidFill>
+          <a:ln w="12700">
+            <a:solidFill>
+              <a:srgbClr val="0F1F3D"/>
+            </a:solidFill>
+            <a:prstDash val="solid"/>
+          </a:ln>
+        </p:spPr>
+        <p:txBody>
+          <a:bodyPr/>
+          <a:lstStyle/>
+          <a:p>
+            <a:endParaRPr lang="sk-SK"/>
+          </a:p>
+        </p:txBody>
+      </p:sp>
+      <p:sp>
+        <p:nvSpPr>
+          <p:cNvPr id="33" name="Shape 31">
+            <a:extLst>
+              <a:ext uri="{FF2B5EF4-FFF2-40B4-BE49-F238E27FC236}">
+                <a16:creationId xmlns:a16="http://schemas.microsoft.com/office/drawing/2014/main" id="{C075691B-AC29-F6E6-EC01-DA5BB7A4CABB}"/>
+              </a:ext>
+            </a:extLst>
+          </p:cNvPr>
+          <p:cNvSpPr/>
+          <p:nvPr/>
+        </p:nvSpPr>
+        <p:spPr>
+          <a:xfrm>
+            <a:off x="6583680" y="3931920"/>
+            <a:ext cx="384048" cy="566928"/>
+          </a:xfrm>
+          <a:prstGeom prst="rect">
+            <a:avLst/>
+          </a:prstGeom>
+          <a:solidFill>
+            <a:srgbClr val="0D9488"/>
+          </a:solidFill>
+          <a:ln w="12700">
+            <a:solidFill>
+              <a:srgbClr val="0F1F3D"/>
+            </a:solidFill>
+            <a:prstDash val="solid"/>
+          </a:ln>
+        </p:spPr>
+        <p:txBody>
+          <a:bodyPr/>
+          <a:lstStyle/>
+          <a:p>
+            <a:endParaRPr lang="sk-SK"/>
+          </a:p>
+        </p:txBody>
+      </p:sp>
+      <p:sp>
+        <p:nvSpPr>
+          <p:cNvPr id="34" name="Shape 32">
+            <a:extLst>
+              <a:ext uri="{FF2B5EF4-FFF2-40B4-BE49-F238E27FC236}">
+                <a16:creationId xmlns:a16="http://schemas.microsoft.com/office/drawing/2014/main" id="{C1E585DE-84EE-E627-A150-B974195920F8}"/>
+              </a:ext>
+            </a:extLst>
+          </p:cNvPr>
+          <p:cNvSpPr/>
+          <p:nvPr/>
+        </p:nvSpPr>
+        <p:spPr>
+          <a:xfrm>
+            <a:off x="7040880" y="3931920"/>
+            <a:ext cx="384048" cy="566928"/>
+          </a:xfrm>
+          <a:prstGeom prst="rect">
+            <a:avLst/>
+          </a:prstGeom>
+          <a:solidFill>
+            <a:schemeClr val="accent1">
+              <a:lumMod val="75000"/>
+            </a:schemeClr>
+          </a:solidFill>
+          <a:ln w="12700">
+            <a:solidFill>
+              <a:srgbClr val="0F1F3D"/>
+            </a:solidFill>
+            <a:prstDash val="solid"/>
+          </a:ln>
+        </p:spPr>
+        <p:txBody>
+          <a:bodyPr/>
+          <a:lstStyle/>
+          <a:p>
+            <a:endParaRPr lang="sk-SK"/>
+          </a:p>
+        </p:txBody>
+      </p:sp>
+      <p:sp>
+        <p:nvSpPr>
+          <p:cNvPr id="35" name="Shape 33">
+            <a:extLst>
+              <a:ext uri="{FF2B5EF4-FFF2-40B4-BE49-F238E27FC236}">
+                <a16:creationId xmlns:a16="http://schemas.microsoft.com/office/drawing/2014/main" id="{BA7D903D-FE39-24DE-8854-0A94BCA11560}"/>
+              </a:ext>
+            </a:extLst>
+          </p:cNvPr>
+          <p:cNvSpPr/>
+          <p:nvPr/>
+        </p:nvSpPr>
+        <p:spPr>
+          <a:xfrm>
+            <a:off x="7498080" y="3931920"/>
+            <a:ext cx="384048" cy="566928"/>
+          </a:xfrm>
+          <a:prstGeom prst="rect">
+            <a:avLst/>
+          </a:prstGeom>
+          <a:solidFill>
+            <a:srgbClr val="1A3260"/>
+          </a:solidFill>
+          <a:ln w="12700">
+            <a:solidFill>
+              <a:srgbClr val="0F1F3D"/>
+            </a:solidFill>
+            <a:prstDash val="solid"/>
+          </a:ln>
+        </p:spPr>
+        <p:txBody>
+          <a:bodyPr/>
+          <a:lstStyle/>
+          <a:p>
+            <a:endParaRPr lang="sk-SK"/>
+          </a:p>
+        </p:txBody>
+      </p:sp>
+      <p:sp>
+        <p:nvSpPr>
+          <p:cNvPr id="36" name="Shape 34">
+            <a:extLst>
+              <a:ext uri="{FF2B5EF4-FFF2-40B4-BE49-F238E27FC236}">
+                <a16:creationId xmlns:a16="http://schemas.microsoft.com/office/drawing/2014/main" id="{6A7849B3-8E95-DE0D-4FF0-29EA3D2B7A84}"/>
+              </a:ext>
+            </a:extLst>
+          </p:cNvPr>
+          <p:cNvSpPr/>
+          <p:nvPr/>
+        </p:nvSpPr>
+        <p:spPr>
+          <a:xfrm>
+            <a:off x="7955280" y="3931920"/>
+            <a:ext cx="384048" cy="566928"/>
+          </a:xfrm>
+          <a:prstGeom prst="rect">
+            <a:avLst/>
+          </a:prstGeom>
+          <a:solidFill>
+            <a:srgbClr val="1A3260"/>
+          </a:solidFill>
+          <a:ln w="12700">
+            <a:solidFill>
+              <a:srgbClr val="0F1F3D"/>
+            </a:solidFill>
+            <a:prstDash val="solid"/>
+          </a:ln>
+        </p:spPr>
+        <p:txBody>
+          <a:bodyPr/>
+          <a:lstStyle/>
+          <a:p>
+            <a:endParaRPr lang="sk-SK"/>
+          </a:p>
+        </p:txBody>
+      </p:sp>
+      <p:sp>
+        <p:nvSpPr>
+          <p:cNvPr id="37" name="Shape 35">
+            <a:extLst>
+              <a:ext uri="{FF2B5EF4-FFF2-40B4-BE49-F238E27FC236}">
+                <a16:creationId xmlns:a16="http://schemas.microsoft.com/office/drawing/2014/main" id="{2D05DFE1-F207-4E16-F90F-737FC491D674}"/>
+              </a:ext>
+            </a:extLst>
+          </p:cNvPr>
+          <p:cNvSpPr/>
+          <p:nvPr/>
+        </p:nvSpPr>
+        <p:spPr>
+          <a:xfrm>
+            <a:off x="8412480" y="3931920"/>
+            <a:ext cx="384048" cy="566928"/>
+          </a:xfrm>
+          <a:prstGeom prst="rect">
+            <a:avLst/>
+          </a:prstGeom>
+          <a:solidFill>
+            <a:srgbClr val="14B8A6"/>
+          </a:solidFill>
+          <a:ln w="12700">
+            <a:solidFill>
+              <a:srgbClr val="0F1F3D"/>
+            </a:solidFill>
+            <a:prstDash val="solid"/>
+          </a:ln>
+        </p:spPr>
+        <p:txBody>
+          <a:bodyPr/>
+          <a:lstStyle/>
+          <a:p>
+            <a:endParaRPr lang="sk-SK"/>
+          </a:p>
+        </p:txBody>
+      </p:sp>
+      <p:grpSp>
+        <p:nvGrpSpPr>
+          <p:cNvPr id="49" name="Skupina 48">
+            <a:extLst>
+              <a:ext uri="{FF2B5EF4-FFF2-40B4-BE49-F238E27FC236}">
+                <a16:creationId xmlns:a16="http://schemas.microsoft.com/office/drawing/2014/main" id="{02229EBE-6693-3E35-1263-65294209A956}"/>
+              </a:ext>
+            </a:extLst>
+          </p:cNvPr>
+          <p:cNvGrpSpPr/>
+          <p:nvPr/>
+        </p:nvGrpSpPr>
+        <p:grpSpPr>
+          <a:xfrm>
+            <a:off x="342207" y="2519172"/>
+            <a:ext cx="2423160" cy="2560320"/>
+            <a:chOff x="342207" y="2519172"/>
+            <a:chExt cx="2423160" cy="2560320"/>
+          </a:xfrm>
+        </p:grpSpPr>
+        <p:sp>
+          <p:nvSpPr>
+            <p:cNvPr id="38" name="Shape 36">
+              <a:extLst>
+                <a:ext uri="{FF2B5EF4-FFF2-40B4-BE49-F238E27FC236}">
+                  <a16:creationId xmlns:a16="http://schemas.microsoft.com/office/drawing/2014/main" id="{BA82E9AB-DA18-37FF-FB17-D8B491D3915A}"/>
+                </a:ext>
+              </a:extLst>
+            </p:cNvPr>
+            <p:cNvSpPr/>
+            <p:nvPr/>
+          </p:nvSpPr>
+          <p:spPr>
+            <a:xfrm>
+              <a:off x="342207" y="4347972"/>
+              <a:ext cx="201168" cy="731520"/>
+            </a:xfrm>
+            <a:prstGeom prst="rect">
+              <a:avLst/>
+            </a:prstGeom>
+            <a:solidFill>
+              <a:srgbClr val="0D9488">
+                <a:alpha val="80000"/>
+              </a:srgbClr>
+            </a:solidFill>
+            <a:ln w="12700">
+              <a:solidFill>
+                <a:srgbClr val="0F1F3D"/>
+              </a:solidFill>
+              <a:prstDash val="solid"/>
+            </a:ln>
+          </p:spPr>
+          <p:txBody>
+            <a:bodyPr/>
+            <a:lstStyle/>
+            <a:p>
+              <a:endParaRPr lang="sk-SK"/>
+            </a:p>
+          </p:txBody>
+        </p:sp>
+        <p:sp>
+          <p:nvSpPr>
+            <p:cNvPr id="39" name="Shape 37">
+              <a:extLst>
+                <a:ext uri="{FF2B5EF4-FFF2-40B4-BE49-F238E27FC236}">
+                  <a16:creationId xmlns:a16="http://schemas.microsoft.com/office/drawing/2014/main" id="{3E2C651E-9EEC-E8D7-EEB0-7F50C226F8D1}"/>
+                </a:ext>
+              </a:extLst>
+            </p:cNvPr>
+            <p:cNvSpPr/>
+            <p:nvPr/>
+          </p:nvSpPr>
+          <p:spPr>
+            <a:xfrm>
+              <a:off x="589095" y="3799332"/>
+              <a:ext cx="201168" cy="1280160"/>
+            </a:xfrm>
+            <a:prstGeom prst="rect">
+              <a:avLst/>
+            </a:prstGeom>
+            <a:solidFill>
+              <a:srgbClr val="14B8A6">
+                <a:alpha val="80000"/>
+              </a:srgbClr>
+            </a:solidFill>
+            <a:ln w="12700">
+              <a:solidFill>
+                <a:srgbClr val="0F1F3D"/>
+              </a:solidFill>
+              <a:prstDash val="solid"/>
+            </a:ln>
+          </p:spPr>
+          <p:txBody>
+            <a:bodyPr/>
+            <a:lstStyle/>
+            <a:p>
+              <a:endParaRPr lang="sk-SK"/>
+            </a:p>
+          </p:txBody>
+        </p:sp>
+        <p:sp>
+          <p:nvSpPr>
+            <p:cNvPr id="40" name="Shape 38">
+              <a:extLst>
+                <a:ext uri="{FF2B5EF4-FFF2-40B4-BE49-F238E27FC236}">
+                  <a16:creationId xmlns:a16="http://schemas.microsoft.com/office/drawing/2014/main" id="{94B88F6D-A493-7AD5-172C-C2FFDD62CBB5}"/>
+                </a:ext>
+              </a:extLst>
+            </p:cNvPr>
+            <p:cNvSpPr/>
+            <p:nvPr/>
+          </p:nvSpPr>
+          <p:spPr>
+            <a:xfrm>
+              <a:off x="835983" y="3159252"/>
+              <a:ext cx="201168" cy="1920240"/>
+            </a:xfrm>
+            <a:prstGeom prst="rect">
+              <a:avLst/>
+            </a:prstGeom>
+            <a:solidFill>
+              <a:srgbClr val="F59E0B">
+                <a:alpha val="80000"/>
+              </a:srgbClr>
+            </a:solidFill>
+            <a:ln w="12700">
+              <a:solidFill>
+                <a:srgbClr val="0F1F3D"/>
+              </a:solidFill>
+              <a:prstDash val="solid"/>
+            </a:ln>
+          </p:spPr>
+          <p:txBody>
+            <a:bodyPr/>
+            <a:lstStyle/>
+            <a:p>
+              <a:endParaRPr lang="sk-SK"/>
+            </a:p>
+          </p:txBody>
+        </p:sp>
+        <p:sp>
+          <p:nvSpPr>
+            <p:cNvPr id="41" name="Shape 39">
+              <a:extLst>
+                <a:ext uri="{FF2B5EF4-FFF2-40B4-BE49-F238E27FC236}">
+                  <a16:creationId xmlns:a16="http://schemas.microsoft.com/office/drawing/2014/main" id="{F3E6BE69-9EAB-001A-AE81-B51AF4C9C3EE}"/>
+                </a:ext>
+              </a:extLst>
+            </p:cNvPr>
+            <p:cNvSpPr/>
+            <p:nvPr/>
+          </p:nvSpPr>
+          <p:spPr>
+            <a:xfrm>
+              <a:off x="1082871" y="3525012"/>
+              <a:ext cx="201168" cy="1554480"/>
+            </a:xfrm>
+            <a:prstGeom prst="rect">
+              <a:avLst/>
+            </a:prstGeom>
+            <a:solidFill>
+              <a:srgbClr val="0D9488">
+                <a:alpha val="80000"/>
+              </a:srgbClr>
+            </a:solidFill>
+            <a:ln w="12700">
+              <a:solidFill>
+                <a:srgbClr val="0F1F3D"/>
+              </a:solidFill>
+              <a:prstDash val="solid"/>
+            </a:ln>
+          </p:spPr>
+          <p:txBody>
+            <a:bodyPr/>
+            <a:lstStyle/>
+            <a:p>
+              <a:endParaRPr lang="sk-SK"/>
+            </a:p>
+          </p:txBody>
+        </p:sp>
+        <p:sp>
+          <p:nvSpPr>
+            <p:cNvPr id="42" name="Shape 40">
+              <a:extLst>
+                <a:ext uri="{FF2B5EF4-FFF2-40B4-BE49-F238E27FC236}">
+                  <a16:creationId xmlns:a16="http://schemas.microsoft.com/office/drawing/2014/main" id="{E54CA2B7-9B93-15B9-F133-A976E14C3E87}"/>
+                </a:ext>
+              </a:extLst>
+            </p:cNvPr>
+            <p:cNvSpPr/>
+            <p:nvPr/>
+          </p:nvSpPr>
+          <p:spPr>
+            <a:xfrm>
+              <a:off x="1329759" y="2519172"/>
+              <a:ext cx="201168" cy="2560320"/>
+            </a:xfrm>
+            <a:prstGeom prst="rect">
+              <a:avLst/>
+            </a:prstGeom>
+            <a:solidFill>
+              <a:srgbClr val="14B8A6">
+                <a:alpha val="80000"/>
+              </a:srgbClr>
+            </a:solidFill>
+            <a:ln w="12700">
+              <a:solidFill>
+                <a:srgbClr val="0F1F3D"/>
+              </a:solidFill>
+              <a:prstDash val="solid"/>
+            </a:ln>
+          </p:spPr>
+          <p:txBody>
+            <a:bodyPr/>
+            <a:lstStyle/>
+            <a:p>
+              <a:endParaRPr lang="sk-SK"/>
+            </a:p>
+          </p:txBody>
+        </p:sp>
+        <p:sp>
+          <p:nvSpPr>
+            <p:cNvPr id="43" name="Shape 41">
+              <a:extLst>
+                <a:ext uri="{FF2B5EF4-FFF2-40B4-BE49-F238E27FC236}">
+                  <a16:creationId xmlns:a16="http://schemas.microsoft.com/office/drawing/2014/main" id="{C0D8EE2F-C78B-2D83-5104-AC782253EFCC}"/>
+                </a:ext>
+              </a:extLst>
+            </p:cNvPr>
+            <p:cNvSpPr/>
+            <p:nvPr/>
+          </p:nvSpPr>
+          <p:spPr>
+            <a:xfrm>
+              <a:off x="1576647" y="3982212"/>
+              <a:ext cx="201168" cy="1097280"/>
+            </a:xfrm>
+            <a:prstGeom prst="rect">
+              <a:avLst/>
+            </a:prstGeom>
+            <a:solidFill>
+              <a:srgbClr val="F59E0B">
+                <a:alpha val="80000"/>
+              </a:srgbClr>
+            </a:solidFill>
+            <a:ln w="12700">
+              <a:solidFill>
+                <a:srgbClr val="0F1F3D"/>
+              </a:solidFill>
+              <a:prstDash val="solid"/>
+            </a:ln>
+          </p:spPr>
+          <p:txBody>
+            <a:bodyPr/>
+            <a:lstStyle/>
+            <a:p>
+              <a:endParaRPr lang="sk-SK"/>
+            </a:p>
+          </p:txBody>
+        </p:sp>
+        <p:sp>
+          <p:nvSpPr>
+            <p:cNvPr id="44" name="Shape 42">
+              <a:extLst>
+                <a:ext uri="{FF2B5EF4-FFF2-40B4-BE49-F238E27FC236}">
+                  <a16:creationId xmlns:a16="http://schemas.microsoft.com/office/drawing/2014/main" id="{D4DA7188-0007-8968-D033-313BDE57A646}"/>
+                </a:ext>
+              </a:extLst>
+            </p:cNvPr>
+            <p:cNvSpPr/>
+            <p:nvPr/>
+          </p:nvSpPr>
+          <p:spPr>
+            <a:xfrm>
+              <a:off x="1823535" y="4256532"/>
+              <a:ext cx="201168" cy="822960"/>
+            </a:xfrm>
+            <a:prstGeom prst="rect">
+              <a:avLst/>
+            </a:prstGeom>
+            <a:solidFill>
+              <a:srgbClr val="0D9488">
+                <a:alpha val="80000"/>
+              </a:srgbClr>
+            </a:solidFill>
+            <a:ln w="12700">
+              <a:solidFill>
+                <a:srgbClr val="0F1F3D"/>
+              </a:solidFill>
+              <a:prstDash val="solid"/>
+            </a:ln>
+          </p:spPr>
+          <p:txBody>
+            <a:bodyPr/>
+            <a:lstStyle/>
+            <a:p>
+              <a:endParaRPr lang="sk-SK"/>
+            </a:p>
+          </p:txBody>
+        </p:sp>
+        <p:sp>
+          <p:nvSpPr>
+            <p:cNvPr id="45" name="Shape 43">
+              <a:extLst>
+                <a:ext uri="{FF2B5EF4-FFF2-40B4-BE49-F238E27FC236}">
+                  <a16:creationId xmlns:a16="http://schemas.microsoft.com/office/drawing/2014/main" id="{2D70E161-EBAD-07E9-F8F2-BFC028796274}"/>
+                </a:ext>
+              </a:extLst>
+            </p:cNvPr>
+            <p:cNvSpPr/>
+            <p:nvPr/>
+          </p:nvSpPr>
+          <p:spPr>
+            <a:xfrm>
+              <a:off x="2070423" y="3707892"/>
+              <a:ext cx="201168" cy="1371600"/>
+            </a:xfrm>
+            <a:prstGeom prst="rect">
+              <a:avLst/>
+            </a:prstGeom>
+            <a:solidFill>
+              <a:srgbClr val="14B8A6">
+                <a:alpha val="80000"/>
+              </a:srgbClr>
+            </a:solidFill>
+            <a:ln w="12700">
+              <a:solidFill>
+                <a:srgbClr val="0F1F3D"/>
+              </a:solidFill>
+              <a:prstDash val="solid"/>
+            </a:ln>
+          </p:spPr>
+          <p:txBody>
+            <a:bodyPr/>
+            <a:lstStyle/>
+            <a:p>
+              <a:endParaRPr lang="sk-SK"/>
+            </a:p>
+          </p:txBody>
+        </p:sp>
+        <p:sp>
+          <p:nvSpPr>
+            <p:cNvPr id="46" name="Shape 44">
+              <a:extLst>
+                <a:ext uri="{FF2B5EF4-FFF2-40B4-BE49-F238E27FC236}">
+                  <a16:creationId xmlns:a16="http://schemas.microsoft.com/office/drawing/2014/main" id="{247AD1AA-FDE5-05B8-6A4D-DDD1F86C9B19}"/>
+                </a:ext>
+              </a:extLst>
+            </p:cNvPr>
+            <p:cNvSpPr/>
+            <p:nvPr/>
+          </p:nvSpPr>
+          <p:spPr>
+            <a:xfrm>
+              <a:off x="2317311" y="2976372"/>
+              <a:ext cx="201168" cy="2103120"/>
+            </a:xfrm>
+            <a:prstGeom prst="rect">
+              <a:avLst/>
+            </a:prstGeom>
+            <a:solidFill>
+              <a:srgbClr val="F59E0B">
+                <a:alpha val="80000"/>
+              </a:srgbClr>
+            </a:solidFill>
+            <a:ln w="12700">
+              <a:solidFill>
+                <a:srgbClr val="0F1F3D"/>
+              </a:solidFill>
+              <a:prstDash val="solid"/>
+            </a:ln>
+          </p:spPr>
+          <p:txBody>
+            <a:bodyPr/>
+            <a:lstStyle/>
+            <a:p>
+              <a:endParaRPr lang="sk-SK"/>
+            </a:p>
+          </p:txBody>
+        </p:sp>
+        <p:sp>
+          <p:nvSpPr>
+            <p:cNvPr id="47" name="Shape 45">
+              <a:extLst>
+                <a:ext uri="{FF2B5EF4-FFF2-40B4-BE49-F238E27FC236}">
+                  <a16:creationId xmlns:a16="http://schemas.microsoft.com/office/drawing/2014/main" id="{FDA25275-7890-57D9-3BBC-8E407244337B}"/>
+                </a:ext>
+              </a:extLst>
+            </p:cNvPr>
+            <p:cNvSpPr/>
+            <p:nvPr/>
+          </p:nvSpPr>
+          <p:spPr>
+            <a:xfrm>
+              <a:off x="2564199" y="4165092"/>
+              <a:ext cx="201168" cy="914400"/>
+            </a:xfrm>
+            <a:prstGeom prst="rect">
+              <a:avLst/>
+            </a:prstGeom>
+            <a:solidFill>
+              <a:srgbClr val="0D9488">
+                <a:alpha val="80000"/>
+              </a:srgbClr>
+            </a:solidFill>
+            <a:ln w="12700">
+              <a:solidFill>
+                <a:srgbClr val="0F1F3D"/>
+              </a:solidFill>
+              <a:prstDash val="solid"/>
+            </a:ln>
+          </p:spPr>
+          <p:txBody>
+            <a:bodyPr/>
+            <a:lstStyle/>
+            <a:p>
+              <a:endParaRPr lang="sk-SK"/>
+            </a:p>
+          </p:txBody>
+        </p:sp>
+      </p:grpSp>
+      <p:sp>
+        <p:nvSpPr>
+          <p:cNvPr id="48" name="Shape 46">
+            <a:extLst>
+              <a:ext uri="{FF2B5EF4-FFF2-40B4-BE49-F238E27FC236}">
+                <a16:creationId xmlns:a16="http://schemas.microsoft.com/office/drawing/2014/main" id="{9EDFDA01-C0D3-509D-9B48-26C4C3350CEF}"/>
+              </a:ext>
+            </a:extLst>
+          </p:cNvPr>
+          <p:cNvSpPr/>
+          <p:nvPr/>
+        </p:nvSpPr>
+        <p:spPr>
+          <a:xfrm>
+            <a:off x="0" y="5079492"/>
+            <a:ext cx="9144000" cy="64008"/>
+          </a:xfrm>
+          <a:prstGeom prst="rect">
+            <a:avLst/>
+          </a:prstGeom>
+          <a:solidFill>
+            <a:srgbClr val="0D9488"/>
+          </a:solidFill>
+          <a:ln w="12700">
+            <a:solidFill>
               <a:srgbClr val="0D9488"/>
             </a:solidFill>
             <a:prstDash val="solid"/>
           </a:ln>
         </p:spPr>
-      </p:sp>
-      <p:sp>
-        <p:nvSpPr>
-          <p:cNvPr id="6" name="Text 4"/>
-          <p:cNvSpPr/>
-          <p:nvPr/>
-        </p:nvSpPr>
-        <p:spPr>
-          <a:xfrm>
-            <a:off x="502920" y="960120"/>
-            <a:ext cx="8138160" cy="658368"/>
-          </a:xfrm>
-          <a:prstGeom prst="rect">
-            <a:avLst/>
-          </a:prstGeom>
-          <a:noFill/>
-          <a:ln/>
-        </p:spPr>
-        <p:txBody>
-          <a:bodyPr wrap="square" lIns="0" tIns="0" rIns="0" bIns="0" rtlCol="0" anchor="ctr"/>
-          <a:lstStyle/>
-          <a:p>
-            <a:pPr indent="0" marL="0">
-              <a:buNone/>
-            </a:pPr>
-            <a:r>
-              <a:rPr lang="en-US" sz="1200" dirty="0">
-                <a:solidFill>
-                  <a:srgbClr val="FFFFFF"/>
-                </a:solidFill>
-                <a:latin typeface="Calibri" pitchFamily="34" charset="0"/>
-                <a:ea typeface="Calibri" pitchFamily="34" charset="-122"/>
-                <a:cs typeface="Calibri" pitchFamily="34" charset="-120"/>
-              </a:rPr>
-              <a:t>✅  Manuálny histogram (NumPy bincount) je bitovo identický s OpenCV – diferencia = 0</a:t>
-            </a:r>
-            <a:endParaRPr lang="en-US" sz="1200" dirty="0"/>
-          </a:p>
-        </p:txBody>
-      </p:sp>
-      <p:sp>
-        <p:nvSpPr>
-          <p:cNvPr id="7" name="Shape 5"/>
-          <p:cNvSpPr/>
-          <p:nvPr/>
-        </p:nvSpPr>
-        <p:spPr>
-          <a:xfrm>
-            <a:off x="365760" y="1719072"/>
-            <a:ext cx="8412480" cy="658368"/>
-          </a:xfrm>
-          <a:prstGeom prst="rect">
-            <a:avLst/>
-          </a:prstGeom>
-          <a:solidFill>
-            <a:srgbClr val="1A3260"/>
+        <p:txBody>
+          <a:bodyPr/>
+          <a:lstStyle/>
+          <a:p>
+            <a:endParaRPr lang="sk-SK"/>
+          </a:p>
+        </p:txBody>
+      </p:sp>
+      <p:sp>
+        <p:nvSpPr>
+          <p:cNvPr id="50" name="Shape 0">
+            <a:extLst>
+              <a:ext uri="{FF2B5EF4-FFF2-40B4-BE49-F238E27FC236}">
+                <a16:creationId xmlns:a16="http://schemas.microsoft.com/office/drawing/2014/main" id="{AB5ED092-2592-457D-6154-617EB430B6DB}"/>
+              </a:ext>
+            </a:extLst>
+          </p:cNvPr>
+          <p:cNvSpPr/>
+          <p:nvPr/>
+        </p:nvSpPr>
+        <p:spPr>
+          <a:xfrm rot="5400000">
+            <a:off x="-2535867" y="2539746"/>
+            <a:ext cx="5143500" cy="64008"/>
+          </a:xfrm>
+          <a:prstGeom prst="rect">
+            <a:avLst/>
+          </a:prstGeom>
+          <a:solidFill>
+            <a:srgbClr val="0D9488"/>
           </a:solidFill>
           <a:ln w="12700">
             <a:solidFill>
@@ -8057,62 +11128,37 @@
             <a:prstDash val="solid"/>
           </a:ln>
         </p:spPr>
-      </p:sp>
-      <p:sp>
-        <p:nvSpPr>
-          <p:cNvPr id="8" name="Text 6"/>
-          <p:cNvSpPr/>
-          <p:nvPr/>
-        </p:nvSpPr>
-        <p:spPr>
-          <a:xfrm>
-            <a:off x="502920" y="1719072"/>
-            <a:ext cx="8138160" cy="658368"/>
-          </a:xfrm>
-          <a:prstGeom prst="rect">
-            <a:avLst/>
-          </a:prstGeom>
-          <a:noFill/>
-          <a:ln/>
-        </p:spPr>
-        <p:txBody>
-          <a:bodyPr wrap="square" lIns="0" tIns="0" rIns="0" bIns="0" rtlCol="0" anchor="ctr"/>
-          <a:lstStyle/>
-          <a:p>
-            <a:pPr indent="0" marL="0">
-              <a:buNone/>
-            </a:pPr>
-            <a:r>
-              <a:rPr lang="en-US" sz="1200" dirty="0">
-                <a:solidFill>
-                  <a:srgbClr val="FFFFFF"/>
-                </a:solidFill>
-                <a:latin typeface="Calibri" pitchFamily="34" charset="0"/>
-                <a:ea typeface="Calibri" pitchFamily="34" charset="-122"/>
-                <a:cs typeface="Calibri" pitchFamily="34" charset="-120"/>
-              </a:rPr>
-              <a:t>✅  Histogramová ekvalizácia dáva rovnaký výsledok (diff 0.00 px) – zaokrúhľovanie v LUT je zanedbateľné</a:t>
-            </a:r>
-            <a:endParaRPr lang="en-US" sz="1200" dirty="0"/>
-          </a:p>
-        </p:txBody>
-      </p:sp>
-      <p:sp>
-        <p:nvSpPr>
-          <p:cNvPr id="9" name="Shape 7"/>
-          <p:cNvSpPr/>
-          <p:nvPr/>
-        </p:nvSpPr>
-        <p:spPr>
-          <a:xfrm>
-            <a:off x="365760" y="2478024"/>
-            <a:ext cx="8412480" cy="658368"/>
-          </a:xfrm>
-          <a:prstGeom prst="rect">
-            <a:avLst/>
-          </a:prstGeom>
-          <a:solidFill>
-            <a:srgbClr val="1A3260"/>
+        <p:txBody>
+          <a:bodyPr/>
+          <a:lstStyle/>
+          <a:p>
+            <a:pPr algn="r"/>
+            <a:endParaRPr lang="sk-SK" dirty="0"/>
+          </a:p>
+        </p:txBody>
+      </p:sp>
+      <p:sp>
+        <p:nvSpPr>
+          <p:cNvPr id="51" name="Shape 0">
+            <a:extLst>
+              <a:ext uri="{FF2B5EF4-FFF2-40B4-BE49-F238E27FC236}">
+                <a16:creationId xmlns:a16="http://schemas.microsoft.com/office/drawing/2014/main" id="{9A418AE4-5859-7A5B-FAE0-688E79C58451}"/>
+              </a:ext>
+            </a:extLst>
+          </p:cNvPr>
+          <p:cNvSpPr/>
+          <p:nvPr/>
+        </p:nvSpPr>
+        <p:spPr>
+          <a:xfrm rot="5400000">
+            <a:off x="6531102" y="2532922"/>
+            <a:ext cx="5143500" cy="64008"/>
+          </a:xfrm>
+          <a:prstGeom prst="rect">
+            <a:avLst/>
+          </a:prstGeom>
+          <a:solidFill>
+            <a:srgbClr val="0D9488"/>
           </a:solidFill>
           <a:ln w="12700">
             <a:solidFill>
@@ -8121,200 +11167,21 @@
             <a:prstDash val="solid"/>
           </a:ln>
         </p:spPr>
-      </p:sp>
-      <p:sp>
-        <p:nvSpPr>
-          <p:cNvPr id="10" name="Text 8"/>
-          <p:cNvSpPr/>
-          <p:nvPr/>
-        </p:nvSpPr>
-        <p:spPr>
-          <a:xfrm>
-            <a:off x="502920" y="2478024"/>
-            <a:ext cx="8138160" cy="658368"/>
-          </a:xfrm>
-          <a:prstGeom prst="rect">
-            <a:avLst/>
-          </a:prstGeom>
-          <a:noFill/>
-          <a:ln/>
-        </p:spPr>
-        <p:txBody>
-          <a:bodyPr wrap="square" lIns="0" tIns="0" rIns="0" bIns="0" rtlCol="0" anchor="ctr"/>
-          <a:lstStyle/>
-          <a:p>
-            <a:pPr indent="0" marL="0">
-              <a:buNone/>
-            </a:pPr>
-            <a:r>
-              <a:rPr lang="en-US" sz="1200" dirty="0">
-                <a:solidFill>
-                  <a:srgbClr val="FFFFFF"/>
-                </a:solidFill>
-                <a:latin typeface="Calibri" pitchFamily="34" charset="0"/>
-                <a:ea typeface="Calibri" pitchFamily="34" charset="-122"/>
-                <a:cs typeface="Calibri" pitchFamily="34" charset="-120"/>
-              </a:rPr>
-              <a:t>⚠️  CLAHE sa líši o ~1 px kvôli rozdielnej interpolácii hraničných dlaždíc v C++ vs Python</a:t>
-            </a:r>
-            <a:endParaRPr lang="en-US" sz="1200" dirty="0"/>
-          </a:p>
-        </p:txBody>
-      </p:sp>
-      <p:sp>
-        <p:nvSpPr>
-          <p:cNvPr id="11" name="Shape 9"/>
-          <p:cNvSpPr/>
-          <p:nvPr/>
-        </p:nvSpPr>
-        <p:spPr>
-          <a:xfrm>
-            <a:off x="365760" y="3236976"/>
-            <a:ext cx="8412480" cy="658368"/>
-          </a:xfrm>
-          <a:prstGeom prst="rect">
-            <a:avLst/>
-          </a:prstGeom>
-          <a:solidFill>
-            <a:srgbClr val="1A3260"/>
-          </a:solidFill>
-          <a:ln w="12700">
-            <a:solidFill>
-              <a:srgbClr val="0D9488"/>
-            </a:solidFill>
-            <a:prstDash val="solid"/>
-          </a:ln>
-        </p:spPr>
-      </p:sp>
-      <p:sp>
-        <p:nvSpPr>
-          <p:cNvPr id="12" name="Text 10"/>
-          <p:cNvSpPr/>
-          <p:nvPr/>
-        </p:nvSpPr>
-        <p:spPr>
-          <a:xfrm>
-            <a:off x="502920" y="3236976"/>
-            <a:ext cx="8138160" cy="658368"/>
-          </a:xfrm>
-          <a:prstGeom prst="rect">
-            <a:avLst/>
-          </a:prstGeom>
-          <a:noFill/>
-          <a:ln/>
-        </p:spPr>
-        <p:txBody>
-          <a:bodyPr wrap="square" lIns="0" tIns="0" rIns="0" bIns="0" rtlCol="0" anchor="ctr"/>
-          <a:lstStyle/>
-          <a:p>
-            <a:pPr indent="0" marL="0">
-              <a:buNone/>
-            </a:pPr>
-            <a:r>
-              <a:rPr lang="en-US" sz="1200" dirty="0">
-                <a:solidFill>
-                  <a:srgbClr val="FFFFFF"/>
-                </a:solidFill>
-                <a:latin typeface="Calibri" pitchFamily="34" charset="0"/>
-                <a:ea typeface="Calibri" pitchFamily="34" charset="-122"/>
-                <a:cs typeface="Calibri" pitchFamily="34" charset="-120"/>
-              </a:rPr>
-              <a:t>🚀  OpenCV je ~5× rýchlejšia pri ekvalizácii a až ~60× pri CLAHE vďaka natívnej C++ implementácii</a:t>
-            </a:r>
-            <a:endParaRPr lang="en-US" sz="1200" dirty="0"/>
-          </a:p>
-        </p:txBody>
-      </p:sp>
-      <p:sp>
-        <p:nvSpPr>
-          <p:cNvPr id="13" name="Shape 11"/>
-          <p:cNvSpPr/>
-          <p:nvPr/>
-        </p:nvSpPr>
-        <p:spPr>
-          <a:xfrm>
-            <a:off x="365760" y="3995928"/>
-            <a:ext cx="8412480" cy="658368"/>
-          </a:xfrm>
-          <a:prstGeom prst="rect">
-            <a:avLst/>
-          </a:prstGeom>
-          <a:solidFill>
-            <a:srgbClr val="1A3260"/>
-          </a:solidFill>
-          <a:ln w="12700">
-            <a:solidFill>
-              <a:srgbClr val="0D9488"/>
-            </a:solidFill>
-            <a:prstDash val="solid"/>
-          </a:ln>
-        </p:spPr>
-      </p:sp>
-      <p:sp>
-        <p:nvSpPr>
-          <p:cNvPr id="14" name="Text 12"/>
-          <p:cNvSpPr/>
-          <p:nvPr/>
-        </p:nvSpPr>
-        <p:spPr>
-          <a:xfrm>
-            <a:off x="502920" y="3995928"/>
-            <a:ext cx="8138160" cy="658368"/>
-          </a:xfrm>
-          <a:prstGeom prst="rect">
-            <a:avLst/>
-          </a:prstGeom>
-          <a:noFill/>
-          <a:ln/>
-        </p:spPr>
-        <p:txBody>
-          <a:bodyPr wrap="square" lIns="0" tIns="0" rIns="0" bIns="0" rtlCol="0" anchor="ctr"/>
-          <a:lstStyle/>
-          <a:p>
-            <a:pPr indent="0" marL="0">
-              <a:buNone/>
-            </a:pPr>
-            <a:r>
-              <a:rPr lang="en-US" sz="1200" dirty="0">
-                <a:solidFill>
-                  <a:srgbClr val="FFFFFF"/>
-                </a:solidFill>
-                <a:latin typeface="Calibri" pitchFamily="34" charset="0"/>
-                <a:ea typeface="Calibri" pitchFamily="34" charset="-122"/>
-                <a:cs typeface="Calibri" pitchFamily="34" charset="-120"/>
-              </a:rPr>
-              <a:t>🎓  Manuálna implementácia pochopila princíp – produkčný kód by však mal používať OpenCV</a:t>
-            </a:r>
-            <a:endParaRPr lang="en-US" sz="1200" dirty="0"/>
-          </a:p>
-        </p:txBody>
-      </p:sp>
-      <p:sp>
-        <p:nvSpPr>
-          <p:cNvPr id="15" name="Shape 13"/>
-          <p:cNvSpPr/>
-          <p:nvPr/>
-        </p:nvSpPr>
-        <p:spPr>
-          <a:xfrm>
-            <a:off x="0" y="5015484"/>
-            <a:ext cx="9144000" cy="128016"/>
-          </a:xfrm>
-          <a:prstGeom prst="rect">
-            <a:avLst/>
-          </a:prstGeom>
-          <a:solidFill>
-            <a:srgbClr val="0D9488"/>
-          </a:solidFill>
-          <a:ln w="12700">
-            <a:solidFill>
-              <a:srgbClr val="0D9488"/>
-            </a:solidFill>
-            <a:prstDash val="solid"/>
-          </a:ln>
-        </p:spPr>
+        <p:txBody>
+          <a:bodyPr/>
+          <a:lstStyle/>
+          <a:p>
+            <a:pPr algn="r"/>
+            <a:endParaRPr lang="sk-SK" dirty="0"/>
+          </a:p>
+        </p:txBody>
       </p:sp>
     </p:spTree>
+    <p:extLst>
+      <p:ext uri="{BB962C8B-B14F-4D97-AF65-F5344CB8AC3E}">
+        <p14:creationId xmlns:p14="http://schemas.microsoft.com/office/powerpoint/2010/main" val="1221513170"/>
+      </p:ext>
+    </p:extLst>
   </p:cSld>
   <p:clrMapOvr>
     <a:masterClrMapping/>
@@ -8615,4 +11482,319 @@
     </a:ext>
   </a:extLst>
 </a:theme>
+</file>
+
+<file path=ppt/theme/theme2.xml><?xml version="1.0" encoding="utf-8"?>
+<a:theme xmlns:a="http://schemas.openxmlformats.org/drawingml/2006/main" name="Motív Office">
+  <a:themeElements>
+    <a:clrScheme name="Office">
+      <a:dk1>
+        <a:sysClr val="windowText" lastClr="000000"/>
+      </a:dk1>
+      <a:lt1>
+        <a:sysClr val="window" lastClr="FFFFFF"/>
+      </a:lt1>
+      <a:dk2>
+        <a:srgbClr val="0E2841"/>
+      </a:dk2>
+      <a:lt2>
+        <a:srgbClr val="E8E8E8"/>
+      </a:lt2>
+      <a:accent1>
+        <a:srgbClr val="156082"/>
+      </a:accent1>
+      <a:accent2>
+        <a:srgbClr val="E97132"/>
+      </a:accent2>
+      <a:accent3>
+        <a:srgbClr val="196B24"/>
+      </a:accent3>
+      <a:accent4>
+        <a:srgbClr val="0F9ED5"/>
+      </a:accent4>
+      <a:accent5>
+        <a:srgbClr val="A02B93"/>
+      </a:accent5>
+      <a:accent6>
+        <a:srgbClr val="4EA72E"/>
+      </a:accent6>
+      <a:hlink>
+        <a:srgbClr val="467886"/>
+      </a:hlink>
+      <a:folHlink>
+        <a:srgbClr val="96607D"/>
+      </a:folHlink>
+    </a:clrScheme>
+    <a:fontScheme name="Office">
+      <a:majorFont>
+        <a:latin typeface="Aptos Display" panose="02110004020202020204"/>
+        <a:ea typeface=""/>
+        <a:cs typeface=""/>
+        <a:font script="Jpan" typeface="游ゴシック Light"/>
+        <a:font script="Hang" typeface="맑은 고딕"/>
+        <a:font script="Hans" typeface="等线 Light"/>
+        <a:font script="Hant" typeface="新細明體"/>
+        <a:font script="Arab" typeface="Times New Roman"/>
+        <a:font script="Hebr" typeface="Times New Roman"/>
+        <a:font script="Thai" typeface="Angsana New"/>
+        <a:font script="Ethi" typeface="Nyala"/>
+        <a:font script="Beng" typeface="Vrinda"/>
+        <a:font script="Gujr" typeface="Shruti"/>
+        <a:font script="Khmr" typeface="MoolBoran"/>
+        <a:font script="Knda" typeface="Tunga"/>
+        <a:font script="Guru" typeface="Raavi"/>
+        <a:font script="Cans" typeface="Euphemia"/>
+        <a:font script="Cher" typeface="Plantagenet Cherokee"/>
+        <a:font script="Yiii" typeface="Microsoft Yi Baiti"/>
+        <a:font script="Tibt" typeface="Microsoft Himalaya"/>
+        <a:font script="Thaa" typeface="MV Boli"/>
+        <a:font script="Deva" typeface="Mangal"/>
+        <a:font script="Telu" typeface="Gautami"/>
+        <a:font script="Taml" typeface="Latha"/>
+        <a:font script="Syrc" typeface="Estrangelo Edessa"/>
+        <a:font script="Orya" typeface="Kalinga"/>
+        <a:font script="Mlym" typeface="Kartika"/>
+        <a:font script="Laoo" typeface="DokChampa"/>
+        <a:font script="Sinh" typeface="Iskoola Pota"/>
+        <a:font script="Mong" typeface="Mongolian Baiti"/>
+        <a:font script="Viet" typeface="Times New Roman"/>
+        <a:font script="Uigh" typeface="Microsoft Uighur"/>
+        <a:font script="Geor" typeface="Sylfaen"/>
+        <a:font script="Armn" typeface="Arial"/>
+        <a:font script="Bugi" typeface="Leelawadee UI"/>
+        <a:font script="Bopo" typeface="Microsoft JhengHei"/>
+        <a:font script="Java" typeface="Javanese Text"/>
+        <a:font script="Lisu" typeface="Segoe UI"/>
+        <a:font script="Mymr" typeface="Myanmar Text"/>
+        <a:font script="Nkoo" typeface="Ebrima"/>
+        <a:font script="Olck" typeface="Nirmala UI"/>
+        <a:font script="Osma" typeface="Ebrima"/>
+        <a:font script="Phag" typeface="Phagspa"/>
+        <a:font script="Syrn" typeface="Estrangelo Edessa"/>
+        <a:font script="Syrj" typeface="Estrangelo Edessa"/>
+        <a:font script="Syre" typeface="Estrangelo Edessa"/>
+        <a:font script="Sora" typeface="Nirmala UI"/>
+        <a:font script="Tale" typeface="Microsoft Tai Le"/>
+        <a:font script="Talu" typeface="Microsoft New Tai Lue"/>
+        <a:font script="Tfng" typeface="Ebrima"/>
+      </a:majorFont>
+      <a:minorFont>
+        <a:latin typeface="Aptos" panose="02110004020202020204"/>
+        <a:ea typeface=""/>
+        <a:cs typeface=""/>
+        <a:font script="Jpan" typeface="游ゴシック"/>
+        <a:font script="Hang" typeface="맑은 고딕"/>
+        <a:font script="Hans" typeface="等线"/>
+        <a:font script="Hant" typeface="新細明體"/>
+        <a:font script="Arab" typeface="Arial"/>
+        <a:font script="Hebr" typeface="Arial"/>
+        <a:font script="Thai" typeface="Cordia New"/>
+        <a:font script="Ethi" typeface="Nyala"/>
+        <a:font script="Beng" typeface="Vrinda"/>
+        <a:font script="Gujr" typeface="Shruti"/>
+        <a:font script="Khmr" typeface="DaunPenh"/>
+        <a:font script="Knda" typeface="Tunga"/>
+        <a:font script="Guru" typeface="Raavi"/>
+        <a:font script="Cans" typeface="Euphemia"/>
+        <a:font script="Cher" typeface="Plantagenet Cherokee"/>
+        <a:font script="Yiii" typeface="Microsoft Yi Baiti"/>
+        <a:font script="Tibt" typeface="Microsoft Himalaya"/>
+        <a:font script="Thaa" typeface="MV Boli"/>
+        <a:font script="Deva" typeface="Mangal"/>
+        <a:font script="Telu" typeface="Gautami"/>
+        <a:font script="Taml" typeface="Latha"/>
+        <a:font script="Syrc" typeface="Estrangelo Edessa"/>
+        <a:font script="Orya" typeface="Kalinga"/>
+        <a:font script="Mlym" typeface="Kartika"/>
+        <a:font script="Laoo" typeface="DokChampa"/>
+        <a:font script="Sinh" typeface="Iskoola Pota"/>
+        <a:font script="Mong" typeface="Mongolian Baiti"/>
+        <a:font script="Viet" typeface="Arial"/>
+        <a:font script="Uigh" typeface="Microsoft Uighur"/>
+        <a:font script="Geor" typeface="Sylfaen"/>
+        <a:font script="Armn" typeface="Arial"/>
+        <a:font script="Bugi" typeface="Leelawadee UI"/>
+        <a:font script="Bopo" typeface="Microsoft JhengHei"/>
+        <a:font script="Java" typeface="Javanese Text"/>
+        <a:font script="Lisu" typeface="Segoe UI"/>
+        <a:font script="Mymr" typeface="Myanmar Text"/>
+        <a:font script="Nkoo" typeface="Ebrima"/>
+        <a:font script="Olck" typeface="Nirmala UI"/>
+        <a:font script="Osma" typeface="Ebrima"/>
+        <a:font script="Phag" typeface="Phagspa"/>
+        <a:font script="Syrn" typeface="Estrangelo Edessa"/>
+        <a:font script="Syrj" typeface="Estrangelo Edessa"/>
+        <a:font script="Syre" typeface="Estrangelo Edessa"/>
+        <a:font script="Sora" typeface="Nirmala UI"/>
+        <a:font script="Tale" typeface="Microsoft Tai Le"/>
+        <a:font script="Talu" typeface="Microsoft New Tai Lue"/>
+        <a:font script="Tfng" typeface="Ebrima"/>
+      </a:minorFont>
+    </a:fontScheme>
+    <a:fmtScheme name="Office">
+      <a:fillStyleLst>
+        <a:solidFill>
+          <a:schemeClr val="phClr"/>
+        </a:solidFill>
+        <a:gradFill rotWithShape="1">
+          <a:gsLst>
+            <a:gs pos="0">
+              <a:schemeClr val="phClr">
+                <a:lumMod val="110000"/>
+                <a:satMod val="105000"/>
+                <a:tint val="67000"/>
+              </a:schemeClr>
+            </a:gs>
+            <a:gs pos="50000">
+              <a:schemeClr val="phClr">
+                <a:lumMod val="105000"/>
+                <a:satMod val="103000"/>
+                <a:tint val="73000"/>
+              </a:schemeClr>
+            </a:gs>
+            <a:gs pos="100000">
+              <a:schemeClr val="phClr">
+                <a:lumMod val="105000"/>
+                <a:satMod val="109000"/>
+                <a:tint val="81000"/>
+              </a:schemeClr>
+            </a:gs>
+          </a:gsLst>
+          <a:lin ang="5400000" scaled="0"/>
+        </a:gradFill>
+        <a:gradFill rotWithShape="1">
+          <a:gsLst>
+            <a:gs pos="0">
+              <a:schemeClr val="phClr">
+                <a:satMod val="103000"/>
+                <a:lumMod val="102000"/>
+                <a:tint val="94000"/>
+              </a:schemeClr>
+            </a:gs>
+            <a:gs pos="50000">
+              <a:schemeClr val="phClr">
+                <a:satMod val="110000"/>
+                <a:lumMod val="100000"/>
+                <a:shade val="100000"/>
+              </a:schemeClr>
+            </a:gs>
+            <a:gs pos="100000">
+              <a:schemeClr val="phClr">
+                <a:lumMod val="99000"/>
+                <a:satMod val="120000"/>
+                <a:shade val="78000"/>
+              </a:schemeClr>
+            </a:gs>
+          </a:gsLst>
+          <a:lin ang="5400000" scaled="0"/>
+        </a:gradFill>
+      </a:fillStyleLst>
+      <a:lnStyleLst>
+        <a:ln w="12700" cap="flat" cmpd="sng" algn="ctr">
+          <a:solidFill>
+            <a:schemeClr val="phClr"/>
+          </a:solidFill>
+          <a:prstDash val="solid"/>
+          <a:miter lim="800000"/>
+        </a:ln>
+        <a:ln w="19050" cap="flat" cmpd="sng" algn="ctr">
+          <a:solidFill>
+            <a:schemeClr val="phClr"/>
+          </a:solidFill>
+          <a:prstDash val="solid"/>
+          <a:miter lim="800000"/>
+        </a:ln>
+        <a:ln w="25400" cap="flat" cmpd="sng" algn="ctr">
+          <a:solidFill>
+            <a:schemeClr val="phClr"/>
+          </a:solidFill>
+          <a:prstDash val="solid"/>
+          <a:miter lim="800000"/>
+        </a:ln>
+      </a:lnStyleLst>
+      <a:effectStyleLst>
+        <a:effectStyle>
+          <a:effectLst/>
+        </a:effectStyle>
+        <a:effectStyle>
+          <a:effectLst/>
+        </a:effectStyle>
+        <a:effectStyle>
+          <a:effectLst>
+            <a:outerShdw blurRad="57150" dist="19050" dir="5400000" algn="ctr" rotWithShape="0">
+              <a:srgbClr val="000000">
+                <a:alpha val="63000"/>
+              </a:srgbClr>
+            </a:outerShdw>
+          </a:effectLst>
+        </a:effectStyle>
+      </a:effectStyleLst>
+      <a:bgFillStyleLst>
+        <a:solidFill>
+          <a:schemeClr val="phClr"/>
+        </a:solidFill>
+        <a:solidFill>
+          <a:schemeClr val="phClr">
+            <a:tint val="95000"/>
+            <a:satMod val="170000"/>
+          </a:schemeClr>
+        </a:solidFill>
+        <a:gradFill rotWithShape="1">
+          <a:gsLst>
+            <a:gs pos="0">
+              <a:schemeClr val="phClr">
+                <a:tint val="93000"/>
+                <a:satMod val="150000"/>
+                <a:shade val="98000"/>
+                <a:lumMod val="102000"/>
+              </a:schemeClr>
+            </a:gs>
+            <a:gs pos="50000">
+              <a:schemeClr val="phClr">
+                <a:tint val="98000"/>
+                <a:satMod val="130000"/>
+                <a:shade val="90000"/>
+                <a:lumMod val="103000"/>
+              </a:schemeClr>
+            </a:gs>
+            <a:gs pos="100000">
+              <a:schemeClr val="phClr">
+                <a:shade val="63000"/>
+                <a:satMod val="120000"/>
+              </a:schemeClr>
+            </a:gs>
+          </a:gsLst>
+          <a:lin ang="5400000" scaled="0"/>
+        </a:gradFill>
+      </a:bgFillStyleLst>
+    </a:fmtScheme>
+  </a:themeElements>
+  <a:objectDefaults>
+    <a:lnDef>
+      <a:spPr/>
+      <a:bodyPr/>
+      <a:lstStyle/>
+      <a:style>
+        <a:lnRef idx="2">
+          <a:schemeClr val="accent1"/>
+        </a:lnRef>
+        <a:fillRef idx="0">
+          <a:schemeClr val="accent1"/>
+        </a:fillRef>
+        <a:effectRef idx="1">
+          <a:schemeClr val="accent1"/>
+        </a:effectRef>
+        <a:fontRef idx="minor">
+          <a:schemeClr val="tx1"/>
+        </a:fontRef>
+      </a:style>
+    </a:lnDef>
+  </a:objectDefaults>
+  <a:extraClrSchemeLst/>
+  <a:extLst>
+    <a:ext uri="{05A4C25C-085E-4340-85A3-A5531E510DB2}">
+      <thm15:themeFamily xmlns:thm15="http://schemas.microsoft.com/office/thememl/2012/main" name="Office Theme" id="{2E142A2C-CD16-42D6-873A-C26D2A0506FA}" vid="{1BDDFF52-6CD6-40A5-AB3C-68EB2F1E4D0A}"/>
+    </a:ext>
+  </a:extLst>
+</a:theme>
 </file>